--- a/Presentations/Intermediate Presentation/Intermediate Presentation.pptx
+++ b/Presentations/Intermediate Presentation/Intermediate Presentation.pptx
@@ -4,6 +4,9 @@
   <p:sldMasterIdLst>
     <p:sldMasterId id="2147483648" r:id="rId1"/>
   </p:sldMasterIdLst>
+  <p:notesMasterIdLst>
+    <p:notesMasterId r:id="rId14"/>
+  </p:notesMasterIdLst>
   <p:sldIdLst>
     <p:sldId id="256" r:id="rId2"/>
     <p:sldId id="257" r:id="rId3"/>
@@ -18,9 +21,6 @@
     <p:sldId id="266" r:id="rId12"/>
     <p:sldId id="267" r:id="rId13"/>
   </p:sldIdLst>
-  <p:notesMasterIdLst>
-    <p:notesMasterId r:id="rId14"/>
-  </p:notesMasterIdLst>
   <p:sldSz cx="12192000" cy="6858000"/>
   <p:notesSz cx="6858000" cy="12192000"/>
   <p:defaultTextStyle>
@@ -118,7 +118,7 @@
   <p:extLst>
     <p:ext uri="{521415D9-36F7-43E2-AB2F-B90AF26B5E84}">
       <p14:sectionLst xmlns:p14="http://schemas.microsoft.com/office/powerpoint/2010/main">
-        <p14:section name="Proposal" id="{f4f12325-6da0-1078-551a-255aef348849}">
+        <p14:section name="Proposal" id="{F4F12325-6DA0-1078-551A-255AEF348849}">
           <p14:sldIdLst>
             <p14:sldId id="256"/>
             <p14:sldId id="257"/>
@@ -143,10 +143,89 @@
 </p:presentation>
 </file>
 
+<file path=ppt/changesInfos/changesInfo1.xml><?xml version="1.0" encoding="utf-8"?>
+<pc:chgInfo xmlns:a="http://schemas.openxmlformats.org/drawingml/2006/main" xmlns:r="http://schemas.openxmlformats.org/officeDocument/2006/relationships" xmlns:ac="http://schemas.microsoft.com/office/drawing/2013/main/command" xmlns:pc="http://schemas.microsoft.com/office/powerpoint/2013/main/command">
+  <pc:docChgLst>
+    <pc:chgData name="Logan Digilormo" userId="35c6cc2b8c32088b" providerId="LiveId" clId="{F2B2F86D-CA85-4A5A-B436-5E6A47CCA2F5}"/>
+    <pc:docChg chg="undo custSel modSld">
+      <pc:chgData name="Logan Digilormo" userId="35c6cc2b8c32088b" providerId="LiveId" clId="{F2B2F86D-CA85-4A5A-B436-5E6A47CCA2F5}" dt="2026-10-30T18:18:46.265" v="1101" actId="20577"/>
+      <pc:docMkLst>
+        <pc:docMk/>
+      </pc:docMkLst>
+      <pc:sldChg chg="modNotesTx">
+        <pc:chgData name="Logan Digilormo" userId="35c6cc2b8c32088b" providerId="LiveId" clId="{F2B2F86D-CA85-4A5A-B436-5E6A47CCA2F5}" dt="2026-10-30T17:50:06.149" v="6" actId="20577"/>
+        <pc:sldMkLst>
+          <pc:docMk/>
+          <pc:sldMk cId="0" sldId="256"/>
+        </pc:sldMkLst>
+      </pc:sldChg>
+      <pc:sldChg chg="modNotesTx">
+        <pc:chgData name="Logan Digilormo" userId="35c6cc2b8c32088b" providerId="LiveId" clId="{F2B2F86D-CA85-4A5A-B436-5E6A47CCA2F5}" dt="2026-10-30T17:50:27.093" v="14" actId="20577"/>
+        <pc:sldMkLst>
+          <pc:docMk/>
+          <pc:sldMk cId="0" sldId="257"/>
+        </pc:sldMkLst>
+      </pc:sldChg>
+      <pc:sldChg chg="modNotesTx">
+        <pc:chgData name="Logan Digilormo" userId="35c6cc2b8c32088b" providerId="LiveId" clId="{F2B2F86D-CA85-4A5A-B436-5E6A47CCA2F5}" dt="2026-10-30T17:52:27.260" v="22" actId="20577"/>
+        <pc:sldMkLst>
+          <pc:docMk/>
+          <pc:sldMk cId="0" sldId="258"/>
+        </pc:sldMkLst>
+      </pc:sldChg>
+      <pc:sldChg chg="modNotesTx">
+        <pc:chgData name="Logan Digilormo" userId="35c6cc2b8c32088b" providerId="LiveId" clId="{F2B2F86D-CA85-4A5A-B436-5E6A47CCA2F5}" dt="2026-10-30T17:53:39.277" v="68" actId="20577"/>
+        <pc:sldMkLst>
+          <pc:docMk/>
+          <pc:sldMk cId="0" sldId="259"/>
+        </pc:sldMkLst>
+      </pc:sldChg>
+      <pc:sldChg chg="modNotesTx">
+        <pc:chgData name="Logan Digilormo" userId="35c6cc2b8c32088b" providerId="LiveId" clId="{F2B2F86D-CA85-4A5A-B436-5E6A47CCA2F5}" dt="2026-10-30T18:03:41.122" v="184" actId="20577"/>
+        <pc:sldMkLst>
+          <pc:docMk/>
+          <pc:sldMk cId="0" sldId="260"/>
+        </pc:sldMkLst>
+      </pc:sldChg>
+      <pc:sldChg chg="modNotesTx">
+        <pc:chgData name="Logan Digilormo" userId="35c6cc2b8c32088b" providerId="LiveId" clId="{F2B2F86D-CA85-4A5A-B436-5E6A47CCA2F5}" dt="2026-10-30T18:05:35.127" v="513" actId="20577"/>
+        <pc:sldMkLst>
+          <pc:docMk/>
+          <pc:sldMk cId="0" sldId="261"/>
+        </pc:sldMkLst>
+      </pc:sldChg>
+      <pc:sldChg chg="modNotesTx">
+        <pc:chgData name="Logan Digilormo" userId="35c6cc2b8c32088b" providerId="LiveId" clId="{F2B2F86D-CA85-4A5A-B436-5E6A47CCA2F5}" dt="2026-10-30T18:12:09.064" v="822" actId="20577"/>
+        <pc:sldMkLst>
+          <pc:docMk/>
+          <pc:sldMk cId="0" sldId="263"/>
+        </pc:sldMkLst>
+      </pc:sldChg>
+      <pc:sldChg chg="modNotesTx">
+        <pc:chgData name="Logan Digilormo" userId="35c6cc2b8c32088b" providerId="LiveId" clId="{F2B2F86D-CA85-4A5A-B436-5E6A47CCA2F5}" dt="2026-10-30T18:16:46.321" v="969" actId="20577"/>
+        <pc:sldMkLst>
+          <pc:docMk/>
+          <pc:sldMk cId="0" sldId="265"/>
+        </pc:sldMkLst>
+      </pc:sldChg>
+      <pc:sldChg chg="modNotesTx">
+        <pc:chgData name="Logan Digilormo" userId="35c6cc2b8c32088b" providerId="LiveId" clId="{F2B2F86D-CA85-4A5A-B436-5E6A47CCA2F5}" dt="2026-10-30T18:18:46.265" v="1101" actId="20577"/>
+        <pc:sldMkLst>
+          <pc:docMk/>
+          <pc:sldMk cId="0" sldId="267"/>
+        </pc:sldMkLst>
+      </pc:sldChg>
+    </pc:docChg>
+  </pc:docChgLst>
+</pc:chgInfo>
+</file>
+
 <file path=ppt/charts/chart1.xml><?xml version="1.0" encoding="utf-8"?>
-<c:chartSpace xmlns:c="http://schemas.openxmlformats.org/drawingml/2006/chart" xmlns:a="http://schemas.openxmlformats.org/drawingml/2006/main" xmlns:r="http://schemas.openxmlformats.org/officeDocument/2006/relationships">
+<c:chartSpace xmlns:c="http://schemas.openxmlformats.org/drawingml/2006/chart" xmlns:a="http://schemas.openxmlformats.org/drawingml/2006/main" xmlns:r="http://schemas.openxmlformats.org/officeDocument/2006/relationships" xmlns:c16r2="http://schemas.microsoft.com/office/drawing/2015/06/chart">
   <c:date1904 val="0"/>
+  <c:lang val="en-US"/>
   <c:roundedCorners val="1"/>
+  <c:style val="2"/>
   <c:chart>
     <c:autoTitleDeleted val="1"/>
     <c:plotArea>
@@ -176,75 +255,49 @@
             <a:effectLst/>
           </c:spPr>
           <c:invertIfNegative val="0"/>
-          <c:dLbls>
-            <c:numFmt formatCode="#,##0" sourceLinked="0"/>
-            <c:txPr>
-              <a:bodyPr/>
-              <a:lstStyle/>
-              <a:p>
-                <a:pPr>
-                  <a:defRPr b="0" i="0" strike="noStrike" sz="1200" u="none">
-                    <a:solidFill>
-                      <a:srgbClr val="000000"/>
-                    </a:solidFill>
-                    <a:latin typeface="Arial"/>
-                  </a:defRPr>
-                </a:pPr>
-              </a:p>
-            </c:txPr>
-            <c:showLegendKey val="0"/>
-            <c:showVal val="0"/>
-            <c:showCatName val="0"/>
-            <c:showSerName val="0"/>
-            <c:showPercent val="0"/>
-            <c:showBubbleSize val="0"/>
-            <c:showLeaderLines val="0"/>
-          </c:dLbls>
           <c:cat>
-            <c:multiLvlStrRef>
+            <c:strRef>
               <c:f>Sheet1!$A$2:$A$13</c:f>
-              <c:multiLvlStrCache>
+              <c:strCache>
                 <c:ptCount val="12"/>
-                <c:lvl>
-                  <c:pt idx="0">
-                    <c:v>PC1</c:v>
-                  </c:pt>
-                  <c:pt idx="1">
-                    <c:v>PC2</c:v>
-                  </c:pt>
-                  <c:pt idx="2">
-                    <c:v>PC3</c:v>
-                  </c:pt>
-                  <c:pt idx="3">
-                    <c:v>PC4</c:v>
-                  </c:pt>
-                  <c:pt idx="4">
-                    <c:v>PC5</c:v>
-                  </c:pt>
-                  <c:pt idx="5">
-                    <c:v>PC6</c:v>
-                  </c:pt>
-                  <c:pt idx="6">
-                    <c:v>PC7</c:v>
-                  </c:pt>
-                  <c:pt idx="7">
-                    <c:v>PC8</c:v>
-                  </c:pt>
-                  <c:pt idx="8">
-                    <c:v>PC9</c:v>
-                  </c:pt>
-                  <c:pt idx="9">
-                    <c:v>PC10</c:v>
-                  </c:pt>
-                  <c:pt idx="10">
-                    <c:v>PC11</c:v>
-                  </c:pt>
-                  <c:pt idx="11">
-                    <c:v>PC12</c:v>
-                  </c:pt>
-                </c:lvl>
-              </c:multiLvlStrCache>
-            </c:multiLvlStrRef>
+                <c:pt idx="0">
+                  <c:v>PC1</c:v>
+                </c:pt>
+                <c:pt idx="1">
+                  <c:v>PC2</c:v>
+                </c:pt>
+                <c:pt idx="2">
+                  <c:v>PC3</c:v>
+                </c:pt>
+                <c:pt idx="3">
+                  <c:v>PC4</c:v>
+                </c:pt>
+                <c:pt idx="4">
+                  <c:v>PC5</c:v>
+                </c:pt>
+                <c:pt idx="5">
+                  <c:v>PC6</c:v>
+                </c:pt>
+                <c:pt idx="6">
+                  <c:v>PC7</c:v>
+                </c:pt>
+                <c:pt idx="7">
+                  <c:v>PC8</c:v>
+                </c:pt>
+                <c:pt idx="8">
+                  <c:v>PC9</c:v>
+                </c:pt>
+                <c:pt idx="9">
+                  <c:v>PC10</c:v>
+                </c:pt>
+                <c:pt idx="10">
+                  <c:v>PC11</c:v>
+                </c:pt>
+                <c:pt idx="11">
+                  <c:v>PC12</c:v>
+                </c:pt>
+              </c:strCache>
+            </c:strRef>
           </c:cat>
           <c:val>
             <c:numRef>
@@ -253,74 +306,61 @@
                 <c:formatCode>General</c:formatCode>
                 <c:ptCount val="12"/>
                 <c:pt idx="0">
-                  <c:v>0.0865</c:v>
+                  <c:v>8.6499999999999994E-2</c:v>
                 </c:pt>
                 <c:pt idx="1">
-                  <c:v>0.0839</c:v>
+                  <c:v>8.3900000000000002E-2</c:v>
                 </c:pt>
                 <c:pt idx="2">
-                  <c:v>0.0619</c:v>
+                  <c:v>6.1899999999999997E-2</c:v>
                 </c:pt>
                 <c:pt idx="3">
-                  <c:v>0.0506</c:v>
+                  <c:v>5.0599999999999999E-2</c:v>
                 </c:pt>
                 <c:pt idx="4">
-                  <c:v>0.0439</c:v>
+                  <c:v>4.3900000000000002E-2</c:v>
                 </c:pt>
                 <c:pt idx="5">
-                  <c:v>0.0407</c:v>
+                  <c:v>4.07E-2</c:v>
                 </c:pt>
                 <c:pt idx="6">
-                  <c:v>0.0375</c:v>
+                  <c:v>3.7499999999999999E-2</c:v>
                 </c:pt>
                 <c:pt idx="7">
-                  <c:v>0.0364</c:v>
+                  <c:v>3.6400000000000002E-2</c:v>
                 </c:pt>
                 <c:pt idx="8">
-                  <c:v>0.0359</c:v>
+                  <c:v>3.5900000000000001E-2</c:v>
                 </c:pt>
                 <c:pt idx="9">
-                  <c:v>0.0355</c:v>
+                  <c:v>3.5499999999999997E-2</c:v>
                 </c:pt>
                 <c:pt idx="10">
-                  <c:v>0.0353</c:v>
+                  <c:v>3.5299999999999998E-2</c:v>
                 </c:pt>
                 <c:pt idx="11">
-                  <c:v>0.0352</c:v>
+                  <c:v>3.5200000000000002E-2</c:v>
                 </c:pt>
               </c:numCache>
             </c:numRef>
           </c:val>
+          <c:extLst>
+            <c:ext xmlns:c16="http://schemas.microsoft.com/office/drawing/2014/chart" uri="{C3380CC4-5D6E-409C-BE32-E72D297353CC}">
+              <c16:uniqueId val="{00000000-F02A-48F4-8CEF-82CEBFD1CA3A}"/>
+            </c:ext>
+          </c:extLst>
         </c:ser>
         <c:dLbls>
-          <c:numFmt formatCode="#,##0" sourceLinked="0"/>
-          <c:txPr>
-            <a:bodyPr/>
-            <a:lstStyle/>
-            <a:p>
-              <a:pPr>
-                <a:defRPr b="0" i="0" strike="noStrike" sz="1200" u="none">
-                  <a:solidFill>
-                    <a:srgbClr val="000000"/>
-                  </a:solidFill>
-                  <a:latin typeface="Arial"/>
-                </a:defRPr>
-              </a:pPr>
-            </a:p>
-          </c:txPr>
           <c:showLegendKey val="0"/>
           <c:showVal val="0"/>
           <c:showCatName val="0"/>
           <c:showSerName val="0"/>
           <c:showPercent val="0"/>
           <c:showBubbleSize val="0"/>
-          <c:showLeaderLines val="0"/>
         </c:dLbls>
         <c:gapWidth val="150"/>
-        <c:overlap val="0"/>
         <c:axId val="2094734554"/>
         <c:axId val="2094734552"/>
-        <c:axId val="2094734556"/>
       </c:barChart>
       <c:catAx>
         <c:axId val="2094734554"/>
@@ -361,6 +401,7 @@
         <c:crosses val="autoZero"/>
         <c:auto val="1"/>
         <c:lblAlgn val="ctr"/>
+        <c:lblOffset val="100"/>
         <c:noMultiLvlLbl val="1"/>
       </c:catAx>
       <c:valAx>
@@ -412,6 +453,7 @@
     </c:plotArea>
     <c:plotVisOnly val="1"/>
     <c:dispBlanksAs val="span"/>
+    <c:showDLblsOverMax val="1"/>
   </c:chart>
   <c:spPr>
     <a:noFill/>
@@ -427,9 +469,11 @@
 </file>
 
 <file path=ppt/charts/chart2.xml><?xml version="1.0" encoding="utf-8"?>
-<c:chartSpace xmlns:c="http://schemas.openxmlformats.org/drawingml/2006/chart" xmlns:a="http://schemas.openxmlformats.org/drawingml/2006/main" xmlns:r="http://schemas.openxmlformats.org/officeDocument/2006/relationships">
+<c:chartSpace xmlns:c="http://schemas.openxmlformats.org/drawingml/2006/chart" xmlns:a="http://schemas.openxmlformats.org/drawingml/2006/main" xmlns:r="http://schemas.openxmlformats.org/officeDocument/2006/relationships" xmlns:c16r2="http://schemas.microsoft.com/office/drawing/2015/06/chart">
   <c:date1904 val="0"/>
+  <c:lang val="en-US"/>
   <c:roundedCorners val="1"/>
+  <c:style val="2"/>
   <c:chart>
     <c:autoTitleDeleted val="1"/>
     <c:plotArea>
@@ -461,18 +505,26 @@
           <c:invertIfNegative val="0"/>
           <c:dLbls>
             <c:numFmt formatCode="0.00" sourceLinked="0"/>
+            <c:spPr>
+              <a:noFill/>
+              <a:ln>
+                <a:noFill/>
+              </a:ln>
+              <a:effectLst/>
+            </c:spPr>
             <c:txPr>
               <a:bodyPr/>
               <a:lstStyle/>
               <a:p>
                 <a:pPr>
-                  <a:defRPr b="0" i="0" strike="noStrike" sz="1100" u="none">
+                  <a:defRPr sz="1100" b="0" i="0" u="none" strike="noStrike">
                     <a:solidFill>
                       <a:srgbClr val="000000"/>
                     </a:solidFill>
                     <a:latin typeface="Arial"/>
                   </a:defRPr>
                 </a:pPr>
+                <a:endParaRPr lang="en-US"/>
               </a:p>
             </c:txPr>
             <c:showLegendKey val="0"/>
@@ -482,28 +534,31 @@
             <c:showPercent val="0"/>
             <c:showBubbleSize val="0"/>
             <c:showLeaderLines val="0"/>
+            <c:extLst>
+              <c:ext xmlns:c15="http://schemas.microsoft.com/office/drawing/2012/chart" uri="{CE6537A1-D6FC-4f65-9D91-7224C49458BB}">
+                <c15:showLeaderLines val="0"/>
+              </c:ext>
+            </c:extLst>
           </c:dLbls>
           <c:cat>
-            <c:multiLvlStrRef>
+            <c:strRef>
               <c:f>Sheet1!$A$2:$A$5</c:f>
-              <c:multiLvlStrCache>
+              <c:strCache>
                 <c:ptCount val="4"/>
-                <c:lvl>
-                  <c:pt idx="0">
-                    <c:v>Logistic regression</c:v>
-                  </c:pt>
-                  <c:pt idx="1">
-                    <c:v>Decision tree</c:v>
-                  </c:pt>
-                  <c:pt idx="2">
-                    <c:v>Random forest</c:v>
-                  </c:pt>
-                  <c:pt idx="3">
-                    <c:v>Gradient boosting</c:v>
-                  </c:pt>
-                </c:lvl>
-              </c:multiLvlStrCache>
-            </c:multiLvlStrRef>
+                <c:pt idx="0">
+                  <c:v>Logistic regression</c:v>
+                </c:pt>
+                <c:pt idx="1">
+                  <c:v>Decision tree</c:v>
+                </c:pt>
+                <c:pt idx="2">
+                  <c:v>Random forest</c:v>
+                </c:pt>
+                <c:pt idx="3">
+                  <c:v>Gradient boosting</c:v>
+                </c:pt>
+              </c:strCache>
+            </c:strRef>
           </c:cat>
           <c:val>
             <c:numRef>
@@ -512,13 +567,13 @@
                 <c:formatCode>General</c:formatCode>
                 <c:ptCount val="4"/>
                 <c:pt idx="0">
-                  <c:v>0.006</c:v>
+                  <c:v>6.0000000000000001E-3</c:v>
                 </c:pt>
                 <c:pt idx="1">
-                  <c:v>0.689</c:v>
+                  <c:v>0.68899999999999995</c:v>
                 </c:pt>
                 <c:pt idx="2">
-                  <c:v>0.764</c:v>
+                  <c:v>0.76400000000000001</c:v>
                 </c:pt>
                 <c:pt idx="3">
                   <c:v>0.66</c:v>
@@ -526,6 +581,11 @@
               </c:numCache>
             </c:numRef>
           </c:val>
+          <c:extLst>
+            <c:ext xmlns:c16="http://schemas.microsoft.com/office/drawing/2014/chart" uri="{C3380CC4-5D6E-409C-BE32-E72D297353CC}">
+              <c16:uniqueId val="{00000000-43B4-4BE0-A2DB-984F6CE35CB1}"/>
+            </c:ext>
+          </c:extLst>
         </c:ser>
         <c:ser>
           <c:idx val="1"/>
@@ -550,18 +610,26 @@
           <c:invertIfNegative val="0"/>
           <c:dLbls>
             <c:numFmt formatCode="0.00" sourceLinked="0"/>
+            <c:spPr>
+              <a:noFill/>
+              <a:ln>
+                <a:noFill/>
+              </a:ln>
+              <a:effectLst/>
+            </c:spPr>
             <c:txPr>
               <a:bodyPr/>
               <a:lstStyle/>
               <a:p>
                 <a:pPr>
-                  <a:defRPr b="0" i="0" strike="noStrike" sz="1100" u="none">
+                  <a:defRPr sz="1100" b="0" i="0" u="none" strike="noStrike">
                     <a:solidFill>
                       <a:srgbClr val="000000"/>
                     </a:solidFill>
                     <a:latin typeface="Arial"/>
                   </a:defRPr>
                 </a:pPr>
+                <a:endParaRPr lang="en-US"/>
               </a:p>
             </c:txPr>
             <c:showLegendKey val="0"/>
@@ -571,28 +639,31 @@
             <c:showPercent val="0"/>
             <c:showBubbleSize val="0"/>
             <c:showLeaderLines val="0"/>
+            <c:extLst>
+              <c:ext xmlns:c15="http://schemas.microsoft.com/office/drawing/2012/chart" uri="{CE6537A1-D6FC-4f65-9D91-7224C49458BB}">
+                <c15:showLeaderLines val="0"/>
+              </c:ext>
+            </c:extLst>
           </c:dLbls>
           <c:cat>
-            <c:multiLvlStrRef>
+            <c:strRef>
               <c:f>Sheet1!$A$2:$A$5</c:f>
-              <c:multiLvlStrCache>
+              <c:strCache>
                 <c:ptCount val="4"/>
-                <c:lvl>
-                  <c:pt idx="0">
-                    <c:v>Logistic regression</c:v>
-                  </c:pt>
-                  <c:pt idx="1">
-                    <c:v>Decision tree</c:v>
-                  </c:pt>
-                  <c:pt idx="2">
-                    <c:v>Random forest</c:v>
-                  </c:pt>
-                  <c:pt idx="3">
-                    <c:v>Gradient boosting</c:v>
-                  </c:pt>
-                </c:lvl>
-              </c:multiLvlStrCache>
-            </c:multiLvlStrRef>
+                <c:pt idx="0">
+                  <c:v>Logistic regression</c:v>
+                </c:pt>
+                <c:pt idx="1">
+                  <c:v>Decision tree</c:v>
+                </c:pt>
+                <c:pt idx="2">
+                  <c:v>Random forest</c:v>
+                </c:pt>
+                <c:pt idx="3">
+                  <c:v>Gradient boosting</c:v>
+                </c:pt>
+              </c:strCache>
+            </c:strRef>
           </c:cat>
           <c:val>
             <c:numRef>
@@ -601,50 +672,37 @@
                 <c:formatCode>General</c:formatCode>
                 <c:ptCount val="4"/>
                 <c:pt idx="0">
-                  <c:v>0.004</c:v>
+                  <c:v>4.0000000000000001E-3</c:v>
                 </c:pt>
                 <c:pt idx="1">
-                  <c:v>0.641</c:v>
+                  <c:v>0.64100000000000001</c:v>
                 </c:pt>
                 <c:pt idx="2">
                   <c:v>0.7</c:v>
                 </c:pt>
                 <c:pt idx="3">
-                  <c:v>0.506</c:v>
+                  <c:v>0.50600000000000001</c:v>
                 </c:pt>
               </c:numCache>
             </c:numRef>
           </c:val>
+          <c:extLst>
+            <c:ext xmlns:c16="http://schemas.microsoft.com/office/drawing/2014/chart" uri="{C3380CC4-5D6E-409C-BE32-E72D297353CC}">
+              <c16:uniqueId val="{00000001-43B4-4BE0-A2DB-984F6CE35CB1}"/>
+            </c:ext>
+          </c:extLst>
         </c:ser>
         <c:dLbls>
-          <c:numFmt formatCode="0.00" sourceLinked="0"/>
-          <c:txPr>
-            <a:bodyPr/>
-            <a:lstStyle/>
-            <a:p>
-              <a:pPr>
-                <a:defRPr b="0" i="0" strike="noStrike" sz="1100" u="none">
-                  <a:solidFill>
-                    <a:srgbClr val="000000"/>
-                  </a:solidFill>
-                  <a:latin typeface="Arial"/>
-                </a:defRPr>
-              </a:pPr>
-            </a:p>
-          </c:txPr>
           <c:showLegendKey val="0"/>
           <c:showVal val="1"/>
           <c:showCatName val="0"/>
           <c:showSerName val="0"/>
           <c:showPercent val="0"/>
           <c:showBubbleSize val="0"/>
-          <c:showLeaderLines val="0"/>
         </c:dLbls>
         <c:gapWidth val="150"/>
-        <c:overlap val="0"/>
         <c:axId val="2094734554"/>
         <c:axId val="2094734552"/>
-        <c:axId val="2094734556"/>
       </c:barChart>
       <c:catAx>
         <c:axId val="2094734554"/>
@@ -685,6 +743,7 @@
         <c:crosses val="autoZero"/>
         <c:auto val="1"/>
         <c:lblAlgn val="ctr"/>
+        <c:lblOffset val="100"/>
         <c:noMultiLvlLbl val="1"/>
       </c:catAx>
       <c:valAx>
@@ -743,7 +802,7 @@
         <a:lstStyle/>
         <a:p>
           <a:pPr>
-            <a:defRPr sz="1200">      </a:defRPr>
+            <a:defRPr sz="1200"/>
           </a:pPr>
           <a:endParaRPr lang="en-US"/>
         </a:p>
@@ -751,6 +810,7 @@
     </c:legend>
     <c:plotVisOnly val="1"/>
     <c:dispBlanksAs val="span"/>
+    <c:showDLblsOverMax val="1"/>
   </c:chart>
   <c:spPr>
     <a:noFill/>
@@ -766,9 +826,11 @@
 </file>
 
 <file path=ppt/charts/chart3.xml><?xml version="1.0" encoding="utf-8"?>
-<c:chartSpace xmlns:c="http://schemas.openxmlformats.org/drawingml/2006/chart" xmlns:a="http://schemas.openxmlformats.org/drawingml/2006/main" xmlns:r="http://schemas.openxmlformats.org/officeDocument/2006/relationships">
+<c:chartSpace xmlns:c="http://schemas.openxmlformats.org/drawingml/2006/chart" xmlns:a="http://schemas.openxmlformats.org/drawingml/2006/main" xmlns:r="http://schemas.openxmlformats.org/officeDocument/2006/relationships" xmlns:c16r2="http://schemas.microsoft.com/office/drawing/2015/06/chart">
   <c:date1904 val="0"/>
+  <c:lang val="en-US"/>
   <c:roundedCorners val="1"/>
+  <c:style val="2"/>
   <c:chart>
     <c:autoTitleDeleted val="1"/>
     <c:plotArea>
@@ -800,18 +862,26 @@
           <c:invertIfNegative val="0"/>
           <c:dLbls>
             <c:numFmt formatCode="0.00" sourceLinked="0"/>
+            <c:spPr>
+              <a:noFill/>
+              <a:ln>
+                <a:noFill/>
+              </a:ln>
+              <a:effectLst/>
+            </c:spPr>
             <c:txPr>
               <a:bodyPr/>
               <a:lstStyle/>
               <a:p>
                 <a:pPr>
-                  <a:defRPr b="0" i="0" strike="noStrike" sz="1000" u="none">
+                  <a:defRPr sz="1000" b="0" i="0" u="none" strike="noStrike">
                     <a:solidFill>
                       <a:srgbClr val="000000"/>
                     </a:solidFill>
                     <a:latin typeface="Arial"/>
                   </a:defRPr>
                 </a:pPr>
+                <a:endParaRPr lang="en-US"/>
               </a:p>
             </c:txPr>
             <c:showLegendKey val="0"/>
@@ -821,28 +891,31 @@
             <c:showPercent val="0"/>
             <c:showBubbleSize val="0"/>
             <c:showLeaderLines val="0"/>
+            <c:extLst>
+              <c:ext xmlns:c15="http://schemas.microsoft.com/office/drawing/2012/chart" uri="{CE6537A1-D6FC-4f65-9D91-7224C49458BB}">
+                <c15:showLeaderLines val="0"/>
+              </c:ext>
+            </c:extLst>
           </c:dLbls>
           <c:cat>
-            <c:multiLvlStrRef>
+            <c:strRef>
               <c:f>Sheet1!$A$2:$A$5</c:f>
-              <c:multiLvlStrCache>
+              <c:strCache>
                 <c:ptCount val="4"/>
-                <c:lvl>
-                  <c:pt idx="0">
-                    <c:v>Logistic reg.</c:v>
-                  </c:pt>
-                  <c:pt idx="1">
-                    <c:v>Decision tree</c:v>
-                  </c:pt>
-                  <c:pt idx="2">
-                    <c:v>Random forest</c:v>
-                  </c:pt>
-                  <c:pt idx="3">
-                    <c:v>Gradient boosting</c:v>
-                  </c:pt>
-                </c:lvl>
-              </c:multiLvlStrCache>
-            </c:multiLvlStrRef>
+                <c:pt idx="0">
+                  <c:v>Logistic reg.</c:v>
+                </c:pt>
+                <c:pt idx="1">
+                  <c:v>Decision tree</c:v>
+                </c:pt>
+                <c:pt idx="2">
+                  <c:v>Random forest</c:v>
+                </c:pt>
+                <c:pt idx="3">
+                  <c:v>Gradient boosting</c:v>
+                </c:pt>
+              </c:strCache>
+            </c:strRef>
           </c:cat>
           <c:val>
             <c:numRef>
@@ -851,13 +924,13 @@
                 <c:formatCode>General</c:formatCode>
                 <c:ptCount val="4"/>
                 <c:pt idx="0">
-                  <c:v>0.045</c:v>
+                  <c:v>4.4999999999999998E-2</c:v>
                 </c:pt>
                 <c:pt idx="1">
                   <c:v>0.68</c:v>
                 </c:pt>
                 <c:pt idx="2">
-                  <c:v>0.814</c:v>
+                  <c:v>0.81399999999999995</c:v>
                 </c:pt>
                 <c:pt idx="3">
                   <c:v>1</c:v>
@@ -865,6 +938,11 @@
               </c:numCache>
             </c:numRef>
           </c:val>
+          <c:extLst>
+            <c:ext xmlns:c16="http://schemas.microsoft.com/office/drawing/2014/chart" uri="{C3380CC4-5D6E-409C-BE32-E72D297353CC}">
+              <c16:uniqueId val="{00000000-36AF-4C64-A4D3-F4AAB48788F4}"/>
+            </c:ext>
+          </c:extLst>
         </c:ser>
         <c:ser>
           <c:idx val="1"/>
@@ -889,18 +967,26 @@
           <c:invertIfNegative val="0"/>
           <c:dLbls>
             <c:numFmt formatCode="0.00" sourceLinked="0"/>
+            <c:spPr>
+              <a:noFill/>
+              <a:ln>
+                <a:noFill/>
+              </a:ln>
+              <a:effectLst/>
+            </c:spPr>
             <c:txPr>
               <a:bodyPr/>
               <a:lstStyle/>
               <a:p>
                 <a:pPr>
-                  <a:defRPr b="0" i="0" strike="noStrike" sz="1000" u="none">
+                  <a:defRPr sz="1000" b="0" i="0" u="none" strike="noStrike">
                     <a:solidFill>
                       <a:srgbClr val="000000"/>
                     </a:solidFill>
                     <a:latin typeface="Arial"/>
                   </a:defRPr>
                 </a:pPr>
+                <a:endParaRPr lang="en-US"/>
               </a:p>
             </c:txPr>
             <c:showLegendKey val="0"/>
@@ -910,28 +996,31 @@
             <c:showPercent val="0"/>
             <c:showBubbleSize val="0"/>
             <c:showLeaderLines val="0"/>
+            <c:extLst>
+              <c:ext xmlns:c15="http://schemas.microsoft.com/office/drawing/2012/chart" uri="{CE6537A1-D6FC-4f65-9D91-7224C49458BB}">
+                <c15:showLeaderLines val="0"/>
+              </c:ext>
+            </c:extLst>
           </c:dLbls>
           <c:cat>
-            <c:multiLvlStrRef>
+            <c:strRef>
               <c:f>Sheet1!$A$2:$A$5</c:f>
-              <c:multiLvlStrCache>
+              <c:strCache>
                 <c:ptCount val="4"/>
-                <c:lvl>
-                  <c:pt idx="0">
-                    <c:v>Logistic reg.</c:v>
-                  </c:pt>
-                  <c:pt idx="1">
-                    <c:v>Decision tree</c:v>
-                  </c:pt>
-                  <c:pt idx="2">
-                    <c:v>Random forest</c:v>
-                  </c:pt>
-                  <c:pt idx="3">
-                    <c:v>Gradient boosting</c:v>
-                  </c:pt>
-                </c:lvl>
-              </c:multiLvlStrCache>
-            </c:multiLvlStrRef>
+                <c:pt idx="0">
+                  <c:v>Logistic reg.</c:v>
+                </c:pt>
+                <c:pt idx="1">
+                  <c:v>Decision tree</c:v>
+                </c:pt>
+                <c:pt idx="2">
+                  <c:v>Random forest</c:v>
+                </c:pt>
+                <c:pt idx="3">
+                  <c:v>Gradient boosting</c:v>
+                </c:pt>
+              </c:strCache>
+            </c:strRef>
           </c:cat>
           <c:val>
             <c:numRef>
@@ -940,20 +1029,25 @@
                 <c:formatCode>General</c:formatCode>
                 <c:ptCount val="4"/>
                 <c:pt idx="0">
-                  <c:v>0.032</c:v>
+                  <c:v>3.2000000000000001E-2</c:v>
                 </c:pt>
                 <c:pt idx="1">
-                  <c:v>0.646</c:v>
+                  <c:v>0.64600000000000002</c:v>
                 </c:pt>
                 <c:pt idx="2">
-                  <c:v>0.653</c:v>
+                  <c:v>0.65300000000000002</c:v>
                 </c:pt>
                 <c:pt idx="3">
-                  <c:v>0.173</c:v>
+                  <c:v>0.17299999999999999</c:v>
                 </c:pt>
               </c:numCache>
             </c:numRef>
           </c:val>
+          <c:extLst>
+            <c:ext xmlns:c16="http://schemas.microsoft.com/office/drawing/2014/chart" uri="{C3380CC4-5D6E-409C-BE32-E72D297353CC}">
+              <c16:uniqueId val="{00000001-36AF-4C64-A4D3-F4AAB48788F4}"/>
+            </c:ext>
+          </c:extLst>
         </c:ser>
         <c:ser>
           <c:idx val="2"/>
@@ -978,18 +1072,26 @@
           <c:invertIfNegative val="0"/>
           <c:dLbls>
             <c:numFmt formatCode="0.00" sourceLinked="0"/>
+            <c:spPr>
+              <a:noFill/>
+              <a:ln>
+                <a:noFill/>
+              </a:ln>
+              <a:effectLst/>
+            </c:spPr>
             <c:txPr>
               <a:bodyPr/>
               <a:lstStyle/>
               <a:p>
                 <a:pPr>
-                  <a:defRPr b="0" i="0" strike="noStrike" sz="1000" u="none">
+                  <a:defRPr sz="1000" b="0" i="0" u="none" strike="noStrike">
                     <a:solidFill>
                       <a:srgbClr val="000000"/>
                     </a:solidFill>
                     <a:latin typeface="Arial"/>
                   </a:defRPr>
                 </a:pPr>
+                <a:endParaRPr lang="en-US"/>
               </a:p>
             </c:txPr>
             <c:showLegendKey val="0"/>
@@ -999,28 +1101,31 @@
             <c:showPercent val="0"/>
             <c:showBubbleSize val="0"/>
             <c:showLeaderLines val="0"/>
+            <c:extLst>
+              <c:ext xmlns:c15="http://schemas.microsoft.com/office/drawing/2012/chart" uri="{CE6537A1-D6FC-4f65-9D91-7224C49458BB}">
+                <c15:showLeaderLines val="0"/>
+              </c:ext>
+            </c:extLst>
           </c:dLbls>
           <c:cat>
-            <c:multiLvlStrRef>
+            <c:strRef>
               <c:f>Sheet1!$A$2:$A$5</c:f>
-              <c:multiLvlStrCache>
+              <c:strCache>
                 <c:ptCount val="4"/>
-                <c:lvl>
-                  <c:pt idx="0">
-                    <c:v>Logistic reg.</c:v>
-                  </c:pt>
-                  <c:pt idx="1">
-                    <c:v>Decision tree</c:v>
-                  </c:pt>
-                  <c:pt idx="2">
-                    <c:v>Random forest</c:v>
-                  </c:pt>
-                  <c:pt idx="3">
-                    <c:v>Gradient boosting</c:v>
-                  </c:pt>
-                </c:lvl>
-              </c:multiLvlStrCache>
-            </c:multiLvlStrRef>
+                <c:pt idx="0">
+                  <c:v>Logistic reg.</c:v>
+                </c:pt>
+                <c:pt idx="1">
+                  <c:v>Decision tree</c:v>
+                </c:pt>
+                <c:pt idx="2">
+                  <c:v>Random forest</c:v>
+                </c:pt>
+                <c:pt idx="3">
+                  <c:v>Gradient boosting</c:v>
+                </c:pt>
+              </c:strCache>
+            </c:strRef>
           </c:cat>
           <c:val>
             <c:numRef>
@@ -1029,20 +1134,25 @@
                 <c:formatCode>General</c:formatCode>
                 <c:ptCount val="4"/>
                 <c:pt idx="0">
-                  <c:v>0.037</c:v>
+                  <c:v>3.6999999999999998E-2</c:v>
                 </c:pt>
                 <c:pt idx="1">
-                  <c:v>0.662</c:v>
+                  <c:v>0.66200000000000003</c:v>
                 </c:pt>
                 <c:pt idx="2">
-                  <c:v>0.725</c:v>
+                  <c:v>0.72499999999999998</c:v>
                 </c:pt>
                 <c:pt idx="3">
-                  <c:v>0.296</c:v>
+                  <c:v>0.29599999999999999</c:v>
                 </c:pt>
               </c:numCache>
             </c:numRef>
           </c:val>
+          <c:extLst>
+            <c:ext xmlns:c16="http://schemas.microsoft.com/office/drawing/2014/chart" uri="{C3380CC4-5D6E-409C-BE32-E72D297353CC}">
+              <c16:uniqueId val="{00000002-36AF-4C64-A4D3-F4AAB48788F4}"/>
+            </c:ext>
+          </c:extLst>
         </c:ser>
         <c:ser>
           <c:idx val="3"/>
@@ -1067,18 +1177,26 @@
           <c:invertIfNegative val="0"/>
           <c:dLbls>
             <c:numFmt formatCode="0.00" sourceLinked="0"/>
+            <c:spPr>
+              <a:noFill/>
+              <a:ln>
+                <a:noFill/>
+              </a:ln>
+              <a:effectLst/>
+            </c:spPr>
             <c:txPr>
               <a:bodyPr/>
               <a:lstStyle/>
               <a:p>
                 <a:pPr>
-                  <a:defRPr b="0" i="0" strike="noStrike" sz="1000" u="none">
+                  <a:defRPr sz="1000" b="0" i="0" u="none" strike="noStrike">
                     <a:solidFill>
                       <a:srgbClr val="000000"/>
                     </a:solidFill>
                     <a:latin typeface="Arial"/>
                   </a:defRPr>
                 </a:pPr>
+                <a:endParaRPr lang="en-US"/>
               </a:p>
             </c:txPr>
             <c:showLegendKey val="0"/>
@@ -1088,28 +1206,31 @@
             <c:showPercent val="0"/>
             <c:showBubbleSize val="0"/>
             <c:showLeaderLines val="0"/>
+            <c:extLst>
+              <c:ext xmlns:c15="http://schemas.microsoft.com/office/drawing/2012/chart" uri="{CE6537A1-D6FC-4f65-9D91-7224C49458BB}">
+                <c15:showLeaderLines val="0"/>
+              </c:ext>
+            </c:extLst>
           </c:dLbls>
           <c:cat>
-            <c:multiLvlStrRef>
+            <c:strRef>
               <c:f>Sheet1!$A$2:$A$5</c:f>
-              <c:multiLvlStrCache>
+              <c:strCache>
                 <c:ptCount val="4"/>
-                <c:lvl>
-                  <c:pt idx="0">
-                    <c:v>Logistic reg.</c:v>
-                  </c:pt>
-                  <c:pt idx="1">
-                    <c:v>Decision tree</c:v>
-                  </c:pt>
-                  <c:pt idx="2">
-                    <c:v>Random forest</c:v>
-                  </c:pt>
-                  <c:pt idx="3">
-                    <c:v>Gradient boosting</c:v>
-                  </c:pt>
-                </c:lvl>
-              </c:multiLvlStrCache>
-            </c:multiLvlStrRef>
+                <c:pt idx="0">
+                  <c:v>Logistic reg.</c:v>
+                </c:pt>
+                <c:pt idx="1">
+                  <c:v>Decision tree</c:v>
+                </c:pt>
+                <c:pt idx="2">
+                  <c:v>Random forest</c:v>
+                </c:pt>
+                <c:pt idx="3">
+                  <c:v>Gradient boosting</c:v>
+                </c:pt>
+              </c:strCache>
+            </c:strRef>
           </c:cat>
           <c:val>
             <c:numRef>
@@ -1121,47 +1242,34 @@
                   <c:v>0.128</c:v>
                 </c:pt>
                 <c:pt idx="1">
-                  <c:v>0.479</c:v>
+                  <c:v>0.47899999999999998</c:v>
                 </c:pt>
                 <c:pt idx="2">
-                  <c:v>0.735</c:v>
+                  <c:v>0.73499999999999999</c:v>
                 </c:pt>
                 <c:pt idx="3">
-                  <c:v>0.556</c:v>
+                  <c:v>0.55600000000000005</c:v>
                 </c:pt>
               </c:numCache>
             </c:numRef>
           </c:val>
+          <c:extLst>
+            <c:ext xmlns:c16="http://schemas.microsoft.com/office/drawing/2014/chart" uri="{C3380CC4-5D6E-409C-BE32-E72D297353CC}">
+              <c16:uniqueId val="{00000003-36AF-4C64-A4D3-F4AAB48788F4}"/>
+            </c:ext>
+          </c:extLst>
         </c:ser>
         <c:dLbls>
-          <c:numFmt formatCode="0.00" sourceLinked="0"/>
-          <c:txPr>
-            <a:bodyPr/>
-            <a:lstStyle/>
-            <a:p>
-              <a:pPr>
-                <a:defRPr b="0" i="0" strike="noStrike" sz="1000" u="none">
-                  <a:solidFill>
-                    <a:srgbClr val="000000"/>
-                  </a:solidFill>
-                  <a:latin typeface="Arial"/>
-                </a:defRPr>
-              </a:pPr>
-            </a:p>
-          </c:txPr>
           <c:showLegendKey val="0"/>
           <c:showVal val="1"/>
           <c:showCatName val="0"/>
           <c:showSerName val="0"/>
           <c:showPercent val="0"/>
           <c:showBubbleSize val="0"/>
-          <c:showLeaderLines val="0"/>
         </c:dLbls>
         <c:gapWidth val="150"/>
-        <c:overlap val="0"/>
         <c:axId val="2094734554"/>
         <c:axId val="2094734552"/>
-        <c:axId val="2094734556"/>
       </c:barChart>
       <c:catAx>
         <c:axId val="2094734554"/>
@@ -1202,6 +1310,7 @@
         <c:crosses val="autoZero"/>
         <c:auto val="1"/>
         <c:lblAlgn val="ctr"/>
+        <c:lblOffset val="100"/>
         <c:noMultiLvlLbl val="1"/>
       </c:catAx>
       <c:valAx>
@@ -1260,7 +1369,7 @@
         <a:lstStyle/>
         <a:p>
           <a:pPr>
-            <a:defRPr sz="1300">      </a:defRPr>
+            <a:defRPr sz="1300"/>
           </a:pPr>
           <a:endParaRPr lang="en-US"/>
         </a:p>
@@ -1268,6 +1377,7 @@
     </c:legend>
     <c:plotVisOnly val="1"/>
     <c:dispBlanksAs val="span"/>
+    <c:showDLblsOverMax val="1"/>
   </c:chart>
   <c:spPr>
     <a:noFill/>
@@ -1304,234 +1414,10 @@
           <a:chExt cx="0" cy="0"/>
         </a:xfrm>
       </p:grpSpPr>
-      <p:sp>
-        <p:nvSpPr>
-          <p:cNvPr id="2" name="Header Placeholder 1"/>
-          <p:cNvSpPr>
-            <a:spLocks noGrp="1"/>
-          </p:cNvSpPr>
-          <p:nvPr>
-            <p:ph type="hdr" sz="quarter"/>
-          </p:nvPr>
-        </p:nvSpPr>
-        <p:spPr>
-          <a:xfrm>
-            <a:off x="0" y="0"/>
-            <a:ext cx="2971800" cy="458788"/>
-          </a:xfrm>
-          <a:prstGeom prst="rect">
-            <a:avLst/>
-          </a:prstGeom>
-        </p:spPr>
-        <p:txBody>
-          <a:bodyPr vert="horz" lIns="91440" tIns="45720" rIns="91440" bIns="45720" rtlCol="0"/>
-          <a:lstStyle>
-            <a:lvl1pPr algn="l">
-              <a:defRPr sz="1200"/>
-            </a:lvl1pPr>
-          </a:lstStyle>
-          <a:p>
-            <a:endParaRPr lang="en-US"/>
-          </a:p>
-        </p:txBody>
-      </p:sp>
-      <p:sp>
-        <p:nvSpPr>
-          <p:cNvPr id="3" name="Date Placeholder 2"/>
-          <p:cNvSpPr>
-            <a:spLocks noGrp="1"/>
-          </p:cNvSpPr>
-          <p:nvPr>
-            <p:ph type="dt" idx="1"/>
-          </p:nvPr>
-        </p:nvSpPr>
-        <p:spPr>
-          <a:xfrm>
-            <a:off x="3884613" y="0"/>
-            <a:ext cx="2971800" cy="458788"/>
-          </a:xfrm>
-          <a:prstGeom prst="rect">
-            <a:avLst/>
-          </a:prstGeom>
-        </p:spPr>
-        <p:txBody>
-          <a:bodyPr vert="horz" lIns="91440" tIns="45720" rIns="91440" bIns="45720" rtlCol="0"/>
-          <a:lstStyle>
-            <a:lvl1pPr algn="r">
-              <a:defRPr sz="1200"/>
-            </a:lvl1pPr>
-          </a:lstStyle>
-          <a:p>
-            <a:fld id="{5282F153-3F37-0F45-9E97-73ACFA13230C}" type="datetimeFigureOut">
-              <a:rPr lang="en-US"/>
-              <a:t>7/23/19</a:t>
-            </a:fld>
-            <a:endParaRPr lang="en-US"/>
-          </a:p>
-        </p:txBody>
-      </p:sp>
-      <p:sp>
-        <p:nvSpPr>
-          <p:cNvPr id="4" name="Slide Image Placeholder 3"/>
-          <p:cNvSpPr>
-            <a:spLocks noGrp="1" noRot="1" noChangeAspect="1"/>
-          </p:cNvSpPr>
-          <p:nvPr>
-            <p:ph type="sldImg" idx="2"/>
-          </p:nvPr>
-        </p:nvSpPr>
-        <p:spPr>
-          <a:xfrm>
-            <a:off x="685800" y="1143000"/>
-            <a:ext cx="5486400" cy="3086100"/>
-          </a:xfrm>
-          <a:prstGeom prst="rect">
-            <a:avLst/>
-          </a:prstGeom>
-          <a:noFill/>
-          <a:ln w="12700">
-            <a:solidFill>
-              <a:prstClr val="black"/>
-            </a:solidFill>
-          </a:ln>
-        </p:spPr>
-        <p:txBody>
-          <a:bodyPr vert="horz" lIns="91440" tIns="45720" rIns="91440" bIns="45720" rtlCol="0" anchor="ctr"/>
-          <a:lstStyle/>
-          <a:p>
-            <a:endParaRPr lang="en-US"/>
-          </a:p>
-        </p:txBody>
-      </p:sp>
-      <p:sp>
-        <p:nvSpPr>
-          <p:cNvPr id="5" name="Notes Placeholder 4"/>
-          <p:cNvSpPr>
-            <a:spLocks noGrp="1"/>
-          </p:cNvSpPr>
-          <p:nvPr>
-            <p:ph type="body" sz="quarter" idx="3"/>
-          </p:nvPr>
-        </p:nvSpPr>
-        <p:spPr>
-          <a:xfrm>
-            <a:off x="685800" y="4400550"/>
-            <a:ext cx="5486400" cy="3600450"/>
-          </a:xfrm>
-          <a:prstGeom prst="rect">
-            <a:avLst/>
-          </a:prstGeom>
-        </p:spPr>
-        <p:txBody>
-          <a:bodyPr vert="horz" lIns="91440" tIns="45720" rIns="91440" bIns="45720" rtlCol="0"/>
-          <a:lstStyle/>
-          <a:p>
-            <a:pPr lvl="0"/>
-            <a:r>
-              <a:rPr lang="en-US"/>
-              <a:t>Click to edit Master text styles</a:t>
-            </a:r>
-          </a:p>
-          <a:p>
-            <a:pPr lvl="1"/>
-            <a:r>
-              <a:rPr lang="en-US"/>
-              <a:t>Second level</a:t>
-            </a:r>
-          </a:p>
-          <a:p>
-            <a:pPr lvl="2"/>
-            <a:r>
-              <a:rPr lang="en-US"/>
-              <a:t>Third level</a:t>
-            </a:r>
-          </a:p>
-          <a:p>
-            <a:pPr lvl="3"/>
-            <a:r>
-              <a:rPr lang="en-US"/>
-              <a:t>Fourth level</a:t>
-            </a:r>
-          </a:p>
-          <a:p>
-            <a:pPr lvl="4"/>
-            <a:r>
-              <a:rPr lang="en-US"/>
-              <a:t>Fifth level</a:t>
-            </a:r>
-          </a:p>
-        </p:txBody>
-      </p:sp>
-      <p:sp>
-        <p:nvSpPr>
-          <p:cNvPr id="6" name="Footer Placeholder 5"/>
-          <p:cNvSpPr>
-            <a:spLocks noGrp="1"/>
-          </p:cNvSpPr>
-          <p:nvPr>
-            <p:ph type="ftr" sz="quarter" idx="4"/>
-          </p:nvPr>
-        </p:nvSpPr>
-        <p:spPr>
-          <a:xfrm>
-            <a:off x="0" y="8685213"/>
-            <a:ext cx="2971800" cy="458787"/>
-          </a:xfrm>
-          <a:prstGeom prst="rect">
-            <a:avLst/>
-          </a:prstGeom>
-        </p:spPr>
-        <p:txBody>
-          <a:bodyPr vert="horz" lIns="91440" tIns="45720" rIns="91440" bIns="45720" rtlCol="0" anchor="b"/>
-          <a:lstStyle>
-            <a:lvl1pPr algn="l">
-              <a:defRPr sz="1200"/>
-            </a:lvl1pPr>
-          </a:lstStyle>
-          <a:p>
-            <a:endParaRPr lang="en-US"/>
-          </a:p>
-        </p:txBody>
-      </p:sp>
-      <p:sp>
-        <p:nvSpPr>
-          <p:cNvPr id="7" name="Slide Number Placeholder 6"/>
-          <p:cNvSpPr>
-            <a:spLocks noGrp="1"/>
-          </p:cNvSpPr>
-          <p:nvPr>
-            <p:ph type="sldNum" sz="quarter" idx="5"/>
-          </p:nvPr>
-        </p:nvSpPr>
-        <p:spPr>
-          <a:xfrm>
-            <a:off x="3884613" y="8685213"/>
-            <a:ext cx="2971800" cy="458787"/>
-          </a:xfrm>
-          <a:prstGeom prst="rect">
-            <a:avLst/>
-          </a:prstGeom>
-        </p:spPr>
-        <p:txBody>
-          <a:bodyPr vert="horz" lIns="91440" tIns="45720" rIns="91440" bIns="45720" rtlCol="0" anchor="b"/>
-          <a:lstStyle>
-            <a:lvl1pPr algn="r">
-              <a:defRPr sz="1200"/>
-            </a:lvl1pPr>
-          </a:lstStyle>
-          <a:p>
-            <a:fld id="{CE5E9CC1-C706-0F49-92D6-E571CC5EEA8F}" type="slidenum">
-              <a:rPr lang="en-US"/>
-              <a:t>‹#›</a:t>
-            </a:fld>
-            <a:endParaRPr lang="en-US"/>
-          </a:p>
-        </p:txBody>
-      </p:sp>
     </p:spTree>
     <p:extLst>
       <p:ext uri="{BB962C8B-B14F-4D97-AF65-F5344CB8AC3E}">
-        <p14:creationId xmlns:p14="http://schemas.microsoft.com/office/powerpoint/2010/main" val="1024086991"/>
+        <p14:creationId xmlns:p14="http://schemas.microsoft.com/office/powerpoint/2010/main" val="2660085224"/>
       </p:ext>
     </p:extLst>
   </p:cSld>
@@ -1677,9 +1563,8 @@
           <a:p>
             <a:r>
               <a:rPr lang="en-US" dirty="0"/>
-              <a:t>JOSH: Hello everyone, I'm Josh, and this is Logan. Since the proposal we have generated the data, built the features, cross-validated and tested all four models, and explored the data with dimensionality reduction, so today we are presenting real results along with their limitations. Logan will begin with a brief recap.</a:t>
-            </a:r>
-            <a:endParaRPr lang="en-US" dirty="0"/>
+              <a:t>JOSH: Hello everyone, I'm Josh, and this is Logan. Since the proposal we have generated the data, built the features, cross-validated and tested all four models, so today we are presenting real results along with their limitations. Logan will begin with a brief recap.</a:t>
+            </a:r>
           </a:p>
         </p:txBody>
       </p:sp>
@@ -1765,9 +1650,8 @@
           <a:p>
             <a:r>
               <a:rPr lang="en-US" dirty="0"/>
-              <a:t>LOGAN: We want to be clear about the limits. The data is simulated, so results may not transfer to real spending. Distance from home had no signal: its single-feature score is 0.50, a coin flip. Fraud also drifts, from 1.3% of transactions in January to November to 0.5% in the test month, and cross-validation scores vary by fold. Finally, tuning is limited to small grids and thresholds do not always transfer, so the numbers should improve. Josh will cover our scope and what has changed.</a:t>
-            </a:r>
-            <a:endParaRPr lang="en-US" dirty="0"/>
+              <a:t>LOGAN: We want to be clear about the limits. The data is simulated, so results may not transfer to real spending. Distance from home had no signal: its single-feature score is 0.50, a coin flip. Fraud also drifts, from 1.3% of transactions in January to November to 0.5% in the test month, and cross-validation scores vary by fold. We plan to further tinker with the model’s parameters to try to increase our PR-AUC scores. Josh will cover our scope and what has changed.</a:t>
+            </a:r>
           </a:p>
         </p:txBody>
       </p:sp>
@@ -1855,7 +1739,6 @@
               <a:rPr lang="en-US" dirty="0"/>
               <a:t>JOSH: Our title and topic are unchanged: detecting credit card fraud with machine learning. We want to state the changes since the proposal clearly. We now use four models instead of two, a time-aware split with five-fold cross-validation, and the public Sparkov generator for data. We also added dimensionality reduction with PCA and t-SNE. Finally, the distance finding shifts our emphasis toward amount, time, and customer history. Logan will close with next steps and who is doing what.</a:t>
             </a:r>
-            <a:endParaRPr lang="en-US" dirty="0"/>
           </a:p>
         </p:txBody>
       </p:sp>
@@ -1941,7 +1824,11 @@
           <a:p>
             <a:r>
               <a:rPr lang="en-US" dirty="0"/>
-              <a:t>LOGAN: For next steps, Josh owns logistic regression and the decision tree, along with the feature pipeline and the ablation study. I own the random forest and gradient boosting, including deeper tuning and threshold choice. Together we will finish the scoring demo, the final deck, the report, and the GitHub repository. The final presentation is November 24th and 26th, and the report is due December 6th. Thank you, and we are happy to take questions.</a:t>
+              <a:t>LOGAN: For next steps, Josh will be investigating logistic regression and the decision tree, along with the feature pipeline and the ablation study. I’m going to be working on the random forest and gradient boosting, including deeper tuning and threshold choice. One we finish the scoring demo, we will complete our final presentation, our report, and our GitHub repository. </a:t>
+            </a:r>
+            <a:r>
+              <a:rPr lang="en-US"/>
+              <a:t>Thank you.</a:t>
             </a:r>
             <a:endParaRPr lang="en-US" dirty="0"/>
           </a:p>
@@ -2029,9 +1916,8 @@
           <a:p>
             <a:r>
               <a:rPr lang="en-US" dirty="0"/>
-              <a:t>LOGAN: Thanks, Josh. In the proposal we set out to detect credit card fraud with classical machine learning. The data is simulated with the public Sparkov generator, so no private data is involved. We planned engineered features and four models, judged by precision, recall, F1, and PR-AUC instead of accuracy. Since then we added time-aware cross-validation and dimensionality reduction. Josh will show how much of the plan is complete.</a:t>
-            </a:r>
-            <a:endParaRPr lang="en-US" dirty="0"/>
+              <a:t>LOGAN: Thanks, Josh. In the proposal we set out to detect credit card fraud using machine learning. The data is simulated with the public Sparkov generator, so no private data is involved. We planned engineered features and four models, judged by precision, recall, F1, and PR-AUC instead of accuracy. Since then we added time-aware cross-validation and dimensionality reduction. Josh will show how much of the plan is complete.</a:t>
+            </a:r>
           </a:p>
         </p:txBody>
       </p:sp>
@@ -2117,9 +2003,8 @@
           <a:p>
             <a:r>
               <a:rPr lang="en-US" dirty="0"/>
-              <a:t>JOSH: Here is our checklist against the proposal. We generated 822K transactions for 999 customers across 2025 and built 31 model inputs. We validated the models with five-fold, time-aware cross-validation on January to November and kept December as a final test. All four models are trained, and every one optimizes cross-entropy: logistic regression and gradient boosting minimize log loss, and the tree and forest split on entropy. We also added dimensionality reduction. The scoring demo and the final report are still ahead. Logan will walk through the data.</a:t>
-            </a:r>
-            <a:endParaRPr lang="en-US" dirty="0"/>
+              <a:t>JOSH: Here is our checklist against the proposal. We generated 822K transactions for 999 customers across 2025 and built 31 model inputs. We validated the models with five-fold, time-aware cross-validation on January to November and kept December as a final test. All four models are trained, and every one of them optimizes cross-entropy: logistic regression and gradient boosting minimize log loss, and the tree and forest split on entropy. We also added dimensionality reduction. The scoring demo and the final report are still ahead. Logan will walk through the data.</a:t>
+            </a:r>
           </a:p>
         </p:txBody>
       </p:sp>
@@ -2205,9 +2090,8 @@
           <a:p>
             <a:r>
               <a:rPr lang="en-US" dirty="0"/>
-              <a:t>LOGAN: The data has 822,484 transactions from 999 customers, with no duplicates or missing values. Fraud is 1.2% of transactions, about 9,500 cases. That is slightly above the "under one percent" we estimated in the proposal, and we are correcting that figure here. A model that always answers "not fraud" would be 98.8% accurate and catch nothing, which is why we do not rely on accuracy. Josh will describe the features we built.</a:t>
-            </a:r>
-            <a:endParaRPr lang="en-US" dirty="0"/>
+              <a:t>LOGAN: The data has 822,484 transactions from 999 customers, with no duplicates or missing values. Fraud was surprisingly 1.2% of transactions, about 9,500 cases. That is slightly above the "under one percent" we estimated in the proposal. A model that always answers "not fraud" would therefore be 98.8% accurate and catch nothing, which is why we do not rely on accuracy. Josh will describe the features we built.</a:t>
+            </a:r>
           </a:p>
         </p:txBody>
       </p:sp>
@@ -2293,9 +2177,8 @@
           <a:p>
             <a:r>
               <a:rPr lang="en-US" dirty="0"/>
-              <a:t>JOSH: We built 31 model inputs in four groups. Base features are amount, customer age, and city size, plus fourteen merchant category columns. Time features are hour, weekday, weekend, and night. Distance is the haversine distance from home to the merchant. History features describe each customer's past, such as the amount compared with their average and purchases in the last hour. These use only earlier transactions, so nothing leaks from the future. Logan will explain how we reduced the dimensionality of these inputs.</a:t>
-            </a:r>
-            <a:endParaRPr lang="en-US" dirty="0"/>
+              <a:t>JOSH: We built 31 model inputs in four groups. Base features are amount, customer age, and city size, plus fourteen merchant category columns. Time features are the hour of the day, the day of the week, and the time of day. Distance is the haversine distance from home to the merchant. History features describe each customer's past, such as the amount compared with their average and purchases in the last hour. These use only earlier transactions, so nothing leaks from the future. Logan will explain how we reduced the dimensionality of these inputs.</a:t>
+            </a:r>
           </a:p>
         </p:txBody>
       </p:sp>
@@ -2381,9 +2264,8 @@
           <a:p>
             <a:r>
               <a:rPr lang="en-US" dirty="0"/>
-              <a:t>LOGAN: With 31 inputs that overlap, we applied principal component analysis, or PCA, which rotates the data into new directions ordered by how much variation they carry. It takes 25 components to keep 95 percent of the variance, and the first two keep 17 percent. The first component mostly reflects recent activity, such as purchases in the last day, and the second mostly reflects amount. In the two-dimensional view, fraud overlaps normal activity heavily, so no simple projection separates it. Josh will show a nonlinear view and the effect of reduced inputs on the models.</a:t>
-            </a:r>
-            <a:endParaRPr lang="en-US" dirty="0"/>
+              <a:t>LOGAN: Some of you may have heard “day of the week” and “weekend” as features and thought, “Come on, Logan and Josh! That’s a recipe for data leakage!” Our solution is dimensionality reduction. With 31 inputs that overlap, we applied PCA. It takes 25 components to keep 95 percent of the variance, and the first two keep 17 percent. The first component mostly reflects recent activity, such as purchases in the last day, and the second mostly reflects amount. In the two-dimensional view, fraud overlaps normal activity heavily, so no simple projection separates it. Josh will show a nonlinear view and the effect of reduced inputs on the models.</a:t>
+            </a:r>
           </a:p>
         </p:txBody>
       </p:sp>
@@ -2471,7 +2353,6 @@
               <a:rPr lang="en-US" dirty="0"/>
               <a:t>JOSH: To look for structure that PCA cannot show, we used t-SNE, a nonlinear method, on a balanced sample of 3,000 fraud and 3,000 normal transactions. Fraud forms local clusters: on average 84 percent of a fraud point's ten nearest neighbors are also fraud. We then trained the models on reduced inputs. PCA on only the 13 continuous features keeps most of the performance, with the random forest at 0.70 versus 0.76. PCA on all 31 features drops it to 0.004, probably because the fraud signal sits in flags and categories that the rotation mixes. We have not tested that explanation. Logan will explain how we validated the models.</a:t>
             </a:r>
-            <a:endParaRPr lang="en-US" dirty="0"/>
           </a:p>
         </p:txBody>
       </p:sp>
@@ -2557,9 +2438,8 @@
           <a:p>
             <a:r>
               <a:rPr lang="en-US" dirty="0"/>
-              <a:t>LOGAN: We validated with time-aware cross-validation. The January to November development period is cut into six chunks. In each of five folds, the models train on the earlier chunks and validate on the next one, so they never see the future. We chose each model's settings by average PR-AUC across the folds and its decision threshold from the pooled validation predictions. Each model was then refit on the whole development period and tested once on December. The folds also show instability: the random forest averages 0.73 with a spread of 0.10, while gradient boosting's spread is 0.19. Josh will present the early results.</a:t>
-            </a:r>
-            <a:endParaRPr lang="en-US" dirty="0"/>
+              <a:t>LOGAN: We validated with time-aware cross-validation. The January to November development period is cut into six chunks. In each of five folds, the models train on the earlier chunks and validate on the next one, so they never see the future. We chose each model's settings by average PR-AUC; that’s a measure of how much true positives occur compare to false positives, and recall, how many fraudulent transactions did each model actually catch; across the folds and its decision threshold from the pooled validation predictions. Each model was then refit on the whole development period and tested once on December. The folds also show instability: the random forest averages 0.73 with a spread of 0.10, while gradient boosting's spread is 0.19. Josh will present the early results.</a:t>
+            </a:r>
           </a:p>
         </p:txBody>
       </p:sp>
@@ -2647,7 +2527,6 @@
               <a:rPr lang="en-US" dirty="0"/>
               <a:t>JOSH: Here are the four models on the held-out December test, beside their cross-validated PR-AUC. Logistic regression struggles, with an F1 of 0.04, because the fraud pattern is non-linear. The decision tree reaches 0.66, the random forest 0.72, and gradient boosting 0.30. Gradient boosting's low F1 comes from a threshold that was too strict after refitting, so its PR-AUC of 0.66 is the fairer figure. The random forest is best on both test and cross-validation. These are first-pass results with small tuning grids. Logan will cover the limitations.</a:t>
             </a:r>
-            <a:endParaRPr lang="en-US" dirty="0"/>
           </a:p>
         </p:txBody>
       </p:sp>
@@ -2725,6 +2604,7 @@
         <a:solidFill>
           <a:schemeClr val="tx1"/>
         </a:solidFill>
+        <a:effectLst/>
       </p:bgPr>
     </p:bg>
     <p:spTree>
@@ -2744,9 +2624,11 @@
       <p:sp>
         <p:nvSpPr>
           <p:cNvPr id="2" name="Text 0"/>
-          <p:cNvSpPr/>
+          <p:cNvSpPr>
+            <a:spLocks noGrp="1"/>
+          </p:cNvSpPr>
           <p:nvPr>
-            <p:ph idx="100" type="title" hasCustomPrompt="1"/>
+            <p:ph type="title" idx="100" hasCustomPrompt="1"/>
           </p:nvPr>
         </p:nvSpPr>
         <p:spPr>
@@ -2763,7 +2645,7 @@
         <p:txBody>
           <a:bodyPr wrap="square" rtlCol="0"/>
           <a:lstStyle>
-            <a:lvl1pPr algn="l" indent="0" marL="0">
+            <a:lvl1pPr marL="0" indent="0" algn="l">
               <a:buNone/>
               <a:defRPr lang="en-US" sz="4800" b="1" dirty="0">
                 <a:solidFill>
@@ -2773,7 +2655,7 @@
             </a:lvl1pPr>
           </a:lstStyle>
           <a:p>
-            <a:pPr algn="l" indent="0" marL="0">
+            <a:pPr marL="0" indent="0" algn="l">
               <a:buNone/>
             </a:pPr>
             <a:endParaRPr lang="en-US" sz="4800" dirty="0"/>
@@ -2783,9 +2665,11 @@
       <p:sp>
         <p:nvSpPr>
           <p:cNvPr id="3" name="Text 0"/>
-          <p:cNvSpPr/>
+          <p:cNvSpPr>
+            <a:spLocks noGrp="1"/>
+          </p:cNvSpPr>
           <p:nvPr>
-            <p:ph idx="101" type="body" hasCustomPrompt="1"/>
+            <p:ph type="body" idx="101" hasCustomPrompt="1"/>
           </p:nvPr>
         </p:nvSpPr>
         <p:spPr>
@@ -2802,7 +2686,7 @@
         <p:txBody>
           <a:bodyPr wrap="square" rtlCol="0"/>
           <a:lstStyle>
-            <a:lvl1pPr indent="0" marL="0">
+            <a:lvl1pPr marL="0" indent="0">
               <a:buNone/>
               <a:defRPr lang="en-US" sz="2000" dirty="0">
                 <a:solidFill>
@@ -2812,7 +2696,7 @@
             </a:lvl1pPr>
           </a:lstStyle>
           <a:p>
-            <a:pPr indent="0" marL="0">
+            <a:pPr marL="0" indent="0">
               <a:buNone/>
             </a:pPr>
             <a:endParaRPr lang="en-US" sz="2000" dirty="0"/>
@@ -2835,6 +2719,7 @@
         <a:solidFill>
           <a:schemeClr val="bg1"/>
         </a:solidFill>
+        <a:effectLst/>
       </p:bgPr>
     </p:bg>
     <p:spTree>
@@ -2854,9 +2739,11 @@
       <p:sp>
         <p:nvSpPr>
           <p:cNvPr id="2" name="Text 0"/>
-          <p:cNvSpPr/>
+          <p:cNvSpPr>
+            <a:spLocks noGrp="1"/>
+          </p:cNvSpPr>
           <p:nvPr>
-            <p:ph idx="100" type="title" hasCustomPrompt="1"/>
+            <p:ph type="title" idx="100" hasCustomPrompt="1"/>
           </p:nvPr>
         </p:nvSpPr>
         <p:spPr>
@@ -2873,7 +2760,7 @@
         <p:txBody>
           <a:bodyPr wrap="square" rtlCol="0"/>
           <a:lstStyle>
-            <a:lvl1pPr algn="l" indent="0" marL="0">
+            <a:lvl1pPr marL="0" indent="0" algn="l">
               <a:buNone/>
               <a:defRPr lang="en-US" sz="3600" b="1" dirty="0">
                 <a:solidFill>
@@ -2883,7 +2770,7 @@
             </a:lvl1pPr>
           </a:lstStyle>
           <a:p>
-            <a:pPr algn="l" indent="0" marL="0">
+            <a:pPr marL="0" indent="0" algn="l">
               <a:buNone/>
             </a:pPr>
             <a:endParaRPr lang="en-US" sz="3600" dirty="0"/>
@@ -2911,7 +2798,7 @@
           <a:bodyPr wrap="square" lIns="0" tIns="0" rIns="0" bIns="0" rtlCol="0" anchor="ctr"/>
           <a:lstStyle/>
           <a:p>
-            <a:pPr indent="0" marL="0">
+            <a:pPr marL="0" indent="0">
               <a:buNone/>
             </a:pPr>
             <a:r>
@@ -2946,7 +2833,7 @@
           </a:prstGeom>
           <a:extLst>
             <a:ext uri="{C572A759-6A51-4108-AA02-DFA0A04FC94B}">
-              <ma14:wrappingTextBoxFlag xmlns:ma14="http://schemas.microsoft.com/office/mac/drawingml/2011/main" val="0"/>
+              <ma14:wrappingTextBoxFlag xmlns:ma14="http://schemas.microsoft.com/office/mac/drawingml/2011/main" xmlns="" val="0"/>
             </a:ext>
           </a:extLst>
         </p:spPr>
@@ -2964,8 +2851,8 @@
           <a:p>
             <a:pPr algn="r"/>
             <a:fld id="{F7021451-1387-4CA6-816F-3879F97B5CBC}" type="slidenum">
-              <a:rPr b="0" lang="en-US"/>
-              <a:t>1003</a:t>
+              <a:rPr lang="en-US" b="0"/>
+              <a:t>‹#›</a:t>
             </a:fld>
             <a:endParaRPr lang="en-US"/>
           </a:p>
@@ -2982,6 +2869,11 @@
 <file path=ppt/slideMasters/slideMaster1.xml><?xml version="1.0" encoding="utf-8"?>
 <p:sldMaster xmlns:a="http://schemas.openxmlformats.org/drawingml/2006/main" xmlns:r="http://schemas.openxmlformats.org/officeDocument/2006/relationships" xmlns:p="http://schemas.openxmlformats.org/presentationml/2006/main">
   <p:cSld>
+    <p:bg>
+      <p:bgRef idx="1001">
+        <a:schemeClr val="bg1"/>
+      </p:bgRef>
+    </p:bg>
     <p:spTree>
       <p:nvGrpSpPr>
         <p:cNvPr id="1" name=""/>
@@ -3016,7 +2908,7 @@
           </a:prstGeom>
           <a:extLst>
             <a:ext uri="{C572A759-6A51-4108-AA02-DFA0A04FC94B}">
-              <ma14:wrappingTextBoxFlag xmlns:ma14="http://schemas.microsoft.com/office/mac/drawingml/2011/main" val="0"/>
+              <ma14:wrappingTextBoxFlag xmlns:ma14="http://schemas.microsoft.com/office/mac/drawingml/2011/main" xmlns="" val="0"/>
             </a:ext>
           </a:extLst>
         </p:spPr>
@@ -3034,8 +2926,8 @@
           <a:p>
             <a:pPr algn="r"/>
             <a:fld id="{F7021451-1387-4CA6-816F-3879F97B5CBC}" type="slidenum">
-              <a:rPr b="0" lang="en-US"/>
-              <a:t>null</a:t>
+              <a:rPr lang="en-US" b="0"/>
+              <a:t>‹#›</a:t>
             </a:fld>
             <a:endParaRPr lang="en-US"/>
           </a:p>
@@ -3323,9 +3215,11 @@
       <p:sp>
         <p:nvSpPr>
           <p:cNvPr id="2" name="Text 0"/>
-          <p:cNvSpPr/>
+          <p:cNvSpPr>
+            <a:spLocks noGrp="1"/>
+          </p:cNvSpPr>
           <p:nvPr>
-            <p:ph idx="100" type="title" hasCustomPrompt="1"/>
+            <p:ph type="title" idx="100" hasCustomPrompt="1"/>
           </p:nvPr>
         </p:nvSpPr>
         <p:spPr>
@@ -3343,7 +3237,7 @@
           <a:bodyPr wrap="square" lIns="0" tIns="0" rIns="0" bIns="0" rtlCol="0" anchor="b"/>
           <a:lstStyle/>
           <a:p>
-            <a:pPr algn="l" indent="0" marL="0">
+            <a:pPr marL="0" indent="0" algn="l">
               <a:buNone/>
             </a:pPr>
             <a:r>
@@ -3361,9 +3255,11 @@
       <p:sp>
         <p:nvSpPr>
           <p:cNvPr id="3" name="Text 0"/>
-          <p:cNvSpPr/>
+          <p:cNvSpPr>
+            <a:spLocks noGrp="1"/>
+          </p:cNvSpPr>
           <p:nvPr>
-            <p:ph idx="101" type="body" hasCustomPrompt="1"/>
+            <p:ph type="body" idx="101" hasCustomPrompt="1"/>
           </p:nvPr>
         </p:nvSpPr>
         <p:spPr>
@@ -3381,7 +3277,7 @@
           <a:bodyPr wrap="square" lIns="0" tIns="0" rIns="0" bIns="0" rtlCol="0" anchor="t"/>
           <a:lstStyle/>
           <a:p>
-            <a:pPr indent="0" marL="0">
+            <a:pPr marL="0" indent="0">
               <a:buNone/>
             </a:pPr>
             <a:r>
@@ -3395,7 +3291,7 @@
             <a:endParaRPr lang="en-US" sz="2000" dirty="0"/>
           </a:p>
           <a:p>
-            <a:pPr indent="0" marL="0">
+            <a:pPr marL="0" indent="0">
               <a:buNone/>
             </a:pPr>
             <a:r>
@@ -3438,6 +3334,13 @@
             <a:prstDash val="solid"/>
           </a:ln>
         </p:spPr>
+        <p:txBody>
+          <a:bodyPr/>
+          <a:lstStyle/>
+          <a:p>
+            <a:endParaRPr lang="en-US"/>
+          </a:p>
+        </p:txBody>
       </p:sp>
       <p:sp>
         <p:nvSpPr>
@@ -3467,6 +3370,13 @@
             <a:prstDash val="solid"/>
           </a:ln>
         </p:spPr>
+        <p:txBody>
+          <a:bodyPr/>
+          <a:lstStyle/>
+          <a:p>
+            <a:endParaRPr lang="en-US"/>
+          </a:p>
+        </p:txBody>
       </p:sp>
       <p:sp>
         <p:nvSpPr>
@@ -3496,6 +3406,13 @@
             <a:prstDash val="solid"/>
           </a:ln>
         </p:spPr>
+        <p:txBody>
+          <a:bodyPr/>
+          <a:lstStyle/>
+          <a:p>
+            <a:endParaRPr lang="en-US"/>
+          </a:p>
+        </p:txBody>
       </p:sp>
       <p:sp>
         <p:nvSpPr>
@@ -3525,6 +3442,13 @@
             <a:prstDash val="solid"/>
           </a:ln>
         </p:spPr>
+        <p:txBody>
+          <a:bodyPr/>
+          <a:lstStyle/>
+          <a:p>
+            <a:endParaRPr lang="en-US"/>
+          </a:p>
+        </p:txBody>
       </p:sp>
       <p:sp>
         <p:nvSpPr>
@@ -3550,6 +3474,13 @@
             <a:prstDash val="solid"/>
           </a:ln>
         </p:spPr>
+        <p:txBody>
+          <a:bodyPr/>
+          <a:lstStyle/>
+          <a:p>
+            <a:endParaRPr lang="en-US"/>
+          </a:p>
+        </p:txBody>
       </p:sp>
     </p:spTree>
   </p:cSld>
@@ -3579,9 +3510,11 @@
       <p:sp>
         <p:nvSpPr>
           <p:cNvPr id="2" name="Text 0"/>
-          <p:cNvSpPr/>
+          <p:cNvSpPr>
+            <a:spLocks noGrp="1"/>
+          </p:cNvSpPr>
           <p:nvPr>
-            <p:ph idx="100" type="title" hasCustomPrompt="1"/>
+            <p:ph type="title" idx="100" hasCustomPrompt="1"/>
           </p:nvPr>
         </p:nvSpPr>
         <p:spPr>
@@ -3599,7 +3532,7 @@
           <a:bodyPr wrap="square" lIns="0" tIns="0" rIns="0" bIns="0" rtlCol="0" anchor="ctr"/>
           <a:lstStyle/>
           <a:p>
-            <a:pPr algn="l" indent="0" marL="0">
+            <a:pPr marL="0" indent="0" algn="l">
               <a:buNone/>
             </a:pPr>
             <a:r>
@@ -3640,6 +3573,13 @@
             <a:prstDash val="solid"/>
           </a:ln>
         </p:spPr>
+        <p:txBody>
+          <a:bodyPr/>
+          <a:lstStyle/>
+          <a:p>
+            <a:endParaRPr lang="en-US"/>
+          </a:p>
+        </p:txBody>
       </p:sp>
       <p:sp>
         <p:nvSpPr>
@@ -3665,6 +3605,13 @@
             <a:prstDash val="solid"/>
           </a:ln>
         </p:spPr>
+        <p:txBody>
+          <a:bodyPr/>
+          <a:lstStyle/>
+          <a:p>
+            <a:endParaRPr lang="en-US"/>
+          </a:p>
+        </p:txBody>
       </p:sp>
       <p:sp>
         <p:nvSpPr>
@@ -3687,7 +3634,7 @@
           <a:bodyPr wrap="square" lIns="0" tIns="0" rIns="0" bIns="0" rtlCol="0" anchor="t"/>
           <a:lstStyle/>
           <a:p>
-            <a:pPr indent="0" marL="0">
+            <a:pPr marL="0" indent="0">
               <a:buNone/>
             </a:pPr>
             <a:r>
@@ -3723,7 +3670,7 @@
           <a:bodyPr wrap="square" lIns="0" tIns="0" rIns="0" bIns="0" rtlCol="0" anchor="t"/>
           <a:lstStyle/>
           <a:p>
-            <a:pPr indent="0" marL="0">
+            <a:pPr marL="0" indent="0">
               <a:buNone/>
             </a:pPr>
             <a:r>
@@ -3764,6 +3711,13 @@
             <a:prstDash val="solid"/>
           </a:ln>
         </p:spPr>
+        <p:txBody>
+          <a:bodyPr/>
+          <a:lstStyle/>
+          <a:p>
+            <a:endParaRPr lang="en-US"/>
+          </a:p>
+        </p:txBody>
       </p:sp>
       <p:sp>
         <p:nvSpPr>
@@ -3789,6 +3743,13 @@
             <a:prstDash val="solid"/>
           </a:ln>
         </p:spPr>
+        <p:txBody>
+          <a:bodyPr/>
+          <a:lstStyle/>
+          <a:p>
+            <a:endParaRPr lang="en-US"/>
+          </a:p>
+        </p:txBody>
       </p:sp>
       <p:sp>
         <p:nvSpPr>
@@ -3811,7 +3772,7 @@
           <a:bodyPr wrap="square" lIns="0" tIns="0" rIns="0" bIns="0" rtlCol="0" anchor="t"/>
           <a:lstStyle/>
           <a:p>
-            <a:pPr indent="0" marL="0">
+            <a:pPr marL="0" indent="0">
               <a:buNone/>
             </a:pPr>
             <a:r>
@@ -3847,7 +3808,7 @@
           <a:bodyPr wrap="square" lIns="0" tIns="0" rIns="0" bIns="0" rtlCol="0" anchor="t"/>
           <a:lstStyle/>
           <a:p>
-            <a:pPr indent="0" marL="0">
+            <a:pPr marL="0" indent="0">
               <a:buNone/>
             </a:pPr>
             <a:r>
@@ -3888,6 +3849,13 @@
             <a:prstDash val="solid"/>
           </a:ln>
         </p:spPr>
+        <p:txBody>
+          <a:bodyPr/>
+          <a:lstStyle/>
+          <a:p>
+            <a:endParaRPr lang="en-US"/>
+          </a:p>
+        </p:txBody>
       </p:sp>
       <p:sp>
         <p:nvSpPr>
@@ -3913,6 +3881,13 @@
             <a:prstDash val="solid"/>
           </a:ln>
         </p:spPr>
+        <p:txBody>
+          <a:bodyPr/>
+          <a:lstStyle/>
+          <a:p>
+            <a:endParaRPr lang="en-US"/>
+          </a:p>
+        </p:txBody>
       </p:sp>
       <p:sp>
         <p:nvSpPr>
@@ -3935,7 +3910,7 @@
           <a:bodyPr wrap="square" lIns="0" tIns="0" rIns="0" bIns="0" rtlCol="0" anchor="t"/>
           <a:lstStyle/>
           <a:p>
-            <a:pPr indent="0" marL="0">
+            <a:pPr marL="0" indent="0">
               <a:buNone/>
             </a:pPr>
             <a:r>
@@ -3971,7 +3946,7 @@
           <a:bodyPr wrap="square" lIns="0" tIns="0" rIns="0" bIns="0" rtlCol="0" anchor="t"/>
           <a:lstStyle/>
           <a:p>
-            <a:pPr indent="0" marL="0">
+            <a:pPr marL="0" indent="0">
               <a:buNone/>
             </a:pPr>
             <a:r>
@@ -4012,6 +3987,13 @@
             <a:prstDash val="solid"/>
           </a:ln>
         </p:spPr>
+        <p:txBody>
+          <a:bodyPr/>
+          <a:lstStyle/>
+          <a:p>
+            <a:endParaRPr lang="en-US"/>
+          </a:p>
+        </p:txBody>
       </p:sp>
       <p:sp>
         <p:nvSpPr>
@@ -4037,6 +4019,13 @@
             <a:prstDash val="solid"/>
           </a:ln>
         </p:spPr>
+        <p:txBody>
+          <a:bodyPr/>
+          <a:lstStyle/>
+          <a:p>
+            <a:endParaRPr lang="en-US"/>
+          </a:p>
+        </p:txBody>
       </p:sp>
       <p:sp>
         <p:nvSpPr>
@@ -4059,7 +4048,7 @@
           <a:bodyPr wrap="square" lIns="0" tIns="0" rIns="0" bIns="0" rtlCol="0" anchor="t"/>
           <a:lstStyle/>
           <a:p>
-            <a:pPr indent="0" marL="0">
+            <a:pPr marL="0" indent="0">
               <a:buNone/>
             </a:pPr>
             <a:r>
@@ -4095,7 +4084,7 @@
           <a:bodyPr wrap="square" lIns="0" tIns="0" rIns="0" bIns="0" rtlCol="0" anchor="t"/>
           <a:lstStyle/>
           <a:p>
-            <a:pPr indent="0" marL="0">
+            <a:pPr marL="0" indent="0">
               <a:buNone/>
             </a:pPr>
             <a:r>
@@ -4136,6 +4125,13 @@
             <a:prstDash val="solid"/>
           </a:ln>
         </p:spPr>
+        <p:txBody>
+          <a:bodyPr/>
+          <a:lstStyle/>
+          <a:p>
+            <a:endParaRPr lang="en-US"/>
+          </a:p>
+        </p:txBody>
       </p:sp>
       <p:sp>
         <p:nvSpPr>
@@ -4161,6 +4157,13 @@
             <a:prstDash val="solid"/>
           </a:ln>
         </p:spPr>
+        <p:txBody>
+          <a:bodyPr/>
+          <a:lstStyle/>
+          <a:p>
+            <a:endParaRPr lang="en-US"/>
+          </a:p>
+        </p:txBody>
       </p:sp>
       <p:sp>
         <p:nvSpPr>
@@ -4183,7 +4186,7 @@
           <a:bodyPr wrap="square" lIns="0" tIns="0" rIns="0" bIns="0" rtlCol="0" anchor="ctr"/>
           <a:lstStyle/>
           <a:p>
-            <a:pPr indent="0" marL="0">
+            <a:pPr marL="0" indent="0">
               <a:buNone/>
             </a:pPr>
             <a:r>
@@ -4194,9 +4197,6 @@
               </a:rPr>
               <a:t>Thresholds do not always transfer: </a:t>
             </a:r>
-            <a:pPr indent="0" marL="0">
-              <a:buNone/>
-            </a:pPr>
             <a:r>
               <a:rPr lang="en-US" sz="1600" dirty="0">
                 <a:solidFill>
@@ -4211,55 +4211,7 @@
       </p:sp>
       <p:pic>
         <p:nvPicPr>
-          <p:cNvPr id="23" name="Simulated data icon" descr="Simulated data">    </p:cNvPr>
-          <p:cNvPicPr>
-            <a:picLocks noChangeAspect="1"/>
-          </p:cNvPicPr>
-          <p:nvPr/>
-        </p:nvPicPr>
-        <p:blipFill>
-          <a:blip r:embed="rId1"/>
-          <a:stretch>
-            <a:fillRect/>
-          </a:stretch>
-        </p:blipFill>
-        <p:spPr>
-          <a:xfrm>
-            <a:off x="1055218" y="1969618"/>
-            <a:ext cx="358445" cy="358445"/>
-          </a:xfrm>
-          <a:prstGeom prst="rect">
-            <a:avLst/>
-          </a:prstGeom>
-        </p:spPr>
-      </p:pic>
-      <p:pic>
-        <p:nvPicPr>
-          <p:cNvPr id="24" name="No distance signal icon" descr="No distance signal">    </p:cNvPr>
-          <p:cNvPicPr>
-            <a:picLocks noChangeAspect="1"/>
-          </p:cNvPicPr>
-          <p:nvPr/>
-        </p:nvPicPr>
-        <p:blipFill>
-          <a:blip r:embed="rId2"/>
-          <a:stretch>
-            <a:fillRect/>
-          </a:stretch>
-        </p:blipFill>
-        <p:spPr>
-          <a:xfrm>
-            <a:off x="3844138" y="1969618"/>
-            <a:ext cx="358445" cy="358445"/>
-          </a:xfrm>
-          <a:prstGeom prst="rect">
-            <a:avLst/>
-          </a:prstGeom>
-        </p:spPr>
-      </p:pic>
-      <p:pic>
-        <p:nvPicPr>
-          <p:cNvPr id="25" name="Fraud rate drifts icon" descr="Fraud rate drifts">    </p:cNvPr>
+          <p:cNvPr id="23" name="Simulated data icon" descr="Simulated data"/>
           <p:cNvPicPr>
             <a:picLocks noChangeAspect="1"/>
           </p:cNvPicPr>
@@ -4273,7 +4225,7 @@
         </p:blipFill>
         <p:spPr>
           <a:xfrm>
-            <a:off x="6633058" y="1969618"/>
+            <a:off x="1055218" y="1969618"/>
             <a:ext cx="358445" cy="358445"/>
           </a:xfrm>
           <a:prstGeom prst="rect">
@@ -4283,7 +4235,7 @@
       </p:pic>
       <p:pic>
         <p:nvPicPr>
-          <p:cNvPr id="26" name="Unstable folds icon" descr="Unstable folds">    </p:cNvPr>
+          <p:cNvPr id="24" name="No distance signal icon" descr="No distance signal"/>
           <p:cNvPicPr>
             <a:picLocks noChangeAspect="1"/>
           </p:cNvPicPr>
@@ -4297,7 +4249,7 @@
         </p:blipFill>
         <p:spPr>
           <a:xfrm>
-            <a:off x="9421978" y="1969618"/>
+            <a:off x="3844138" y="1969618"/>
             <a:ext cx="358445" cy="358445"/>
           </a:xfrm>
           <a:prstGeom prst="rect">
@@ -4307,7 +4259,7 @@
       </p:pic>
       <p:pic>
         <p:nvPicPr>
-          <p:cNvPr id="27" name="Strip icon" descr="Strip">    </p:cNvPr>
+          <p:cNvPr id="25" name="Fraud rate drifts icon" descr="Fraud rate drifts"/>
           <p:cNvPicPr>
             <a:picLocks noChangeAspect="1"/>
           </p:cNvPicPr>
@@ -4321,6 +4273,54 @@
         </p:blipFill>
         <p:spPr>
           <a:xfrm>
+            <a:off x="6633058" y="1969618"/>
+            <a:ext cx="358445" cy="358445"/>
+          </a:xfrm>
+          <a:prstGeom prst="rect">
+            <a:avLst/>
+          </a:prstGeom>
+        </p:spPr>
+      </p:pic>
+      <p:pic>
+        <p:nvPicPr>
+          <p:cNvPr id="26" name="Unstable folds icon" descr="Unstable folds"/>
+          <p:cNvPicPr>
+            <a:picLocks noChangeAspect="1"/>
+          </p:cNvPicPr>
+          <p:nvPr/>
+        </p:nvPicPr>
+        <p:blipFill>
+          <a:blip r:embed="rId6"/>
+          <a:stretch>
+            <a:fillRect/>
+          </a:stretch>
+        </p:blipFill>
+        <p:spPr>
+          <a:xfrm>
+            <a:off x="9421978" y="1969618"/>
+            <a:ext cx="358445" cy="358445"/>
+          </a:xfrm>
+          <a:prstGeom prst="rect">
+            <a:avLst/>
+          </a:prstGeom>
+        </p:spPr>
+      </p:pic>
+      <p:pic>
+        <p:nvPicPr>
+          <p:cNvPr id="27" name="Strip icon" descr="Strip"/>
+          <p:cNvPicPr>
+            <a:picLocks noChangeAspect="1"/>
+          </p:cNvPicPr>
+          <p:nvPr/>
+        </p:nvPicPr>
+        <p:blipFill>
+          <a:blip r:embed="rId7"/>
+          <a:stretch>
+            <a:fillRect/>
+          </a:stretch>
+        </p:blipFill>
+        <p:spPr>
+          <a:xfrm>
             <a:off x="1075334" y="5190134"/>
             <a:ext cx="409651" cy="409651"/>
           </a:xfrm>
@@ -4331,7 +4331,7 @@
       </p:pic>
       <p:sp>
         <p:nvSpPr>
-          <p:cNvPr id="25" name="Slide Number Placeholder 0"/>
+          <p:cNvPr id="3" name="Slide Number Placeholder 0"/>
           <p:cNvSpPr>
             <a:spLocks noGrp="1"/>
           </p:cNvSpPr>
@@ -4349,7 +4349,7 @@
           </a:prstGeom>
           <a:extLst>
             <a:ext uri="{C572A759-6A51-4108-AA02-DFA0A04FC94B}">
-              <ma14:wrappingTextBoxFlag xmlns:ma14="http://schemas.microsoft.com/office/mac/drawingml/2011/main" val="0"/>
+              <ma14:wrappingTextBoxFlag xmlns:ma14="http://schemas.microsoft.com/office/mac/drawingml/2011/main" xmlns="" val="0"/>
             </a:ext>
           </a:extLst>
         </p:spPr>
@@ -4367,7 +4367,7 @@
           <a:p>
             <a:pPr algn="r"/>
             <a:fld id="{F7021451-1387-4CA6-816F-3879F97B5CBC}" type="slidenum">
-              <a:rPr b="0" lang="en-US"/>
+              <a:rPr lang="en-US" b="0"/>
               <a:t>10</a:t>
             </a:fld>
             <a:endParaRPr lang="en-US"/>
@@ -4402,9 +4402,11 @@
       <p:sp>
         <p:nvSpPr>
           <p:cNvPr id="2" name="Text 0"/>
-          <p:cNvSpPr/>
+          <p:cNvSpPr>
+            <a:spLocks noGrp="1"/>
+          </p:cNvSpPr>
           <p:nvPr>
-            <p:ph idx="100" type="title" hasCustomPrompt="1"/>
+            <p:ph type="title" idx="100" hasCustomPrompt="1"/>
           </p:nvPr>
         </p:nvSpPr>
         <p:spPr>
@@ -4422,7 +4424,7 @@
           <a:bodyPr wrap="square" lIns="0" tIns="0" rIns="0" bIns="0" rtlCol="0" anchor="ctr"/>
           <a:lstStyle/>
           <a:p>
-            <a:pPr algn="l" indent="0" marL="0">
+            <a:pPr marL="0" indent="0" algn="l">
               <a:buNone/>
             </a:pPr>
             <a:r>
@@ -4463,6 +4465,13 @@
             <a:prstDash val="solid"/>
           </a:ln>
         </p:spPr>
+        <p:txBody>
+          <a:bodyPr/>
+          <a:lstStyle/>
+          <a:p>
+            <a:endParaRPr lang="en-US"/>
+          </a:p>
+        </p:txBody>
       </p:sp>
       <p:sp>
         <p:nvSpPr>
@@ -4488,6 +4497,13 @@
             <a:prstDash val="solid"/>
           </a:ln>
         </p:spPr>
+        <p:txBody>
+          <a:bodyPr/>
+          <a:lstStyle/>
+          <a:p>
+            <a:endParaRPr lang="en-US"/>
+          </a:p>
+        </p:txBody>
       </p:sp>
       <p:sp>
         <p:nvSpPr>
@@ -4510,7 +4526,7 @@
           <a:bodyPr wrap="square" lIns="0" tIns="0" rIns="0" bIns="0" rtlCol="0" anchor="t"/>
           <a:lstStyle/>
           <a:p>
-            <a:pPr indent="0" marL="0">
+            <a:pPr marL="0" indent="0">
               <a:buNone/>
             </a:pPr>
             <a:r>
@@ -4546,7 +4562,7 @@
           <a:bodyPr wrap="square" lIns="0" tIns="0" rIns="0" bIns="0" rtlCol="0" anchor="t"/>
           <a:lstStyle/>
           <a:p>
-            <a:pPr indent="0" marL="0">
+            <a:pPr marL="0" indent="0">
               <a:buNone/>
             </a:pPr>
             <a:r>
@@ -4587,6 +4603,13 @@
             <a:prstDash val="solid"/>
           </a:ln>
         </p:spPr>
+        <p:txBody>
+          <a:bodyPr/>
+          <a:lstStyle/>
+          <a:p>
+            <a:endParaRPr lang="en-US"/>
+          </a:p>
+        </p:txBody>
       </p:sp>
       <p:sp>
         <p:nvSpPr>
@@ -4612,6 +4635,13 @@
             <a:prstDash val="solid"/>
           </a:ln>
         </p:spPr>
+        <p:txBody>
+          <a:bodyPr/>
+          <a:lstStyle/>
+          <a:p>
+            <a:endParaRPr lang="en-US"/>
+          </a:p>
+        </p:txBody>
       </p:sp>
       <p:sp>
         <p:nvSpPr>
@@ -4634,7 +4664,7 @@
           <a:bodyPr wrap="square" lIns="0" tIns="0" rIns="0" bIns="0" rtlCol="0" anchor="t"/>
           <a:lstStyle/>
           <a:p>
-            <a:pPr indent="0" marL="0">
+            <a:pPr marL="0" indent="0">
               <a:buNone/>
             </a:pPr>
             <a:r>
@@ -4670,7 +4700,7 @@
           <a:bodyPr wrap="square" lIns="0" tIns="0" rIns="0" bIns="0" rtlCol="0" anchor="t"/>
           <a:lstStyle/>
           <a:p>
-            <a:pPr indent="0" marL="0">
+            <a:pPr marL="0" indent="0">
               <a:buNone/>
             </a:pPr>
             <a:r>
@@ -4711,6 +4741,13 @@
             <a:prstDash val="solid"/>
           </a:ln>
         </p:spPr>
+        <p:txBody>
+          <a:bodyPr/>
+          <a:lstStyle/>
+          <a:p>
+            <a:endParaRPr lang="en-US"/>
+          </a:p>
+        </p:txBody>
       </p:sp>
       <p:sp>
         <p:nvSpPr>
@@ -4736,6 +4773,13 @@
             <a:prstDash val="solid"/>
           </a:ln>
         </p:spPr>
+        <p:txBody>
+          <a:bodyPr/>
+          <a:lstStyle/>
+          <a:p>
+            <a:endParaRPr lang="en-US"/>
+          </a:p>
+        </p:txBody>
       </p:sp>
       <p:sp>
         <p:nvSpPr>
@@ -4758,7 +4802,7 @@
           <a:bodyPr wrap="square" lIns="0" tIns="0" rIns="0" bIns="0" rtlCol="0" anchor="t"/>
           <a:lstStyle/>
           <a:p>
-            <a:pPr indent="0" marL="0">
+            <a:pPr marL="0" indent="0">
               <a:buNone/>
             </a:pPr>
             <a:r>
@@ -4794,7 +4838,7 @@
           <a:bodyPr wrap="square" lIns="0" tIns="0" rIns="0" bIns="0" rtlCol="0" anchor="t"/>
           <a:lstStyle/>
           <a:p>
-            <a:pPr indent="0" marL="0">
+            <a:pPr marL="0" indent="0">
               <a:buNone/>
             </a:pPr>
             <a:r>
@@ -4835,6 +4879,13 @@
             <a:prstDash val="solid"/>
           </a:ln>
         </p:spPr>
+        <p:txBody>
+          <a:bodyPr/>
+          <a:lstStyle/>
+          <a:p>
+            <a:endParaRPr lang="en-US"/>
+          </a:p>
+        </p:txBody>
       </p:sp>
       <p:sp>
         <p:nvSpPr>
@@ -4860,6 +4911,13 @@
             <a:prstDash val="solid"/>
           </a:ln>
         </p:spPr>
+        <p:txBody>
+          <a:bodyPr/>
+          <a:lstStyle/>
+          <a:p>
+            <a:endParaRPr lang="en-US"/>
+          </a:p>
+        </p:txBody>
       </p:sp>
       <p:sp>
         <p:nvSpPr>
@@ -4882,7 +4940,7 @@
           <a:bodyPr wrap="square" lIns="0" tIns="0" rIns="0" bIns="0" rtlCol="0" anchor="ctr"/>
           <a:lstStyle/>
           <a:p>
-            <a:pPr indent="0" marL="0">
+            <a:pPr marL="0" indent="0">
               <a:buNone/>
             </a:pPr>
             <a:r>
@@ -4893,9 +4951,6 @@
               </a:rPr>
               <a:t>Scope: </a:t>
             </a:r>
-            <a:pPr indent="0" marL="0">
-              <a:buNone/>
-            </a:pPr>
             <a:r>
               <a:rPr lang="en-US" sz="1600" dirty="0">
                 <a:solidFill>
@@ -4910,55 +4965,7 @@
       </p:sp>
       <p:pic>
         <p:nvPicPr>
-          <p:cNvPr id="19" name="Changes since proposal icon" descr="Changes since proposal">    </p:cNvPr>
-          <p:cNvPicPr>
-            <a:picLocks noChangeAspect="1"/>
-          </p:cNvPicPr>
-          <p:nvPr/>
-        </p:nvPicPr>
-        <p:blipFill>
-          <a:blip r:embed="rId1"/>
-          <a:stretch>
-            <a:fillRect/>
-          </a:stretch>
-        </p:blipFill>
-        <p:spPr>
-          <a:xfrm>
-            <a:off x="4773778" y="1969618"/>
-            <a:ext cx="358445" cy="358445"/>
-          </a:xfrm>
-          <a:prstGeom prst="rect">
-            <a:avLst/>
-          </a:prstGeom>
-        </p:spPr>
-      </p:pic>
-      <p:pic>
-        <p:nvPicPr>
-          <p:cNvPr id="20" name="Shift in emphasis icon" descr="Shift in emphasis">    </p:cNvPr>
-          <p:cNvPicPr>
-            <a:picLocks noChangeAspect="1"/>
-          </p:cNvPicPr>
-          <p:nvPr/>
-        </p:nvPicPr>
-        <p:blipFill>
-          <a:blip r:embed="rId2"/>
-          <a:stretch>
-            <a:fillRect/>
-          </a:stretch>
-        </p:blipFill>
-        <p:spPr>
-          <a:xfrm>
-            <a:off x="8492338" y="1969618"/>
-            <a:ext cx="358445" cy="358445"/>
-          </a:xfrm>
-          <a:prstGeom prst="rect">
-            <a:avLst/>
-          </a:prstGeom>
-        </p:spPr>
-      </p:pic>
-      <p:pic>
-        <p:nvPicPr>
-          <p:cNvPr id="21" name="Topic and title icon" descr="Topic and title">    </p:cNvPr>
+          <p:cNvPr id="19" name="Changes since proposal icon" descr="Changes since proposal"/>
           <p:cNvPicPr>
             <a:picLocks noChangeAspect="1"/>
           </p:cNvPicPr>
@@ -4972,7 +4979,7 @@
         </p:blipFill>
         <p:spPr>
           <a:xfrm>
-            <a:off x="1055218" y="1969618"/>
+            <a:off x="4773778" y="1969618"/>
             <a:ext cx="358445" cy="358445"/>
           </a:xfrm>
           <a:prstGeom prst="rect">
@@ -4982,7 +4989,7 @@
       </p:pic>
       <p:pic>
         <p:nvPicPr>
-          <p:cNvPr id="22" name="Strip icon" descr="Strip">    </p:cNvPr>
+          <p:cNvPr id="20" name="Shift in emphasis icon" descr="Shift in emphasis"/>
           <p:cNvPicPr>
             <a:picLocks noChangeAspect="1"/>
           </p:cNvPicPr>
@@ -4996,6 +5003,54 @@
         </p:blipFill>
         <p:spPr>
           <a:xfrm>
+            <a:off x="8492338" y="1969618"/>
+            <a:ext cx="358445" cy="358445"/>
+          </a:xfrm>
+          <a:prstGeom prst="rect">
+            <a:avLst/>
+          </a:prstGeom>
+        </p:spPr>
+      </p:pic>
+      <p:pic>
+        <p:nvPicPr>
+          <p:cNvPr id="21" name="Topic and title icon" descr="Topic and title"/>
+          <p:cNvPicPr>
+            <a:picLocks noChangeAspect="1"/>
+          </p:cNvPicPr>
+          <p:nvPr/>
+        </p:nvPicPr>
+        <p:blipFill>
+          <a:blip r:embed="rId5"/>
+          <a:stretch>
+            <a:fillRect/>
+          </a:stretch>
+        </p:blipFill>
+        <p:spPr>
+          <a:xfrm>
+            <a:off x="1055218" y="1969618"/>
+            <a:ext cx="358445" cy="358445"/>
+          </a:xfrm>
+          <a:prstGeom prst="rect">
+            <a:avLst/>
+          </a:prstGeom>
+        </p:spPr>
+      </p:pic>
+      <p:pic>
+        <p:nvPicPr>
+          <p:cNvPr id="22" name="Strip icon" descr="Strip"/>
+          <p:cNvPicPr>
+            <a:picLocks noChangeAspect="1"/>
+          </p:cNvPicPr>
+          <p:nvPr/>
+        </p:nvPicPr>
+        <p:blipFill>
+          <a:blip r:embed="rId6"/>
+          <a:stretch>
+            <a:fillRect/>
+          </a:stretch>
+        </p:blipFill>
+        <p:spPr>
+          <a:xfrm>
             <a:off x="1075334" y="5190134"/>
             <a:ext cx="409651" cy="409651"/>
           </a:xfrm>
@@ -5024,7 +5079,7 @@
           </a:prstGeom>
           <a:extLst>
             <a:ext uri="{C572A759-6A51-4108-AA02-DFA0A04FC94B}">
-              <ma14:wrappingTextBoxFlag xmlns:ma14="http://schemas.microsoft.com/office/mac/drawingml/2011/main" val="0"/>
+              <ma14:wrappingTextBoxFlag xmlns:ma14="http://schemas.microsoft.com/office/mac/drawingml/2011/main" xmlns="" val="0"/>
             </a:ext>
           </a:extLst>
         </p:spPr>
@@ -5042,7 +5097,7 @@
           <a:p>
             <a:pPr algn="r"/>
             <a:fld id="{F7021451-1387-4CA6-816F-3879F97B5CBC}" type="slidenum">
-              <a:rPr b="0" lang="en-US"/>
+              <a:rPr lang="en-US" b="0"/>
               <a:t>11</a:t>
             </a:fld>
             <a:endParaRPr lang="en-US"/>
@@ -5077,9 +5132,11 @@
       <p:sp>
         <p:nvSpPr>
           <p:cNvPr id="2" name="Text 0"/>
-          <p:cNvSpPr/>
+          <p:cNvSpPr>
+            <a:spLocks noGrp="1"/>
+          </p:cNvSpPr>
           <p:nvPr>
-            <p:ph idx="100" type="title" hasCustomPrompt="1"/>
+            <p:ph type="title" idx="100" hasCustomPrompt="1"/>
           </p:nvPr>
         </p:nvSpPr>
         <p:spPr>
@@ -5097,7 +5154,7 @@
           <a:bodyPr wrap="square" lIns="0" tIns="0" rIns="0" bIns="0" rtlCol="0" anchor="ctr"/>
           <a:lstStyle/>
           <a:p>
-            <a:pPr algn="l" indent="0" marL="0">
+            <a:pPr marL="0" indent="0" algn="l">
               <a:buNone/>
             </a:pPr>
             <a:r>
@@ -5138,6 +5195,13 @@
             <a:prstDash val="solid"/>
           </a:ln>
         </p:spPr>
+        <p:txBody>
+          <a:bodyPr/>
+          <a:lstStyle/>
+          <a:p>
+            <a:endParaRPr lang="en-US"/>
+          </a:p>
+        </p:txBody>
       </p:sp>
       <p:sp>
         <p:nvSpPr>
@@ -5163,6 +5227,13 @@
             <a:prstDash val="solid"/>
           </a:ln>
         </p:spPr>
+        <p:txBody>
+          <a:bodyPr/>
+          <a:lstStyle/>
+          <a:p>
+            <a:endParaRPr lang="en-US"/>
+          </a:p>
+        </p:txBody>
       </p:sp>
       <p:sp>
         <p:nvSpPr>
@@ -5185,7 +5256,7 @@
           <a:bodyPr wrap="square" lIns="0" tIns="0" rIns="0" bIns="0" rtlCol="0" anchor="t"/>
           <a:lstStyle/>
           <a:p>
-            <a:pPr indent="0" marL="0">
+            <a:pPr marL="0" indent="0">
               <a:buNone/>
             </a:pPr>
             <a:r>
@@ -5221,7 +5292,7 @@
           <a:bodyPr wrap="square" lIns="0" tIns="0" rIns="0" bIns="0" rtlCol="0" anchor="t"/>
           <a:lstStyle/>
           <a:p>
-            <a:pPr indent="0" marL="0">
+            <a:pPr marL="0" indent="0">
               <a:spcAft>
                 <a:spcPts val="800"/>
               </a:spcAft>
@@ -5235,30 +5306,24 @@
               </a:rPr>
               <a:t>Models: </a:t>
             </a:r>
-            <a:pPr indent="0" marL="0">
+            <a:r>
+              <a:rPr lang="en-US" sz="1700" dirty="0">
+                <a:solidFill>
+                  <a:schemeClr val="tx1"/>
+                </a:solidFill>
+              </a:rPr>
+              <a:t>Logistic regression and Decision tree</a:t>
+            </a:r>
+            <a:endParaRPr lang="en-US" sz="1700" dirty="0"/>
+          </a:p>
+          <a:p>
+            <a:pPr marL="0" indent="0">
               <a:spcAft>
                 <a:spcPts val="800"/>
               </a:spcAft>
               <a:buNone/>
             </a:pPr>
             <a:r>
-              <a:rPr lang="en-US" sz="1700" dirty="0">
-                <a:solidFill>
-                  <a:schemeClr val="tx1"/>
-                </a:solidFill>
-              </a:rPr>
-              <a:t>Logistic regression and Decision tree</a:t>
-            </a:r>
-            <a:endParaRPr lang="en-US" sz="1700" dirty="0"/>
-          </a:p>
-          <a:p>
-            <a:pPr indent="0" marL="0">
-              <a:spcAft>
-                <a:spcPts val="800"/>
-              </a:spcAft>
-              <a:buNone/>
-            </a:pPr>
-            <a:r>
               <a:rPr lang="en-US" sz="1700" b="1" dirty="0">
                 <a:solidFill>
                   <a:schemeClr val="tx1"/>
@@ -5266,12 +5331,6 @@
               </a:rPr>
               <a:t>Also: </a:t>
             </a:r>
-            <a:pPr indent="0" marL="0">
-              <a:spcAft>
-                <a:spcPts val="800"/>
-              </a:spcAft>
-              <a:buNone/>
-            </a:pPr>
             <a:r>
               <a:rPr lang="en-US" sz="1700" dirty="0">
                 <a:solidFill>
@@ -5310,6 +5369,13 @@
             <a:prstDash val="solid"/>
           </a:ln>
         </p:spPr>
+        <p:txBody>
+          <a:bodyPr/>
+          <a:lstStyle/>
+          <a:p>
+            <a:endParaRPr lang="en-US"/>
+          </a:p>
+        </p:txBody>
       </p:sp>
       <p:sp>
         <p:nvSpPr>
@@ -5335,6 +5401,13 @@
             <a:prstDash val="solid"/>
           </a:ln>
         </p:spPr>
+        <p:txBody>
+          <a:bodyPr/>
+          <a:lstStyle/>
+          <a:p>
+            <a:endParaRPr lang="en-US"/>
+          </a:p>
+        </p:txBody>
       </p:sp>
       <p:sp>
         <p:nvSpPr>
@@ -5357,7 +5430,7 @@
           <a:bodyPr wrap="square" lIns="0" tIns="0" rIns="0" bIns="0" rtlCol="0" anchor="t"/>
           <a:lstStyle/>
           <a:p>
-            <a:pPr indent="0" marL="0">
+            <a:pPr marL="0" indent="0">
               <a:buNone/>
             </a:pPr>
             <a:r>
@@ -5393,7 +5466,7 @@
           <a:bodyPr wrap="square" lIns="0" tIns="0" rIns="0" bIns="0" rtlCol="0" anchor="t"/>
           <a:lstStyle/>
           <a:p>
-            <a:pPr indent="0" marL="0">
+            <a:pPr marL="0" indent="0">
               <a:spcAft>
                 <a:spcPts val="800"/>
               </a:spcAft>
@@ -5407,30 +5480,24 @@
               </a:rPr>
               <a:t>Models: </a:t>
             </a:r>
-            <a:pPr indent="0" marL="0">
+            <a:r>
+              <a:rPr lang="en-US" sz="1700" dirty="0">
+                <a:solidFill>
+                  <a:schemeClr val="tx1"/>
+                </a:solidFill>
+              </a:rPr>
+              <a:t>Random forest and Gradient boosting</a:t>
+            </a:r>
+            <a:endParaRPr lang="en-US" sz="1700" dirty="0"/>
+          </a:p>
+          <a:p>
+            <a:pPr marL="0" indent="0">
               <a:spcAft>
                 <a:spcPts val="800"/>
               </a:spcAft>
               <a:buNone/>
             </a:pPr>
             <a:r>
-              <a:rPr lang="en-US" sz="1700" dirty="0">
-                <a:solidFill>
-                  <a:schemeClr val="tx1"/>
-                </a:solidFill>
-              </a:rPr>
-              <a:t>Random forest and Gradient boosting</a:t>
-            </a:r>
-            <a:endParaRPr lang="en-US" sz="1700" dirty="0"/>
-          </a:p>
-          <a:p>
-            <a:pPr indent="0" marL="0">
-              <a:spcAft>
-                <a:spcPts val="800"/>
-              </a:spcAft>
-              <a:buNone/>
-            </a:pPr>
-            <a:r>
               <a:rPr lang="en-US" sz="1700" b="1" dirty="0">
                 <a:solidFill>
                   <a:schemeClr val="tx1"/>
@@ -5438,12 +5505,6 @@
               </a:rPr>
               <a:t>Also: </a:t>
             </a:r>
-            <a:pPr indent="0" marL="0">
-              <a:spcAft>
-                <a:spcPts val="800"/>
-              </a:spcAft>
-              <a:buNone/>
-            </a:pPr>
             <a:r>
               <a:rPr lang="en-US" sz="1700" dirty="0">
                 <a:solidFill>
@@ -5482,6 +5543,13 @@
             <a:prstDash val="solid"/>
           </a:ln>
         </p:spPr>
+        <p:txBody>
+          <a:bodyPr/>
+          <a:lstStyle/>
+          <a:p>
+            <a:endParaRPr lang="en-US"/>
+          </a:p>
+        </p:txBody>
       </p:sp>
       <p:sp>
         <p:nvSpPr>
@@ -5507,6 +5575,13 @@
             <a:prstDash val="solid"/>
           </a:ln>
         </p:spPr>
+        <p:txBody>
+          <a:bodyPr/>
+          <a:lstStyle/>
+          <a:p>
+            <a:endParaRPr lang="en-US"/>
+          </a:p>
+        </p:txBody>
       </p:sp>
       <p:sp>
         <p:nvSpPr>
@@ -5529,7 +5604,7 @@
           <a:bodyPr wrap="square" lIns="0" tIns="0" rIns="0" bIns="0" rtlCol="0" anchor="ctr"/>
           <a:lstStyle/>
           <a:p>
-            <a:pPr indent="0" marL="0">
+            <a:pPr marL="0" indent="0">
               <a:buNone/>
             </a:pPr>
             <a:r>
@@ -5540,9 +5615,6 @@
               </a:rPr>
               <a:t>Together: </a:t>
             </a:r>
-            <a:pPr indent="0" marL="0">
-              <a:buNone/>
-            </a:pPr>
             <a:r>
               <a:rPr lang="en-US" sz="1600" dirty="0">
                 <a:solidFill>
@@ -5557,55 +5629,7 @@
       </p:sp>
       <p:pic>
         <p:nvPicPr>
-          <p:cNvPr id="15" name="Josh icon" descr="Josh">    </p:cNvPr>
-          <p:cNvPicPr>
-            <a:picLocks noChangeAspect="1"/>
-          </p:cNvPicPr>
-          <p:nvPr/>
-        </p:nvPicPr>
-        <p:blipFill>
-          <a:blip r:embed="rId1"/>
-          <a:stretch>
-            <a:fillRect/>
-          </a:stretch>
-        </p:blipFill>
-        <p:spPr>
-          <a:xfrm>
-            <a:off x="1121054" y="1989734"/>
-            <a:ext cx="409651" cy="409651"/>
-          </a:xfrm>
-          <a:prstGeom prst="rect">
-            <a:avLst/>
-          </a:prstGeom>
-        </p:spPr>
-      </p:pic>
-      <p:pic>
-        <p:nvPicPr>
-          <p:cNvPr id="16" name="Logan icon" descr="Logan">    </p:cNvPr>
-          <p:cNvPicPr>
-            <a:picLocks noChangeAspect="1"/>
-          </p:cNvPicPr>
-          <p:nvPr/>
-        </p:nvPicPr>
-        <p:blipFill>
-          <a:blip r:embed="rId2"/>
-          <a:stretch>
-            <a:fillRect/>
-          </a:stretch>
-        </p:blipFill>
-        <p:spPr>
-          <a:xfrm>
-            <a:off x="6698894" y="1989734"/>
-            <a:ext cx="409651" cy="409651"/>
-          </a:xfrm>
-          <a:prstGeom prst="rect">
-            <a:avLst/>
-          </a:prstGeom>
-        </p:spPr>
-      </p:pic>
-      <p:pic>
-        <p:nvPicPr>
-          <p:cNvPr id="17" name="Strip icon" descr="Strip">    </p:cNvPr>
+          <p:cNvPr id="15" name="Josh icon" descr="Josh"/>
           <p:cNvPicPr>
             <a:picLocks noChangeAspect="1"/>
           </p:cNvPicPr>
@@ -5619,6 +5643,54 @@
         </p:blipFill>
         <p:spPr>
           <a:xfrm>
+            <a:off x="1121054" y="1989734"/>
+            <a:ext cx="409651" cy="409651"/>
+          </a:xfrm>
+          <a:prstGeom prst="rect">
+            <a:avLst/>
+          </a:prstGeom>
+        </p:spPr>
+      </p:pic>
+      <p:pic>
+        <p:nvPicPr>
+          <p:cNvPr id="16" name="Logan icon" descr="Logan"/>
+          <p:cNvPicPr>
+            <a:picLocks noChangeAspect="1"/>
+          </p:cNvPicPr>
+          <p:nvPr/>
+        </p:nvPicPr>
+        <p:blipFill>
+          <a:blip r:embed="rId4"/>
+          <a:stretch>
+            <a:fillRect/>
+          </a:stretch>
+        </p:blipFill>
+        <p:spPr>
+          <a:xfrm>
+            <a:off x="6698894" y="1989734"/>
+            <a:ext cx="409651" cy="409651"/>
+          </a:xfrm>
+          <a:prstGeom prst="rect">
+            <a:avLst/>
+          </a:prstGeom>
+        </p:spPr>
+      </p:pic>
+      <p:pic>
+        <p:nvPicPr>
+          <p:cNvPr id="17" name="Strip icon" descr="Strip"/>
+          <p:cNvPicPr>
+            <a:picLocks noChangeAspect="1"/>
+          </p:cNvPicPr>
+          <p:nvPr/>
+        </p:nvPicPr>
+        <p:blipFill>
+          <a:blip r:embed="rId5"/>
+          <a:stretch>
+            <a:fillRect/>
+          </a:stretch>
+        </p:blipFill>
+        <p:spPr>
+          <a:xfrm>
             <a:off x="1075334" y="5373014"/>
             <a:ext cx="409651" cy="409651"/>
           </a:xfrm>
@@ -5647,7 +5719,7 @@
           </a:prstGeom>
           <a:extLst>
             <a:ext uri="{C572A759-6A51-4108-AA02-DFA0A04FC94B}">
-              <ma14:wrappingTextBoxFlag xmlns:ma14="http://schemas.microsoft.com/office/mac/drawingml/2011/main" val="0"/>
+              <ma14:wrappingTextBoxFlag xmlns:ma14="http://schemas.microsoft.com/office/mac/drawingml/2011/main" xmlns="" val="0"/>
             </a:ext>
           </a:extLst>
         </p:spPr>
@@ -5665,7 +5737,7 @@
           <a:p>
             <a:pPr algn="r"/>
             <a:fld id="{F7021451-1387-4CA6-816F-3879F97B5CBC}" type="slidenum">
-              <a:rPr b="0" lang="en-US"/>
+              <a:rPr lang="en-US" b="0"/>
               <a:t>12</a:t>
             </a:fld>
             <a:endParaRPr lang="en-US"/>
@@ -5700,9 +5772,11 @@
       <p:sp>
         <p:nvSpPr>
           <p:cNvPr id="2" name="Text 0"/>
-          <p:cNvSpPr/>
+          <p:cNvSpPr>
+            <a:spLocks noGrp="1"/>
+          </p:cNvSpPr>
           <p:nvPr>
-            <p:ph idx="100" type="title" hasCustomPrompt="1"/>
+            <p:ph type="title" idx="100" hasCustomPrompt="1"/>
           </p:nvPr>
         </p:nvSpPr>
         <p:spPr>
@@ -5720,7 +5794,7 @@
           <a:bodyPr wrap="square" lIns="0" tIns="0" rIns="0" bIns="0" rtlCol="0" anchor="ctr"/>
           <a:lstStyle/>
           <a:p>
-            <a:pPr algn="l" indent="0" marL="0">
+            <a:pPr marL="0" indent="0" algn="l">
               <a:buNone/>
             </a:pPr>
             <a:r>
@@ -5761,6 +5835,13 @@
             <a:prstDash val="solid"/>
           </a:ln>
         </p:spPr>
+        <p:txBody>
+          <a:bodyPr/>
+          <a:lstStyle/>
+          <a:p>
+            <a:endParaRPr lang="en-US"/>
+          </a:p>
+        </p:txBody>
       </p:sp>
       <p:sp>
         <p:nvSpPr>
@@ -5786,6 +5867,13 @@
             <a:prstDash val="solid"/>
           </a:ln>
         </p:spPr>
+        <p:txBody>
+          <a:bodyPr/>
+          <a:lstStyle/>
+          <a:p>
+            <a:endParaRPr lang="en-US"/>
+          </a:p>
+        </p:txBody>
       </p:sp>
       <p:sp>
         <p:nvSpPr>
@@ -5808,7 +5896,7 @@
           <a:bodyPr wrap="square" lIns="0" tIns="0" rIns="0" bIns="0" rtlCol="0" anchor="t"/>
           <a:lstStyle/>
           <a:p>
-            <a:pPr indent="0" marL="0">
+            <a:pPr marL="0" indent="0">
               <a:buNone/>
             </a:pPr>
             <a:r>
@@ -5844,7 +5932,7 @@
           <a:bodyPr wrap="square" lIns="0" tIns="0" rIns="0" bIns="0" rtlCol="0" anchor="t"/>
           <a:lstStyle/>
           <a:p>
-            <a:pPr indent="0" marL="0">
+            <a:pPr marL="0" indent="0">
               <a:buNone/>
             </a:pPr>
             <a:r>
@@ -5885,6 +5973,13 @@
             <a:prstDash val="solid"/>
           </a:ln>
         </p:spPr>
+        <p:txBody>
+          <a:bodyPr/>
+          <a:lstStyle/>
+          <a:p>
+            <a:endParaRPr lang="en-US"/>
+          </a:p>
+        </p:txBody>
       </p:sp>
       <p:sp>
         <p:nvSpPr>
@@ -5910,6 +6005,13 @@
             <a:prstDash val="solid"/>
           </a:ln>
         </p:spPr>
+        <p:txBody>
+          <a:bodyPr/>
+          <a:lstStyle/>
+          <a:p>
+            <a:endParaRPr lang="en-US"/>
+          </a:p>
+        </p:txBody>
       </p:sp>
       <p:sp>
         <p:nvSpPr>
@@ -5932,7 +6034,7 @@
           <a:bodyPr wrap="square" lIns="0" tIns="0" rIns="0" bIns="0" rtlCol="0" anchor="t"/>
           <a:lstStyle/>
           <a:p>
-            <a:pPr indent="0" marL="0">
+            <a:pPr marL="0" indent="0">
               <a:buNone/>
             </a:pPr>
             <a:r>
@@ -5968,7 +6070,7 @@
           <a:bodyPr wrap="square" lIns="0" tIns="0" rIns="0" bIns="0" rtlCol="0" anchor="t"/>
           <a:lstStyle/>
           <a:p>
-            <a:pPr indent="0" marL="0">
+            <a:pPr marL="0" indent="0">
               <a:buNone/>
             </a:pPr>
             <a:r>
@@ -6009,6 +6111,13 @@
             <a:prstDash val="solid"/>
           </a:ln>
         </p:spPr>
+        <p:txBody>
+          <a:bodyPr/>
+          <a:lstStyle/>
+          <a:p>
+            <a:endParaRPr lang="en-US"/>
+          </a:p>
+        </p:txBody>
       </p:sp>
       <p:sp>
         <p:nvSpPr>
@@ -6034,6 +6143,13 @@
             <a:prstDash val="solid"/>
           </a:ln>
         </p:spPr>
+        <p:txBody>
+          <a:bodyPr/>
+          <a:lstStyle/>
+          <a:p>
+            <a:endParaRPr lang="en-US"/>
+          </a:p>
+        </p:txBody>
       </p:sp>
       <p:sp>
         <p:nvSpPr>
@@ -6056,7 +6172,7 @@
           <a:bodyPr wrap="square" lIns="0" tIns="0" rIns="0" bIns="0" rtlCol="0" anchor="t"/>
           <a:lstStyle/>
           <a:p>
-            <a:pPr indent="0" marL="0">
+            <a:pPr marL="0" indent="0">
               <a:buNone/>
             </a:pPr>
             <a:r>
@@ -6092,7 +6208,7 @@
           <a:bodyPr wrap="square" lIns="0" tIns="0" rIns="0" bIns="0" rtlCol="0" anchor="t"/>
           <a:lstStyle/>
           <a:p>
-            <a:pPr indent="0" marL="0">
+            <a:pPr marL="0" indent="0">
               <a:buNone/>
             </a:pPr>
             <a:r>
@@ -6109,55 +6225,7 @@
       </p:sp>
       <p:pic>
         <p:nvPicPr>
-          <p:cNvPr id="16" name="The problem icon" descr="The problem">    </p:cNvPr>
-          <p:cNvPicPr>
-            <a:picLocks noChangeAspect="1"/>
-          </p:cNvPicPr>
-          <p:nvPr/>
-        </p:nvPicPr>
-        <p:blipFill>
-          <a:blip r:embed="rId1"/>
-          <a:stretch>
-            <a:fillRect/>
-          </a:stretch>
-        </p:blipFill>
-        <p:spPr>
-          <a:xfrm>
-            <a:off x="1055218" y="1969618"/>
-            <a:ext cx="358445" cy="358445"/>
-          </a:xfrm>
-          <a:prstGeom prst="rect">
-            <a:avLst/>
-          </a:prstGeom>
-        </p:spPr>
-      </p:pic>
-      <p:pic>
-        <p:nvPicPr>
-          <p:cNvPr id="17" name="The data icon" descr="The data">    </p:cNvPr>
-          <p:cNvPicPr>
-            <a:picLocks noChangeAspect="1"/>
-          </p:cNvPicPr>
-          <p:nvPr/>
-        </p:nvPicPr>
-        <p:blipFill>
-          <a:blip r:embed="rId2"/>
-          <a:stretch>
-            <a:fillRect/>
-          </a:stretch>
-        </p:blipFill>
-        <p:spPr>
-          <a:xfrm>
-            <a:off x="4773778" y="1969618"/>
-            <a:ext cx="358445" cy="358445"/>
-          </a:xfrm>
-          <a:prstGeom prst="rect">
-            <a:avLst/>
-          </a:prstGeom>
-        </p:spPr>
-      </p:pic>
-      <p:pic>
-        <p:nvPicPr>
-          <p:cNvPr id="18" name="The plan icon" descr="The plan">    </p:cNvPr>
+          <p:cNvPr id="16" name="The problem icon" descr="The problem"/>
           <p:cNvPicPr>
             <a:picLocks noChangeAspect="1"/>
           </p:cNvPicPr>
@@ -6171,6 +6239,54 @@
         </p:blipFill>
         <p:spPr>
           <a:xfrm>
+            <a:off x="1055218" y="1969618"/>
+            <a:ext cx="358445" cy="358445"/>
+          </a:xfrm>
+          <a:prstGeom prst="rect">
+            <a:avLst/>
+          </a:prstGeom>
+        </p:spPr>
+      </p:pic>
+      <p:pic>
+        <p:nvPicPr>
+          <p:cNvPr id="17" name="The data icon" descr="The data"/>
+          <p:cNvPicPr>
+            <a:picLocks noChangeAspect="1"/>
+          </p:cNvPicPr>
+          <p:nvPr/>
+        </p:nvPicPr>
+        <p:blipFill>
+          <a:blip r:embed="rId4"/>
+          <a:stretch>
+            <a:fillRect/>
+          </a:stretch>
+        </p:blipFill>
+        <p:spPr>
+          <a:xfrm>
+            <a:off x="4773778" y="1969618"/>
+            <a:ext cx="358445" cy="358445"/>
+          </a:xfrm>
+          <a:prstGeom prst="rect">
+            <a:avLst/>
+          </a:prstGeom>
+        </p:spPr>
+      </p:pic>
+      <p:pic>
+        <p:nvPicPr>
+          <p:cNvPr id="18" name="The plan icon" descr="The plan"/>
+          <p:cNvPicPr>
+            <a:picLocks noChangeAspect="1"/>
+          </p:cNvPicPr>
+          <p:nvPr/>
+        </p:nvPicPr>
+        <p:blipFill>
+          <a:blip r:embed="rId5"/>
+          <a:stretch>
+            <a:fillRect/>
+          </a:stretch>
+        </p:blipFill>
+        <p:spPr>
+          <a:xfrm>
             <a:off x="8492338" y="1969618"/>
             <a:ext cx="358445" cy="358445"/>
           </a:xfrm>
@@ -6199,7 +6315,7 @@
           </a:prstGeom>
           <a:extLst>
             <a:ext uri="{C572A759-6A51-4108-AA02-DFA0A04FC94B}">
-              <ma14:wrappingTextBoxFlag xmlns:ma14="http://schemas.microsoft.com/office/mac/drawingml/2011/main" val="0"/>
+              <ma14:wrappingTextBoxFlag xmlns:ma14="http://schemas.microsoft.com/office/mac/drawingml/2011/main" xmlns="" val="0"/>
             </a:ext>
           </a:extLst>
         </p:spPr>
@@ -6217,7 +6333,7 @@
           <a:p>
             <a:pPr algn="r"/>
             <a:fld id="{F7021451-1387-4CA6-816F-3879F97B5CBC}" type="slidenum">
-              <a:rPr b="0" lang="en-US"/>
+              <a:rPr lang="en-US" b="0"/>
               <a:t>2</a:t>
             </a:fld>
             <a:endParaRPr lang="en-US"/>
@@ -6252,9 +6368,11 @@
       <p:sp>
         <p:nvSpPr>
           <p:cNvPr id="2" name="Text 0"/>
-          <p:cNvSpPr/>
+          <p:cNvSpPr>
+            <a:spLocks noGrp="1"/>
+          </p:cNvSpPr>
           <p:nvPr>
-            <p:ph idx="100" type="title" hasCustomPrompt="1"/>
+            <p:ph type="title" idx="100" hasCustomPrompt="1"/>
           </p:nvPr>
         </p:nvSpPr>
         <p:spPr>
@@ -6272,7 +6390,7 @@
           <a:bodyPr wrap="square" lIns="0" tIns="0" rIns="0" bIns="0" rtlCol="0" anchor="ctr"/>
           <a:lstStyle/>
           <a:p>
-            <a:pPr algn="l" indent="0" marL="0">
+            <a:pPr marL="0" indent="0" algn="l">
               <a:buNone/>
             </a:pPr>
             <a:r>
@@ -6313,6 +6431,13 @@
             <a:prstDash val="solid"/>
           </a:ln>
         </p:spPr>
+        <p:txBody>
+          <a:bodyPr/>
+          <a:lstStyle/>
+          <a:p>
+            <a:endParaRPr lang="en-US"/>
+          </a:p>
+        </p:txBody>
       </p:sp>
       <p:sp>
         <p:nvSpPr>
@@ -6335,7 +6460,7 @@
           <a:bodyPr wrap="square" lIns="0" tIns="0" rIns="0" bIns="0" rtlCol="0" anchor="ctr"/>
           <a:lstStyle/>
           <a:p>
-            <a:pPr indent="0" marL="0">
+            <a:pPr marL="0" indent="0">
               <a:buNone/>
             </a:pPr>
             <a:r>
@@ -6376,6 +6501,13 @@
             <a:prstDash val="solid"/>
           </a:ln>
         </p:spPr>
+        <p:txBody>
+          <a:bodyPr/>
+          <a:lstStyle/>
+          <a:p>
+            <a:endParaRPr lang="en-US"/>
+          </a:p>
+        </p:txBody>
       </p:sp>
       <p:sp>
         <p:nvSpPr>
@@ -6398,7 +6530,7 @@
           <a:bodyPr wrap="square" lIns="0" tIns="0" rIns="0" bIns="0" rtlCol="0" anchor="ctr"/>
           <a:lstStyle/>
           <a:p>
-            <a:pPr algn="ctr" indent="0" marL="0">
+            <a:pPr marL="0" indent="0" algn="ctr">
               <a:buNone/>
             </a:pPr>
             <a:r>
@@ -6434,7 +6566,7 @@
           <a:bodyPr wrap="square" lIns="0" tIns="0" rIns="0" bIns="0" rtlCol="0" anchor="ctr"/>
           <a:lstStyle/>
           <a:p>
-            <a:pPr indent="0" marL="0">
+            <a:pPr marL="0" indent="0">
               <a:buNone/>
             </a:pPr>
             <a:r>
@@ -6475,6 +6607,13 @@
             <a:prstDash val="solid"/>
           </a:ln>
         </p:spPr>
+        <p:txBody>
+          <a:bodyPr/>
+          <a:lstStyle/>
+          <a:p>
+            <a:endParaRPr lang="en-US"/>
+          </a:p>
+        </p:txBody>
       </p:sp>
       <p:sp>
         <p:nvSpPr>
@@ -6497,7 +6636,7 @@
           <a:bodyPr wrap="square" lIns="0" tIns="0" rIns="0" bIns="0" rtlCol="0" anchor="ctr"/>
           <a:lstStyle/>
           <a:p>
-            <a:pPr indent="0" marL="0">
+            <a:pPr marL="0" indent="0">
               <a:buNone/>
             </a:pPr>
             <a:r>
@@ -6538,6 +6677,13 @@
             <a:prstDash val="solid"/>
           </a:ln>
         </p:spPr>
+        <p:txBody>
+          <a:bodyPr/>
+          <a:lstStyle/>
+          <a:p>
+            <a:endParaRPr lang="en-US"/>
+          </a:p>
+        </p:txBody>
       </p:sp>
       <p:sp>
         <p:nvSpPr>
@@ -6560,7 +6706,7 @@
           <a:bodyPr wrap="square" lIns="0" tIns="0" rIns="0" bIns="0" rtlCol="0" anchor="ctr"/>
           <a:lstStyle/>
           <a:p>
-            <a:pPr algn="ctr" indent="0" marL="0">
+            <a:pPr marL="0" indent="0" algn="ctr">
               <a:buNone/>
             </a:pPr>
             <a:r>
@@ -6596,7 +6742,7 @@
           <a:bodyPr wrap="square" lIns="0" tIns="0" rIns="0" bIns="0" rtlCol="0" anchor="ctr"/>
           <a:lstStyle/>
           <a:p>
-            <a:pPr indent="0" marL="0">
+            <a:pPr marL="0" indent="0">
               <a:buNone/>
             </a:pPr>
             <a:r>
@@ -6637,6 +6783,13 @@
             <a:prstDash val="solid"/>
           </a:ln>
         </p:spPr>
+        <p:txBody>
+          <a:bodyPr/>
+          <a:lstStyle/>
+          <a:p>
+            <a:endParaRPr lang="en-US"/>
+          </a:p>
+        </p:txBody>
       </p:sp>
       <p:sp>
         <p:nvSpPr>
@@ -6659,7 +6812,7 @@
           <a:bodyPr wrap="square" lIns="0" tIns="0" rIns="0" bIns="0" rtlCol="0" anchor="ctr"/>
           <a:lstStyle/>
           <a:p>
-            <a:pPr indent="0" marL="0">
+            <a:pPr marL="0" indent="0">
               <a:buNone/>
             </a:pPr>
             <a:r>
@@ -6700,6 +6853,13 @@
             <a:prstDash val="solid"/>
           </a:ln>
         </p:spPr>
+        <p:txBody>
+          <a:bodyPr/>
+          <a:lstStyle/>
+          <a:p>
+            <a:endParaRPr lang="en-US"/>
+          </a:p>
+        </p:txBody>
       </p:sp>
       <p:sp>
         <p:nvSpPr>
@@ -6722,7 +6882,7 @@
           <a:bodyPr wrap="square" lIns="0" tIns="0" rIns="0" bIns="0" rtlCol="0" anchor="ctr"/>
           <a:lstStyle/>
           <a:p>
-            <a:pPr algn="ctr" indent="0" marL="0">
+            <a:pPr marL="0" indent="0" algn="ctr">
               <a:buNone/>
             </a:pPr>
             <a:r>
@@ -6758,7 +6918,7 @@
           <a:bodyPr wrap="square" lIns="0" tIns="0" rIns="0" bIns="0" rtlCol="0" anchor="ctr"/>
           <a:lstStyle/>
           <a:p>
-            <a:pPr indent="0" marL="0">
+            <a:pPr marL="0" indent="0">
               <a:buNone/>
             </a:pPr>
             <a:r>
@@ -6799,6 +6959,13 @@
             <a:prstDash val="solid"/>
           </a:ln>
         </p:spPr>
+        <p:txBody>
+          <a:bodyPr/>
+          <a:lstStyle/>
+          <a:p>
+            <a:endParaRPr lang="en-US"/>
+          </a:p>
+        </p:txBody>
       </p:sp>
       <p:sp>
         <p:nvSpPr>
@@ -6821,7 +6988,7 @@
           <a:bodyPr wrap="square" lIns="0" tIns="0" rIns="0" bIns="0" rtlCol="0" anchor="ctr"/>
           <a:lstStyle/>
           <a:p>
-            <a:pPr indent="0" marL="0">
+            <a:pPr marL="0" indent="0">
               <a:buNone/>
             </a:pPr>
             <a:r>
@@ -6862,6 +7029,13 @@
             <a:prstDash val="solid"/>
           </a:ln>
         </p:spPr>
+        <p:txBody>
+          <a:bodyPr/>
+          <a:lstStyle/>
+          <a:p>
+            <a:endParaRPr lang="en-US"/>
+          </a:p>
+        </p:txBody>
       </p:sp>
       <p:sp>
         <p:nvSpPr>
@@ -6884,7 +7058,7 @@
           <a:bodyPr wrap="square" lIns="0" tIns="0" rIns="0" bIns="0" rtlCol="0" anchor="ctr"/>
           <a:lstStyle/>
           <a:p>
-            <a:pPr algn="ctr" indent="0" marL="0">
+            <a:pPr marL="0" indent="0" algn="ctr">
               <a:buNone/>
             </a:pPr>
             <a:r>
@@ -6920,7 +7094,7 @@
           <a:bodyPr wrap="square" lIns="0" tIns="0" rIns="0" bIns="0" rtlCol="0" anchor="ctr"/>
           <a:lstStyle/>
           <a:p>
-            <a:pPr indent="0" marL="0">
+            <a:pPr marL="0" indent="0">
               <a:buNone/>
             </a:pPr>
             <a:r>
@@ -6961,6 +7135,13 @@
             <a:prstDash val="solid"/>
           </a:ln>
         </p:spPr>
+        <p:txBody>
+          <a:bodyPr/>
+          <a:lstStyle/>
+          <a:p>
+            <a:endParaRPr lang="en-US"/>
+          </a:p>
+        </p:txBody>
       </p:sp>
       <p:sp>
         <p:nvSpPr>
@@ -6983,7 +7164,7 @@
           <a:bodyPr wrap="square" lIns="0" tIns="0" rIns="0" bIns="0" rtlCol="0" anchor="ctr"/>
           <a:lstStyle/>
           <a:p>
-            <a:pPr indent="0" marL="0">
+            <a:pPr marL="0" indent="0">
               <a:buNone/>
             </a:pPr>
             <a:r>
@@ -7024,6 +7205,13 @@
             <a:prstDash val="solid"/>
           </a:ln>
         </p:spPr>
+        <p:txBody>
+          <a:bodyPr/>
+          <a:lstStyle/>
+          <a:p>
+            <a:endParaRPr lang="en-US"/>
+          </a:p>
+        </p:txBody>
       </p:sp>
       <p:sp>
         <p:nvSpPr>
@@ -7046,7 +7234,7 @@
           <a:bodyPr wrap="square" lIns="0" tIns="0" rIns="0" bIns="0" rtlCol="0" anchor="ctr"/>
           <a:lstStyle/>
           <a:p>
-            <a:pPr algn="ctr" indent="0" marL="0">
+            <a:pPr marL="0" indent="0" algn="ctr">
               <a:buNone/>
             </a:pPr>
             <a:r>
@@ -7082,7 +7270,7 @@
           <a:bodyPr wrap="square" lIns="0" tIns="0" rIns="0" bIns="0" rtlCol="0" anchor="ctr"/>
           <a:lstStyle/>
           <a:p>
-            <a:pPr indent="0" marL="0">
+            <a:pPr marL="0" indent="0">
               <a:buNone/>
             </a:pPr>
             <a:r>
@@ -7123,6 +7311,13 @@
             <a:prstDash val="solid"/>
           </a:ln>
         </p:spPr>
+        <p:txBody>
+          <a:bodyPr/>
+          <a:lstStyle/>
+          <a:p>
+            <a:endParaRPr lang="en-US"/>
+          </a:p>
+        </p:txBody>
       </p:sp>
       <p:sp>
         <p:nvSpPr>
@@ -7145,7 +7340,7 @@
           <a:bodyPr wrap="square" lIns="0" tIns="0" rIns="0" bIns="0" rtlCol="0" anchor="ctr"/>
           <a:lstStyle/>
           <a:p>
-            <a:pPr indent="0" marL="0">
+            <a:pPr marL="0" indent="0">
               <a:buNone/>
             </a:pPr>
             <a:r>
@@ -7186,6 +7381,13 @@
             <a:prstDash val="solid"/>
           </a:ln>
         </p:spPr>
+        <p:txBody>
+          <a:bodyPr/>
+          <a:lstStyle/>
+          <a:p>
+            <a:endParaRPr lang="en-US"/>
+          </a:p>
+        </p:txBody>
       </p:sp>
       <p:sp>
         <p:nvSpPr>
@@ -7208,7 +7410,7 @@
           <a:bodyPr wrap="square" lIns="0" tIns="0" rIns="0" bIns="0" rtlCol="0" anchor="ctr"/>
           <a:lstStyle/>
           <a:p>
-            <a:pPr algn="ctr" indent="0" marL="0">
+            <a:pPr marL="0" indent="0" algn="ctr">
               <a:buNone/>
             </a:pPr>
             <a:r>
@@ -7244,7 +7446,7 @@
           <a:bodyPr wrap="square" lIns="0" tIns="0" rIns="0" bIns="0" rtlCol="0" anchor="ctr"/>
           <a:lstStyle/>
           <a:p>
-            <a:pPr indent="0" marL="0">
+            <a:pPr marL="0" indent="0">
               <a:buNone/>
             </a:pPr>
             <a:r>
@@ -7261,7 +7463,7 @@
       </p:sp>
       <p:sp>
         <p:nvSpPr>
-          <p:cNvPr id="25" name="Slide Number Placeholder 0"/>
+          <p:cNvPr id="3" name="Slide Number Placeholder 0"/>
           <p:cNvSpPr>
             <a:spLocks noGrp="1"/>
           </p:cNvSpPr>
@@ -7279,7 +7481,7 @@
           </a:prstGeom>
           <a:extLst>
             <a:ext uri="{C572A759-6A51-4108-AA02-DFA0A04FC94B}">
-              <ma14:wrappingTextBoxFlag xmlns:ma14="http://schemas.microsoft.com/office/mac/drawingml/2011/main" val="0"/>
+              <ma14:wrappingTextBoxFlag xmlns:ma14="http://schemas.microsoft.com/office/mac/drawingml/2011/main" xmlns="" val="0"/>
             </a:ext>
           </a:extLst>
         </p:spPr>
@@ -7297,7 +7499,7 @@
           <a:p>
             <a:pPr algn="r"/>
             <a:fld id="{F7021451-1387-4CA6-816F-3879F97B5CBC}" type="slidenum">
-              <a:rPr b="0" lang="en-US"/>
+              <a:rPr lang="en-US" b="0"/>
               <a:t>3</a:t>
             </a:fld>
             <a:endParaRPr lang="en-US"/>
@@ -7332,9 +7534,11 @@
       <p:sp>
         <p:nvSpPr>
           <p:cNvPr id="2" name="Text 0"/>
-          <p:cNvSpPr/>
+          <p:cNvSpPr>
+            <a:spLocks noGrp="1"/>
+          </p:cNvSpPr>
           <p:nvPr>
-            <p:ph idx="100" type="title" hasCustomPrompt="1"/>
+            <p:ph type="title" idx="100" hasCustomPrompt="1"/>
           </p:nvPr>
         </p:nvSpPr>
         <p:spPr>
@@ -7352,7 +7556,7 @@
           <a:bodyPr wrap="square" lIns="0" tIns="0" rIns="0" bIns="0" rtlCol="0" anchor="ctr"/>
           <a:lstStyle/>
           <a:p>
-            <a:pPr algn="l" indent="0" marL="0">
+            <a:pPr marL="0" indent="0" algn="l">
               <a:buNone/>
             </a:pPr>
             <a:r>
@@ -7393,6 +7597,13 @@
             <a:prstDash val="solid"/>
           </a:ln>
         </p:spPr>
+        <p:txBody>
+          <a:bodyPr/>
+          <a:lstStyle/>
+          <a:p>
+            <a:endParaRPr lang="en-US"/>
+          </a:p>
+        </p:txBody>
       </p:sp>
       <p:sp>
         <p:nvSpPr>
@@ -7415,7 +7626,7 @@
           <a:bodyPr wrap="square" lIns="0" tIns="0" rIns="0" bIns="0" rtlCol="0" anchor="ctr"/>
           <a:lstStyle/>
           <a:p>
-            <a:pPr indent="0" marL="0">
+            <a:pPr marL="0" indent="0">
               <a:buNone/>
             </a:pPr>
             <a:r>
@@ -7451,7 +7662,7 @@
           <a:bodyPr wrap="square" lIns="0" tIns="0" rIns="0" bIns="0" rtlCol="0" anchor="t"/>
           <a:lstStyle/>
           <a:p>
-            <a:pPr indent="0" marL="0">
+            <a:pPr marL="0" indent="0">
               <a:buNone/>
             </a:pPr>
             <a:r>
@@ -7492,6 +7703,13 @@
             <a:prstDash val="solid"/>
           </a:ln>
         </p:spPr>
+        <p:txBody>
+          <a:bodyPr/>
+          <a:lstStyle/>
+          <a:p>
+            <a:endParaRPr lang="en-US"/>
+          </a:p>
+        </p:txBody>
       </p:sp>
       <p:sp>
         <p:nvSpPr>
@@ -7514,7 +7732,7 @@
           <a:bodyPr wrap="square" lIns="0" tIns="0" rIns="0" bIns="0" rtlCol="0" anchor="ctr"/>
           <a:lstStyle/>
           <a:p>
-            <a:pPr indent="0" marL="0">
+            <a:pPr marL="0" indent="0">
               <a:buNone/>
             </a:pPr>
             <a:r>
@@ -7550,7 +7768,7 @@
           <a:bodyPr wrap="square" lIns="0" tIns="0" rIns="0" bIns="0" rtlCol="0" anchor="t"/>
           <a:lstStyle/>
           <a:p>
-            <a:pPr indent="0" marL="0">
+            <a:pPr marL="0" indent="0">
               <a:buNone/>
             </a:pPr>
             <a:r>
@@ -7591,6 +7809,13 @@
             <a:prstDash val="solid"/>
           </a:ln>
         </p:spPr>
+        <p:txBody>
+          <a:bodyPr/>
+          <a:lstStyle/>
+          <a:p>
+            <a:endParaRPr lang="en-US"/>
+          </a:p>
+        </p:txBody>
       </p:sp>
       <p:sp>
         <p:nvSpPr>
@@ -7613,7 +7838,7 @@
           <a:bodyPr wrap="square" lIns="0" tIns="0" rIns="0" bIns="0" rtlCol="0" anchor="ctr"/>
           <a:lstStyle/>
           <a:p>
-            <a:pPr indent="0" marL="0">
+            <a:pPr marL="0" indent="0">
               <a:buNone/>
             </a:pPr>
             <a:r>
@@ -7649,7 +7874,7 @@
           <a:bodyPr wrap="square" lIns="0" tIns="0" rIns="0" bIns="0" rtlCol="0" anchor="t"/>
           <a:lstStyle/>
           <a:p>
-            <a:pPr indent="0" marL="0">
+            <a:pPr marL="0" indent="0">
               <a:buNone/>
             </a:pPr>
             <a:r>
@@ -7690,6 +7915,13 @@
             <a:prstDash val="solid"/>
           </a:ln>
         </p:spPr>
+        <p:txBody>
+          <a:bodyPr/>
+          <a:lstStyle/>
+          <a:p>
+            <a:endParaRPr lang="en-US"/>
+          </a:p>
+        </p:txBody>
       </p:sp>
       <p:sp>
         <p:nvSpPr>
@@ -7712,7 +7944,7 @@
           <a:bodyPr wrap="square" lIns="0" tIns="0" rIns="0" bIns="0" rtlCol="0" anchor="t"/>
           <a:lstStyle/>
           <a:p>
-            <a:pPr indent="0" marL="0">
+            <a:pPr marL="0" indent="0">
               <a:buNone/>
             </a:pPr>
             <a:r>
@@ -7748,7 +7980,7 @@
           <a:bodyPr wrap="square" lIns="0" tIns="0" rIns="0" bIns="0" rtlCol="0" anchor="t"/>
           <a:lstStyle/>
           <a:p>
-            <a:pPr indent="0" marL="0">
+            <a:pPr marL="0" indent="0">
               <a:buNone/>
             </a:pPr>
             <a:r>
@@ -7789,6 +8021,13 @@
             <a:prstDash val="solid"/>
           </a:ln>
         </p:spPr>
+        <p:txBody>
+          <a:bodyPr/>
+          <a:lstStyle/>
+          <a:p>
+            <a:endParaRPr lang="en-US"/>
+          </a:p>
+        </p:txBody>
       </p:sp>
       <p:sp>
         <p:nvSpPr>
@@ -7814,6 +8053,13 @@
             <a:prstDash val="solid"/>
           </a:ln>
         </p:spPr>
+        <p:txBody>
+          <a:bodyPr/>
+          <a:lstStyle/>
+          <a:p>
+            <a:endParaRPr lang="en-US"/>
+          </a:p>
+        </p:txBody>
       </p:sp>
       <p:sp>
         <p:nvSpPr>
@@ -7836,7 +8082,7 @@
           <a:bodyPr wrap="square" lIns="0" tIns="0" rIns="0" bIns="0" rtlCol="0" anchor="ctr"/>
           <a:lstStyle/>
           <a:p>
-            <a:pPr indent="0" marL="0">
+            <a:pPr marL="0" indent="0">
               <a:buNone/>
             </a:pPr>
             <a:r>
@@ -7847,9 +8093,6 @@
               </a:rPr>
               <a:t>No private data: </a:t>
             </a:r>
-            <a:pPr indent="0" marL="0">
-              <a:buNone/>
-            </a:pPr>
             <a:r>
               <a:rPr lang="en-US" sz="1600" dirty="0">
                 <a:solidFill>
@@ -7864,14 +8107,14 @@
       </p:sp>
       <p:pic>
         <p:nvPicPr>
-          <p:cNvPr id="19" name="Strip icon" descr="Strip">    </p:cNvPr>
+          <p:cNvPr id="19" name="Strip icon" descr="Strip"/>
           <p:cNvPicPr>
             <a:picLocks noChangeAspect="1"/>
           </p:cNvPicPr>
           <p:nvPr/>
         </p:nvPicPr>
         <p:blipFill>
-          <a:blip r:embed="rId1"/>
+          <a:blip r:embed="rId3"/>
           <a:stretch>
             <a:fillRect/>
           </a:stretch>
@@ -7906,7 +8149,7 @@
           </a:prstGeom>
           <a:extLst>
             <a:ext uri="{C572A759-6A51-4108-AA02-DFA0A04FC94B}">
-              <ma14:wrappingTextBoxFlag xmlns:ma14="http://schemas.microsoft.com/office/mac/drawingml/2011/main" val="0"/>
+              <ma14:wrappingTextBoxFlag xmlns:ma14="http://schemas.microsoft.com/office/mac/drawingml/2011/main" xmlns="" val="0"/>
             </a:ext>
           </a:extLst>
         </p:spPr>
@@ -7924,7 +8167,7 @@
           <a:p>
             <a:pPr algn="r"/>
             <a:fld id="{F7021451-1387-4CA6-816F-3879F97B5CBC}" type="slidenum">
-              <a:rPr b="0" lang="en-US"/>
+              <a:rPr lang="en-US" b="0"/>
               <a:t>4</a:t>
             </a:fld>
             <a:endParaRPr lang="en-US"/>
@@ -7959,9 +8202,11 @@
       <p:sp>
         <p:nvSpPr>
           <p:cNvPr id="2" name="Text 0"/>
-          <p:cNvSpPr/>
+          <p:cNvSpPr>
+            <a:spLocks noGrp="1"/>
+          </p:cNvSpPr>
           <p:nvPr>
-            <p:ph idx="100" type="title" hasCustomPrompt="1"/>
+            <p:ph type="title" idx="100" hasCustomPrompt="1"/>
           </p:nvPr>
         </p:nvSpPr>
         <p:spPr>
@@ -7979,7 +8224,7 @@
           <a:bodyPr wrap="square" lIns="0" tIns="0" rIns="0" bIns="0" rtlCol="0" anchor="ctr"/>
           <a:lstStyle/>
           <a:p>
-            <a:pPr algn="l" indent="0" marL="0">
+            <a:pPr marL="0" indent="0" algn="l">
               <a:buNone/>
             </a:pPr>
             <a:r>
@@ -8020,6 +8265,13 @@
             <a:prstDash val="solid"/>
           </a:ln>
         </p:spPr>
+        <p:txBody>
+          <a:bodyPr/>
+          <a:lstStyle/>
+          <a:p>
+            <a:endParaRPr lang="en-US"/>
+          </a:p>
+        </p:txBody>
       </p:sp>
       <p:sp>
         <p:nvSpPr>
@@ -8045,6 +8297,13 @@
             <a:prstDash val="solid"/>
           </a:ln>
         </p:spPr>
+        <p:txBody>
+          <a:bodyPr/>
+          <a:lstStyle/>
+          <a:p>
+            <a:endParaRPr lang="en-US"/>
+          </a:p>
+        </p:txBody>
       </p:sp>
       <p:sp>
         <p:nvSpPr>
@@ -8067,7 +8326,7 @@
           <a:bodyPr wrap="square" lIns="0" tIns="0" rIns="0" bIns="0" rtlCol="0" anchor="t"/>
           <a:lstStyle/>
           <a:p>
-            <a:pPr indent="0" marL="0">
+            <a:pPr marL="0" indent="0">
               <a:buNone/>
             </a:pPr>
             <a:r>
@@ -8103,7 +8362,7 @@
           <a:bodyPr wrap="square" lIns="0" tIns="0" rIns="0" bIns="0" rtlCol="0" anchor="t"/>
           <a:lstStyle/>
           <a:p>
-            <a:pPr indent="0" marL="0">
+            <a:pPr marL="0" indent="0">
               <a:buNone/>
             </a:pPr>
             <a:r>
@@ -8144,6 +8403,13 @@
             <a:prstDash val="solid"/>
           </a:ln>
         </p:spPr>
+        <p:txBody>
+          <a:bodyPr/>
+          <a:lstStyle/>
+          <a:p>
+            <a:endParaRPr lang="en-US"/>
+          </a:p>
+        </p:txBody>
       </p:sp>
       <p:sp>
         <p:nvSpPr>
@@ -8169,6 +8435,13 @@
             <a:prstDash val="solid"/>
           </a:ln>
         </p:spPr>
+        <p:txBody>
+          <a:bodyPr/>
+          <a:lstStyle/>
+          <a:p>
+            <a:endParaRPr lang="en-US"/>
+          </a:p>
+        </p:txBody>
       </p:sp>
       <p:sp>
         <p:nvSpPr>
@@ -8191,7 +8464,7 @@
           <a:bodyPr wrap="square" lIns="0" tIns="0" rIns="0" bIns="0" rtlCol="0" anchor="t"/>
           <a:lstStyle/>
           <a:p>
-            <a:pPr indent="0" marL="0">
+            <a:pPr marL="0" indent="0">
               <a:buNone/>
             </a:pPr>
             <a:r>
@@ -8227,7 +8500,7 @@
           <a:bodyPr wrap="square" lIns="0" tIns="0" rIns="0" bIns="0" rtlCol="0" anchor="t"/>
           <a:lstStyle/>
           <a:p>
-            <a:pPr indent="0" marL="0">
+            <a:pPr marL="0" indent="0">
               <a:buNone/>
             </a:pPr>
             <a:r>
@@ -8268,6 +8541,13 @@
             <a:prstDash val="solid"/>
           </a:ln>
         </p:spPr>
+        <p:txBody>
+          <a:bodyPr/>
+          <a:lstStyle/>
+          <a:p>
+            <a:endParaRPr lang="en-US"/>
+          </a:p>
+        </p:txBody>
       </p:sp>
       <p:sp>
         <p:nvSpPr>
@@ -8293,6 +8573,13 @@
             <a:prstDash val="solid"/>
           </a:ln>
         </p:spPr>
+        <p:txBody>
+          <a:bodyPr/>
+          <a:lstStyle/>
+          <a:p>
+            <a:endParaRPr lang="en-US"/>
+          </a:p>
+        </p:txBody>
       </p:sp>
       <p:sp>
         <p:nvSpPr>
@@ -8315,7 +8602,7 @@
           <a:bodyPr wrap="square" lIns="0" tIns="0" rIns="0" bIns="0" rtlCol="0" anchor="t"/>
           <a:lstStyle/>
           <a:p>
-            <a:pPr indent="0" marL="0">
+            <a:pPr marL="0" indent="0">
               <a:buNone/>
             </a:pPr>
             <a:r>
@@ -8351,7 +8638,7 @@
           <a:bodyPr wrap="square" lIns="0" tIns="0" rIns="0" bIns="0" rtlCol="0" anchor="t"/>
           <a:lstStyle/>
           <a:p>
-            <a:pPr indent="0" marL="0">
+            <a:pPr marL="0" indent="0">
               <a:buNone/>
             </a:pPr>
             <a:r>
@@ -8392,6 +8679,13 @@
             <a:prstDash val="solid"/>
           </a:ln>
         </p:spPr>
+        <p:txBody>
+          <a:bodyPr/>
+          <a:lstStyle/>
+          <a:p>
+            <a:endParaRPr lang="en-US"/>
+          </a:p>
+        </p:txBody>
       </p:sp>
       <p:sp>
         <p:nvSpPr>
@@ -8417,6 +8711,13 @@
             <a:prstDash val="solid"/>
           </a:ln>
         </p:spPr>
+        <p:txBody>
+          <a:bodyPr/>
+          <a:lstStyle/>
+          <a:p>
+            <a:endParaRPr lang="en-US"/>
+          </a:p>
+        </p:txBody>
       </p:sp>
       <p:sp>
         <p:nvSpPr>
@@ -8439,7 +8740,7 @@
           <a:bodyPr wrap="square" lIns="0" tIns="0" rIns="0" bIns="0" rtlCol="0" anchor="t"/>
           <a:lstStyle/>
           <a:p>
-            <a:pPr indent="0" marL="0">
+            <a:pPr marL="0" indent="0">
               <a:buNone/>
             </a:pPr>
             <a:r>
@@ -8475,7 +8776,7 @@
           <a:bodyPr wrap="square" lIns="0" tIns="0" rIns="0" bIns="0" rtlCol="0" anchor="t"/>
           <a:lstStyle/>
           <a:p>
-            <a:pPr indent="0" marL="0">
+            <a:pPr marL="0" indent="0">
               <a:buNone/>
             </a:pPr>
             <a:r>
@@ -8516,6 +8817,13 @@
             <a:prstDash val="solid"/>
           </a:ln>
         </p:spPr>
+        <p:txBody>
+          <a:bodyPr/>
+          <a:lstStyle/>
+          <a:p>
+            <a:endParaRPr lang="en-US"/>
+          </a:p>
+        </p:txBody>
       </p:sp>
       <p:sp>
         <p:nvSpPr>
@@ -8541,6 +8849,13 @@
             <a:prstDash val="solid"/>
           </a:ln>
         </p:spPr>
+        <p:txBody>
+          <a:bodyPr/>
+          <a:lstStyle/>
+          <a:p>
+            <a:endParaRPr lang="en-US"/>
+          </a:p>
+        </p:txBody>
       </p:sp>
       <p:sp>
         <p:nvSpPr>
@@ -8563,7 +8878,7 @@
           <a:bodyPr wrap="square" lIns="0" tIns="0" rIns="0" bIns="0" rtlCol="0" anchor="ctr"/>
           <a:lstStyle/>
           <a:p>
-            <a:pPr indent="0" marL="0">
+            <a:pPr marL="0" indent="0">
               <a:buNone/>
             </a:pPr>
             <a:r>
@@ -8574,9 +8889,6 @@
               </a:rPr>
               <a:t>No future leakage: </a:t>
             </a:r>
-            <a:pPr indent="0" marL="0">
-              <a:buNone/>
-            </a:pPr>
             <a:r>
               <a:rPr lang="en-US" sz="1600" dirty="0">
                 <a:solidFill>
@@ -8591,55 +8903,7 @@
       </p:sp>
       <p:pic>
         <p:nvPicPr>
-          <p:cNvPr id="23" name="Base and category icon" descr="Base and category">    </p:cNvPr>
-          <p:cNvPicPr>
-            <a:picLocks noChangeAspect="1"/>
-          </p:cNvPicPr>
-          <p:nvPr/>
-        </p:nvPicPr>
-        <p:blipFill>
-          <a:blip r:embed="rId1"/>
-          <a:stretch>
-            <a:fillRect/>
-          </a:stretch>
-        </p:blipFill>
-        <p:spPr>
-          <a:xfrm>
-            <a:off x="1055218" y="1969618"/>
-            <a:ext cx="358445" cy="358445"/>
-          </a:xfrm>
-          <a:prstGeom prst="rect">
-            <a:avLst/>
-          </a:prstGeom>
-        </p:spPr>
-      </p:pic>
-      <p:pic>
-        <p:nvPicPr>
-          <p:cNvPr id="24" name="Time icon" descr="Time">    </p:cNvPr>
-          <p:cNvPicPr>
-            <a:picLocks noChangeAspect="1"/>
-          </p:cNvPicPr>
-          <p:nvPr/>
-        </p:nvPicPr>
-        <p:blipFill>
-          <a:blip r:embed="rId2"/>
-          <a:stretch>
-            <a:fillRect/>
-          </a:stretch>
-        </p:blipFill>
-        <p:spPr>
-          <a:xfrm>
-            <a:off x="3844138" y="1969618"/>
-            <a:ext cx="358445" cy="358445"/>
-          </a:xfrm>
-          <a:prstGeom prst="rect">
-            <a:avLst/>
-          </a:prstGeom>
-        </p:spPr>
-      </p:pic>
-      <p:pic>
-        <p:nvPicPr>
-          <p:cNvPr id="25" name="Distance icon" descr="Distance">    </p:cNvPr>
+          <p:cNvPr id="23" name="Base and category icon" descr="Base and category"/>
           <p:cNvPicPr>
             <a:picLocks noChangeAspect="1"/>
           </p:cNvPicPr>
@@ -8653,7 +8917,7 @@
         </p:blipFill>
         <p:spPr>
           <a:xfrm>
-            <a:off x="6633058" y="1969618"/>
+            <a:off x="1055218" y="1969618"/>
             <a:ext cx="358445" cy="358445"/>
           </a:xfrm>
           <a:prstGeom prst="rect">
@@ -8663,7 +8927,7 @@
       </p:pic>
       <p:pic>
         <p:nvPicPr>
-          <p:cNvPr id="26" name="History icon" descr="History">    </p:cNvPr>
+          <p:cNvPr id="24" name="Time icon" descr="Time"/>
           <p:cNvPicPr>
             <a:picLocks noChangeAspect="1"/>
           </p:cNvPicPr>
@@ -8677,7 +8941,7 @@
         </p:blipFill>
         <p:spPr>
           <a:xfrm>
-            <a:off x="9421978" y="1969618"/>
+            <a:off x="3844138" y="1969618"/>
             <a:ext cx="358445" cy="358445"/>
           </a:xfrm>
           <a:prstGeom prst="rect">
@@ -8687,7 +8951,7 @@
       </p:pic>
       <p:pic>
         <p:nvPicPr>
-          <p:cNvPr id="27" name="Strip icon" descr="Strip">    </p:cNvPr>
+          <p:cNvPr id="25" name="Distance icon" descr="Distance"/>
           <p:cNvPicPr>
             <a:picLocks noChangeAspect="1"/>
           </p:cNvPicPr>
@@ -8701,6 +8965,54 @@
         </p:blipFill>
         <p:spPr>
           <a:xfrm>
+            <a:off x="6633058" y="1969618"/>
+            <a:ext cx="358445" cy="358445"/>
+          </a:xfrm>
+          <a:prstGeom prst="rect">
+            <a:avLst/>
+          </a:prstGeom>
+        </p:spPr>
+      </p:pic>
+      <p:pic>
+        <p:nvPicPr>
+          <p:cNvPr id="26" name="History icon" descr="History"/>
+          <p:cNvPicPr>
+            <a:picLocks noChangeAspect="1"/>
+          </p:cNvPicPr>
+          <p:nvPr/>
+        </p:nvPicPr>
+        <p:blipFill>
+          <a:blip r:embed="rId6"/>
+          <a:stretch>
+            <a:fillRect/>
+          </a:stretch>
+        </p:blipFill>
+        <p:spPr>
+          <a:xfrm>
+            <a:off x="9421978" y="1969618"/>
+            <a:ext cx="358445" cy="358445"/>
+          </a:xfrm>
+          <a:prstGeom prst="rect">
+            <a:avLst/>
+          </a:prstGeom>
+        </p:spPr>
+      </p:pic>
+      <p:pic>
+        <p:nvPicPr>
+          <p:cNvPr id="27" name="Strip icon" descr="Strip"/>
+          <p:cNvPicPr>
+            <a:picLocks noChangeAspect="1"/>
+          </p:cNvPicPr>
+          <p:nvPr/>
+        </p:nvPicPr>
+        <p:blipFill>
+          <a:blip r:embed="rId7"/>
+          <a:stretch>
+            <a:fillRect/>
+          </a:stretch>
+        </p:blipFill>
+        <p:spPr>
+          <a:xfrm>
             <a:off x="1075334" y="5373014"/>
             <a:ext cx="409651" cy="409651"/>
           </a:xfrm>
@@ -8711,7 +9023,7 @@
       </p:pic>
       <p:sp>
         <p:nvSpPr>
-          <p:cNvPr id="25" name="Slide Number Placeholder 0"/>
+          <p:cNvPr id="3" name="Slide Number Placeholder 0"/>
           <p:cNvSpPr>
             <a:spLocks noGrp="1"/>
           </p:cNvSpPr>
@@ -8729,7 +9041,7 @@
           </a:prstGeom>
           <a:extLst>
             <a:ext uri="{C572A759-6A51-4108-AA02-DFA0A04FC94B}">
-              <ma14:wrappingTextBoxFlag xmlns:ma14="http://schemas.microsoft.com/office/mac/drawingml/2011/main" val="0"/>
+              <ma14:wrappingTextBoxFlag xmlns:ma14="http://schemas.microsoft.com/office/mac/drawingml/2011/main" xmlns="" val="0"/>
             </a:ext>
           </a:extLst>
         </p:spPr>
@@ -8747,7 +9059,7 @@
           <a:p>
             <a:pPr algn="r"/>
             <a:fld id="{F7021451-1387-4CA6-816F-3879F97B5CBC}" type="slidenum">
-              <a:rPr b="0" lang="en-US"/>
+              <a:rPr lang="en-US" b="0"/>
               <a:t>5</a:t>
             </a:fld>
             <a:endParaRPr lang="en-US"/>
@@ -8782,9 +9094,11 @@
       <p:sp>
         <p:nvSpPr>
           <p:cNvPr id="2" name="Text 0"/>
-          <p:cNvSpPr/>
+          <p:cNvSpPr>
+            <a:spLocks noGrp="1"/>
+          </p:cNvSpPr>
           <p:nvPr>
-            <p:ph idx="100" type="title" hasCustomPrompt="1"/>
+            <p:ph type="title" idx="100" hasCustomPrompt="1"/>
           </p:nvPr>
         </p:nvSpPr>
         <p:spPr>
@@ -8802,7 +9116,7 @@
           <a:bodyPr wrap="square" lIns="0" tIns="0" rIns="0" bIns="0" rtlCol="0" anchor="ctr"/>
           <a:lstStyle/>
           <a:p>
-            <a:pPr algn="l" indent="0" marL="0">
+            <a:pPr marL="0" indent="0" algn="l">
               <a:buNone/>
             </a:pPr>
             <a:r>
@@ -8838,7 +9152,7 @@
           <a:bodyPr wrap="square" lIns="0" tIns="0" rIns="0" bIns="0" rtlCol="0" anchor="t"/>
           <a:lstStyle/>
           <a:p>
-            <a:pPr indent="0" marL="0">
+            <a:pPr marL="0" indent="0">
               <a:buNone/>
             </a:pPr>
             <a:r>
@@ -8855,7 +9169,7 @@
       </p:sp>
       <p:graphicFrame>
         <p:nvGraphicFramePr>
-          <p:cNvPr id="5" name="Scree chart" descr=""/>
+          <p:cNvPr id="5" name="Scree chart"/>
           <p:cNvGraphicFramePr/>
           <p:nvPr/>
         </p:nvGraphicFramePr>
@@ -8863,9 +9177,9 @@
           <a:off x="640080" y="1783080"/>
           <a:ext cx="5486400" cy="3200400"/>
         </p:xfrm>
-        <a:graphic xmlns:a="http://schemas.openxmlformats.org/drawingml/2006/main">
+        <a:graphic>
           <a:graphicData uri="http://schemas.openxmlformats.org/drawingml/2006/chart">
-            <c:chart xmlns:c="http://schemas.openxmlformats.org/drawingml/2006/chart" r:id="rId1"/>
+            <c:chart xmlns:c="http://schemas.openxmlformats.org/drawingml/2006/chart" xmlns:r="http://schemas.openxmlformats.org/officeDocument/2006/relationships" r:id="rId3"/>
           </a:graphicData>
         </a:graphic>
       </p:graphicFrame>
@@ -8890,7 +9204,7 @@
           <a:bodyPr wrap="square" lIns="0" tIns="0" rIns="0" bIns="0" rtlCol="0" anchor="t"/>
           <a:lstStyle/>
           <a:p>
-            <a:pPr indent="0" marL="0">
+            <a:pPr marL="0" indent="0">
               <a:buNone/>
             </a:pPr>
             <a:r>
@@ -8907,14 +9221,14 @@
       </p:sp>
       <p:pic>
         <p:nvPicPr>
-          <p:cNvPr id="7" name="PCA scatter" descr="PCA projection of normal and fraud transactions">    </p:cNvPr>
+          <p:cNvPr id="7" name="PCA scatter" descr="PCA projection of normal and fraud transactions"/>
           <p:cNvPicPr>
             <a:picLocks noChangeAspect="1"/>
           </p:cNvPicPr>
           <p:nvPr/>
         </p:nvPicPr>
         <p:blipFill>
-          <a:blip r:embed="rId2"/>
+          <a:blip r:embed="rId4"/>
           <a:stretch>
             <a:fillRect/>
           </a:stretch>
@@ -8955,6 +9269,13 @@
             <a:prstDash val="solid"/>
           </a:ln>
         </p:spPr>
+        <p:txBody>
+          <a:bodyPr/>
+          <a:lstStyle/>
+          <a:p>
+            <a:endParaRPr lang="en-US"/>
+          </a:p>
+        </p:txBody>
       </p:sp>
       <p:sp>
         <p:nvSpPr>
@@ -8980,6 +9301,13 @@
             <a:prstDash val="solid"/>
           </a:ln>
         </p:spPr>
+        <p:txBody>
+          <a:bodyPr/>
+          <a:lstStyle/>
+          <a:p>
+            <a:endParaRPr lang="en-US"/>
+          </a:p>
+        </p:txBody>
       </p:sp>
       <p:sp>
         <p:nvSpPr>
@@ -9002,7 +9330,7 @@
           <a:bodyPr wrap="square" lIns="0" tIns="0" rIns="0" bIns="0" rtlCol="0" anchor="ctr"/>
           <a:lstStyle/>
           <a:p>
-            <a:pPr indent="0" marL="0">
+            <a:pPr marL="0" indent="0">
               <a:buNone/>
             </a:pPr>
             <a:r>
@@ -9013,9 +9341,6 @@
               </a:rPr>
               <a:t>25 of 31 components keep 95% of the variance. </a:t>
             </a:r>
-            <a:pPr indent="0" marL="0">
-              <a:buNone/>
-            </a:pPr>
             <a:r>
               <a:rPr lang="en-US" sz="1600" dirty="0">
                 <a:solidFill>
@@ -9030,14 +9355,14 @@
       </p:sp>
       <p:pic>
         <p:nvPicPr>
-          <p:cNvPr id="11" name="Strip icon" descr="Strip">    </p:cNvPr>
+          <p:cNvPr id="11" name="Strip icon" descr="Strip"/>
           <p:cNvPicPr>
             <a:picLocks noChangeAspect="1"/>
           </p:cNvPicPr>
           <p:nvPr/>
         </p:nvPicPr>
         <p:blipFill>
-          <a:blip r:embed="rId3"/>
+          <a:blip r:embed="rId5"/>
           <a:stretch>
             <a:fillRect/>
           </a:stretch>
@@ -9072,7 +9397,7 @@
           </a:prstGeom>
           <a:extLst>
             <a:ext uri="{C572A759-6A51-4108-AA02-DFA0A04FC94B}">
-              <ma14:wrappingTextBoxFlag xmlns:ma14="http://schemas.microsoft.com/office/mac/drawingml/2011/main" val="0"/>
+              <ma14:wrappingTextBoxFlag xmlns:ma14="http://schemas.microsoft.com/office/mac/drawingml/2011/main" xmlns="" val="0"/>
             </a:ext>
           </a:extLst>
         </p:spPr>
@@ -9090,7 +9415,7 @@
           <a:p>
             <a:pPr algn="r"/>
             <a:fld id="{F7021451-1387-4CA6-816F-3879F97B5CBC}" type="slidenum">
-              <a:rPr b="0" lang="en-US"/>
+              <a:rPr lang="en-US" b="0"/>
               <a:t>6</a:t>
             </a:fld>
             <a:endParaRPr lang="en-US"/>
@@ -9125,9 +9450,11 @@
       <p:sp>
         <p:nvSpPr>
           <p:cNvPr id="2" name="Text 0"/>
-          <p:cNvSpPr/>
+          <p:cNvSpPr>
+            <a:spLocks noGrp="1"/>
+          </p:cNvSpPr>
           <p:nvPr>
-            <p:ph idx="100" type="title" hasCustomPrompt="1"/>
+            <p:ph type="title" idx="100" hasCustomPrompt="1"/>
           </p:nvPr>
         </p:nvSpPr>
         <p:spPr>
@@ -9145,7 +9472,7 @@
           <a:bodyPr wrap="square" lIns="0" tIns="0" rIns="0" bIns="0" rtlCol="0" anchor="ctr"/>
           <a:lstStyle/>
           <a:p>
-            <a:pPr algn="l" indent="0" marL="0">
+            <a:pPr marL="0" indent="0" algn="l">
               <a:buNone/>
             </a:pPr>
             <a:r>
@@ -9181,7 +9508,7 @@
           <a:bodyPr wrap="square" lIns="0" tIns="0" rIns="0" bIns="0" rtlCol="0" anchor="t"/>
           <a:lstStyle/>
           <a:p>
-            <a:pPr indent="0" marL="0">
+            <a:pPr marL="0" indent="0">
               <a:buNone/>
             </a:pPr>
             <a:r>
@@ -9198,182 +9525,7 @@
       </p:sp>
       <p:pic>
         <p:nvPicPr>
-          <p:cNvPr id="5" name="tSNE scatter" descr="t-SNE embedding of fraud and normal transactions">    </p:cNvPr>
-          <p:cNvPicPr>
-            <a:picLocks noChangeAspect="1"/>
-          </p:cNvPicPr>
-          <p:nvPr/>
-        </p:nvPicPr>
-        <p:blipFill>
-          <a:blip r:embed="rId1"/>
-          <a:stretch>
-            <a:fillRect/>
-          </a:stretch>
-        </p:blipFill>
-        <p:spPr>
-          <a:xfrm>
-            <a:off x="640080" y="1783080"/>
-            <a:ext cx="4480560" cy="3182112"/>
-          </a:xfrm>
-          <a:prstGeom prst="rect">
-            <a:avLst/>
-          </a:prstGeom>
-        </p:spPr>
-      </p:pic>
-      <p:sp>
-        <p:nvSpPr>
-          <p:cNvPr id="6" name="Text 2"/>
-          <p:cNvSpPr txBox="1"/>
-          <p:nvPr/>
-        </p:nvSpPr>
-        <p:spPr>
-          <a:xfrm>
-            <a:off x="5943600" y="1371600"/>
-            <a:ext cx="5577840" cy="365760"/>
-          </a:xfrm>
-          <a:prstGeom prst="rect">
-            <a:avLst/>
-          </a:prstGeom>
-          <a:noFill/>
-          <a:ln/>
-        </p:spPr>
-        <p:txBody>
-          <a:bodyPr wrap="square" lIns="0" tIns="0" rIns="0" bIns="0" rtlCol="0" anchor="t"/>
-          <a:lstStyle/>
-          <a:p>
-            <a:pPr indent="0" marL="0">
-              <a:buNone/>
-            </a:pPr>
-            <a:r>
-              <a:rPr lang="en-US" sz="1500" b="1" dirty="0">
-                <a:solidFill>
-                  <a:schemeClr val="tx1"/>
-                </a:solidFill>
-              </a:rPr>
-              <a:t>Test PR-AUC with and without PCA inputs</a:t>
-            </a:r>
-            <a:endParaRPr lang="en-US" sz="1500" dirty="0"/>
-          </a:p>
-        </p:txBody>
-      </p:sp>
-      <p:graphicFrame>
-        <p:nvGraphicFramePr>
-          <p:cNvPr id="7" name="PCA models chart" descr=""/>
-          <p:cNvGraphicFramePr/>
-          <p:nvPr/>
-        </p:nvGraphicFramePr>
-        <p:xfrm>
-          <a:off x="5943600" y="1783080"/>
-          <a:ext cx="5577840" cy="3200400"/>
-        </p:xfrm>
-        <a:graphic xmlns:a="http://schemas.openxmlformats.org/drawingml/2006/main">
-          <a:graphicData uri="http://schemas.openxmlformats.org/drawingml/2006/chart">
-            <c:chart xmlns:c="http://schemas.openxmlformats.org/drawingml/2006/chart" r:id="rId2"/>
-          </a:graphicData>
-        </a:graphic>
-      </p:graphicFrame>
-      <p:sp>
-        <p:nvSpPr>
-          <p:cNvPr id="8" name="Strip"/>
-          <p:cNvSpPr/>
-          <p:nvPr/>
-        </p:nvSpPr>
-        <p:spPr>
-          <a:xfrm>
-            <a:off x="640080" y="5166360"/>
-            <a:ext cx="10881360" cy="1097280"/>
-          </a:xfrm>
-          <a:prstGeom prst="roundRect">
-            <a:avLst>
-              <a:gd name="adj" fmla="val 10000"/>
-            </a:avLst>
-          </a:prstGeom>
-          <a:solidFill>
-            <a:schemeClr val="bg2"/>
-          </a:solidFill>
-          <a:ln w="12700">
-            <a:solidFill>
-              <a:schemeClr val="bg2"/>
-            </a:solidFill>
-            <a:prstDash val="solid"/>
-          </a:ln>
-        </p:spPr>
-      </p:sp>
-      <p:sp>
-        <p:nvSpPr>
-          <p:cNvPr id="9" name="Strip circle"/>
-          <p:cNvSpPr/>
-          <p:nvPr/>
-        </p:nvSpPr>
-        <p:spPr>
-          <a:xfrm>
-            <a:off x="914400" y="5349240"/>
-            <a:ext cx="731520" cy="731520"/>
-          </a:xfrm>
-          <a:prstGeom prst="ellipse">
-            <a:avLst/>
-          </a:prstGeom>
-          <a:solidFill>
-            <a:schemeClr val="accent3"/>
-          </a:solidFill>
-          <a:ln w="12700">
-            <a:solidFill>
-              <a:schemeClr val="accent3"/>
-            </a:solidFill>
-            <a:prstDash val="solid"/>
-          </a:ln>
-        </p:spPr>
-      </p:sp>
-      <p:sp>
-        <p:nvSpPr>
-          <p:cNvPr id="10" name="Text 5"/>
-          <p:cNvSpPr txBox="1"/>
-          <p:nvPr/>
-        </p:nvSpPr>
-        <p:spPr>
-          <a:xfrm>
-            <a:off x="1920240" y="5349240"/>
-            <a:ext cx="9326880" cy="731520"/>
-          </a:xfrm>
-          <a:prstGeom prst="rect">
-            <a:avLst/>
-          </a:prstGeom>
-          <a:noFill/>
-          <a:ln/>
-        </p:spPr>
-        <p:txBody>
-          <a:bodyPr wrap="square" lIns="0" tIns="0" rIns="0" bIns="0" rtlCol="0" anchor="ctr"/>
-          <a:lstStyle/>
-          <a:p>
-            <a:pPr indent="0" marL="0">
-              <a:buNone/>
-            </a:pPr>
-            <a:r>
-              <a:rPr lang="en-US" sz="1600" b="1" dirty="0">
-                <a:solidFill>
-                  <a:schemeClr val="tx1"/>
-                </a:solidFill>
-              </a:rPr>
-              <a:t>Fraud forms local clusters (84% of a fraud point's 10 nearest neighbors are fraud). </a:t>
-            </a:r>
-            <a:pPr indent="0" marL="0">
-              <a:buNone/>
-            </a:pPr>
-            <a:r>
-              <a:rPr lang="en-US" sz="1600" dirty="0">
-                <a:solidFill>
-                  <a:schemeClr val="tx1"/>
-                </a:solidFill>
-              </a:rPr>
-              <a:t>Random forest keeps 0.70 of 0.76 after PCA on continuous inputs, but only 0.004 after PCA on all 31 features.</a:t>
-            </a:r>
-            <a:endParaRPr lang="en-US" sz="1600" dirty="0"/>
-          </a:p>
-        </p:txBody>
-      </p:sp>
-      <p:pic>
-        <p:nvPicPr>
-          <p:cNvPr id="11" name="Strip icon" descr="Strip">    </p:cNvPr>
+          <p:cNvPr id="5" name="tSNE scatter" descr="t-SNE embedding of fraud and normal transactions"/>
           <p:cNvPicPr>
             <a:picLocks noChangeAspect="1"/>
           </p:cNvPicPr>
@@ -9387,6 +9539,192 @@
         </p:blipFill>
         <p:spPr>
           <a:xfrm>
+            <a:off x="640080" y="1783080"/>
+            <a:ext cx="4480560" cy="3182112"/>
+          </a:xfrm>
+          <a:prstGeom prst="rect">
+            <a:avLst/>
+          </a:prstGeom>
+        </p:spPr>
+      </p:pic>
+      <p:sp>
+        <p:nvSpPr>
+          <p:cNvPr id="6" name="Text 2"/>
+          <p:cNvSpPr txBox="1"/>
+          <p:nvPr/>
+        </p:nvSpPr>
+        <p:spPr>
+          <a:xfrm>
+            <a:off x="5943600" y="1371600"/>
+            <a:ext cx="5577840" cy="365760"/>
+          </a:xfrm>
+          <a:prstGeom prst="rect">
+            <a:avLst/>
+          </a:prstGeom>
+          <a:noFill/>
+          <a:ln/>
+        </p:spPr>
+        <p:txBody>
+          <a:bodyPr wrap="square" lIns="0" tIns="0" rIns="0" bIns="0" rtlCol="0" anchor="t"/>
+          <a:lstStyle/>
+          <a:p>
+            <a:pPr marL="0" indent="0">
+              <a:buNone/>
+            </a:pPr>
+            <a:r>
+              <a:rPr lang="en-US" sz="1500" b="1" dirty="0">
+                <a:solidFill>
+                  <a:schemeClr val="tx1"/>
+                </a:solidFill>
+              </a:rPr>
+              <a:t>Test PR-AUC with and without PCA inputs</a:t>
+            </a:r>
+            <a:endParaRPr lang="en-US" sz="1500" dirty="0"/>
+          </a:p>
+        </p:txBody>
+      </p:sp>
+      <p:graphicFrame>
+        <p:nvGraphicFramePr>
+          <p:cNvPr id="7" name="PCA models chart"/>
+          <p:cNvGraphicFramePr/>
+          <p:nvPr/>
+        </p:nvGraphicFramePr>
+        <p:xfrm>
+          <a:off x="5943600" y="1783080"/>
+          <a:ext cx="5577840" cy="3200400"/>
+        </p:xfrm>
+        <a:graphic>
+          <a:graphicData uri="http://schemas.openxmlformats.org/drawingml/2006/chart">
+            <c:chart xmlns:c="http://schemas.openxmlformats.org/drawingml/2006/chart" xmlns:r="http://schemas.openxmlformats.org/officeDocument/2006/relationships" r:id="rId4"/>
+          </a:graphicData>
+        </a:graphic>
+      </p:graphicFrame>
+      <p:sp>
+        <p:nvSpPr>
+          <p:cNvPr id="8" name="Strip"/>
+          <p:cNvSpPr/>
+          <p:nvPr/>
+        </p:nvSpPr>
+        <p:spPr>
+          <a:xfrm>
+            <a:off x="640080" y="5166360"/>
+            <a:ext cx="10881360" cy="1097280"/>
+          </a:xfrm>
+          <a:prstGeom prst="roundRect">
+            <a:avLst>
+              <a:gd name="adj" fmla="val 10000"/>
+            </a:avLst>
+          </a:prstGeom>
+          <a:solidFill>
+            <a:schemeClr val="bg2"/>
+          </a:solidFill>
+          <a:ln w="12700">
+            <a:solidFill>
+              <a:schemeClr val="bg2"/>
+            </a:solidFill>
+            <a:prstDash val="solid"/>
+          </a:ln>
+        </p:spPr>
+        <p:txBody>
+          <a:bodyPr/>
+          <a:lstStyle/>
+          <a:p>
+            <a:endParaRPr lang="en-US"/>
+          </a:p>
+        </p:txBody>
+      </p:sp>
+      <p:sp>
+        <p:nvSpPr>
+          <p:cNvPr id="9" name="Strip circle"/>
+          <p:cNvSpPr/>
+          <p:nvPr/>
+        </p:nvSpPr>
+        <p:spPr>
+          <a:xfrm>
+            <a:off x="914400" y="5349240"/>
+            <a:ext cx="731520" cy="731520"/>
+          </a:xfrm>
+          <a:prstGeom prst="ellipse">
+            <a:avLst/>
+          </a:prstGeom>
+          <a:solidFill>
+            <a:schemeClr val="accent3"/>
+          </a:solidFill>
+          <a:ln w="12700">
+            <a:solidFill>
+              <a:schemeClr val="accent3"/>
+            </a:solidFill>
+            <a:prstDash val="solid"/>
+          </a:ln>
+        </p:spPr>
+        <p:txBody>
+          <a:bodyPr/>
+          <a:lstStyle/>
+          <a:p>
+            <a:endParaRPr lang="en-US"/>
+          </a:p>
+        </p:txBody>
+      </p:sp>
+      <p:sp>
+        <p:nvSpPr>
+          <p:cNvPr id="10" name="Text 5"/>
+          <p:cNvSpPr txBox="1"/>
+          <p:nvPr/>
+        </p:nvSpPr>
+        <p:spPr>
+          <a:xfrm>
+            <a:off x="1920240" y="5349240"/>
+            <a:ext cx="9326880" cy="731520"/>
+          </a:xfrm>
+          <a:prstGeom prst="rect">
+            <a:avLst/>
+          </a:prstGeom>
+          <a:noFill/>
+          <a:ln/>
+        </p:spPr>
+        <p:txBody>
+          <a:bodyPr wrap="square" lIns="0" tIns="0" rIns="0" bIns="0" rtlCol="0" anchor="ctr"/>
+          <a:lstStyle/>
+          <a:p>
+            <a:pPr marL="0" indent="0">
+              <a:buNone/>
+            </a:pPr>
+            <a:r>
+              <a:rPr lang="en-US" sz="1600" b="1" dirty="0">
+                <a:solidFill>
+                  <a:schemeClr val="tx1"/>
+                </a:solidFill>
+              </a:rPr>
+              <a:t>Fraud forms local clusters (84% of a fraud point's 10 nearest neighbors are fraud). </a:t>
+            </a:r>
+            <a:r>
+              <a:rPr lang="en-US" sz="1600" dirty="0">
+                <a:solidFill>
+                  <a:schemeClr val="tx1"/>
+                </a:solidFill>
+              </a:rPr>
+              <a:t>Random forest keeps 0.70 of 0.76 after PCA on continuous inputs, but only 0.004 after PCA on all 31 features.</a:t>
+            </a:r>
+            <a:endParaRPr lang="en-US" sz="1600" dirty="0"/>
+          </a:p>
+        </p:txBody>
+      </p:sp>
+      <p:pic>
+        <p:nvPicPr>
+          <p:cNvPr id="11" name="Strip icon" descr="Strip"/>
+          <p:cNvPicPr>
+            <a:picLocks noChangeAspect="1"/>
+          </p:cNvPicPr>
+          <p:nvPr/>
+        </p:nvPicPr>
+        <p:blipFill>
+          <a:blip r:embed="rId5"/>
+          <a:stretch>
+            <a:fillRect/>
+          </a:stretch>
+        </p:blipFill>
+        <p:spPr>
+          <a:xfrm>
             <a:off x="1075334" y="5510174"/>
             <a:ext cx="409651" cy="409651"/>
           </a:xfrm>
@@ -9415,7 +9753,7 @@
           </a:prstGeom>
           <a:extLst>
             <a:ext uri="{C572A759-6A51-4108-AA02-DFA0A04FC94B}">
-              <ma14:wrappingTextBoxFlag xmlns:ma14="http://schemas.microsoft.com/office/mac/drawingml/2011/main" val="0"/>
+              <ma14:wrappingTextBoxFlag xmlns:ma14="http://schemas.microsoft.com/office/mac/drawingml/2011/main" xmlns="" val="0"/>
             </a:ext>
           </a:extLst>
         </p:spPr>
@@ -9433,7 +9771,7 @@
           <a:p>
             <a:pPr algn="r"/>
             <a:fld id="{F7021451-1387-4CA6-816F-3879F97B5CBC}" type="slidenum">
-              <a:rPr b="0" lang="en-US"/>
+              <a:rPr lang="en-US" b="0"/>
               <a:t>7</a:t>
             </a:fld>
             <a:endParaRPr lang="en-US"/>
@@ -9468,9 +9806,11 @@
       <p:sp>
         <p:nvSpPr>
           <p:cNvPr id="2" name="Text 0"/>
-          <p:cNvSpPr/>
+          <p:cNvSpPr>
+            <a:spLocks noGrp="1"/>
+          </p:cNvSpPr>
           <p:nvPr>
-            <p:ph idx="100" type="title" hasCustomPrompt="1"/>
+            <p:ph type="title" idx="100" hasCustomPrompt="1"/>
           </p:nvPr>
         </p:nvSpPr>
         <p:spPr>
@@ -9488,7 +9828,7 @@
           <a:bodyPr wrap="square" lIns="0" tIns="0" rIns="0" bIns="0" rtlCol="0" anchor="ctr"/>
           <a:lstStyle/>
           <a:p>
-            <a:pPr algn="l" indent="0" marL="0">
+            <a:pPr marL="0" indent="0" algn="l">
               <a:buNone/>
             </a:pPr>
             <a:r>
@@ -9524,7 +9864,7 @@
           <a:bodyPr wrap="square" lIns="0" tIns="0" rIns="0" bIns="0" rtlCol="0" anchor="ctr"/>
           <a:lstStyle/>
           <a:p>
-            <a:pPr algn="ctr" indent="0" marL="0">
+            <a:pPr marL="0" indent="0" algn="ctr">
               <a:buNone/>
             </a:pPr>
             <a:r>
@@ -9560,7 +9900,7 @@
           <a:bodyPr wrap="square" lIns="0" tIns="0" rIns="0" bIns="0" rtlCol="0" anchor="ctr"/>
           <a:lstStyle/>
           <a:p>
-            <a:pPr algn="ctr" indent="0" marL="0">
+            <a:pPr marL="0" indent="0" algn="ctr">
               <a:buNone/>
             </a:pPr>
             <a:r>
@@ -9596,7 +9936,7 @@
           <a:bodyPr wrap="square" lIns="0" tIns="0" rIns="0" bIns="0" rtlCol="0" anchor="ctr"/>
           <a:lstStyle/>
           <a:p>
-            <a:pPr algn="ctr" indent="0" marL="0">
+            <a:pPr marL="0" indent="0" algn="ctr">
               <a:buNone/>
             </a:pPr>
             <a:r>
@@ -9632,7 +9972,7 @@
           <a:bodyPr wrap="square" lIns="0" tIns="0" rIns="0" bIns="0" rtlCol="0" anchor="ctr"/>
           <a:lstStyle/>
           <a:p>
-            <a:pPr algn="ctr" indent="0" marL="0">
+            <a:pPr marL="0" indent="0" algn="ctr">
               <a:buNone/>
             </a:pPr>
             <a:r>
@@ -9668,7 +10008,7 @@
           <a:bodyPr wrap="square" lIns="0" tIns="0" rIns="0" bIns="0" rtlCol="0" anchor="ctr"/>
           <a:lstStyle/>
           <a:p>
-            <a:pPr algn="ctr" indent="0" marL="0">
+            <a:pPr marL="0" indent="0" algn="ctr">
               <a:buNone/>
             </a:pPr>
             <a:r>
@@ -9704,7 +10044,7 @@
           <a:bodyPr wrap="square" lIns="0" tIns="0" rIns="0" bIns="0" rtlCol="0" anchor="ctr"/>
           <a:lstStyle/>
           <a:p>
-            <a:pPr algn="ctr" indent="0" marL="0">
+            <a:pPr marL="0" indent="0" algn="ctr">
               <a:buNone/>
             </a:pPr>
             <a:r>
@@ -9740,7 +10080,7 @@
           <a:bodyPr wrap="square" lIns="0" tIns="0" rIns="0" bIns="0" rtlCol="0" anchor="ctr"/>
           <a:lstStyle/>
           <a:p>
-            <a:pPr algn="ctr" indent="0" marL="0">
+            <a:pPr marL="0" indent="0" algn="ctr">
               <a:buNone/>
             </a:pPr>
             <a:r>
@@ -9776,7 +10116,7 @@
           <a:bodyPr wrap="square" lIns="0" tIns="0" rIns="0" bIns="0" rtlCol="0" anchor="ctr"/>
           <a:lstStyle/>
           <a:p>
-            <a:pPr indent="0" marL="0">
+            <a:pPr marL="0" indent="0">
               <a:buNone/>
             </a:pPr>
             <a:r>
@@ -9815,6 +10155,13 @@
             <a:prstDash val="solid"/>
           </a:ln>
         </p:spPr>
+        <p:txBody>
+          <a:bodyPr/>
+          <a:lstStyle/>
+          <a:p>
+            <a:endParaRPr lang="en-US"/>
+          </a:p>
+        </p:txBody>
       </p:sp>
       <p:sp>
         <p:nvSpPr>
@@ -9840,6 +10187,13 @@
             <a:prstDash val="solid"/>
           </a:ln>
         </p:spPr>
+        <p:txBody>
+          <a:bodyPr/>
+          <a:lstStyle/>
+          <a:p>
+            <a:endParaRPr lang="en-US"/>
+          </a:p>
+        </p:txBody>
       </p:sp>
       <p:sp>
         <p:nvSpPr>
@@ -9865,6 +10219,13 @@
             <a:prstDash val="solid"/>
           </a:ln>
         </p:spPr>
+        <p:txBody>
+          <a:bodyPr/>
+          <a:lstStyle/>
+          <a:p>
+            <a:endParaRPr lang="en-US"/>
+          </a:p>
+        </p:txBody>
       </p:sp>
       <p:sp>
         <p:nvSpPr>
@@ -9890,6 +10251,13 @@
             <a:prstDash val="solid"/>
           </a:ln>
         </p:spPr>
+        <p:txBody>
+          <a:bodyPr/>
+          <a:lstStyle/>
+          <a:p>
+            <a:endParaRPr lang="en-US"/>
+          </a:p>
+        </p:txBody>
       </p:sp>
       <p:sp>
         <p:nvSpPr>
@@ -9915,6 +10283,13 @@
             <a:prstDash val="solid"/>
           </a:ln>
         </p:spPr>
+        <p:txBody>
+          <a:bodyPr/>
+          <a:lstStyle/>
+          <a:p>
+            <a:endParaRPr lang="en-US"/>
+          </a:p>
+        </p:txBody>
       </p:sp>
       <p:sp>
         <p:nvSpPr>
@@ -9940,6 +10315,13 @@
             <a:prstDash val="solid"/>
           </a:ln>
         </p:spPr>
+        <p:txBody>
+          <a:bodyPr/>
+          <a:lstStyle/>
+          <a:p>
+            <a:endParaRPr lang="en-US"/>
+          </a:p>
+        </p:txBody>
       </p:sp>
       <p:sp>
         <p:nvSpPr>
@@ -9967,6 +10349,13 @@
             <a:prstDash val="solid"/>
           </a:ln>
         </p:spPr>
+        <p:txBody>
+          <a:bodyPr/>
+          <a:lstStyle/>
+          <a:p>
+            <a:endParaRPr lang="en-US"/>
+          </a:p>
+        </p:txBody>
       </p:sp>
       <p:sp>
         <p:nvSpPr>
@@ -9989,7 +10378,7 @@
           <a:bodyPr wrap="square" lIns="0" tIns="0" rIns="0" bIns="0" rtlCol="0" anchor="ctr"/>
           <a:lstStyle/>
           <a:p>
-            <a:pPr indent="0" marL="0">
+            <a:pPr marL="0" indent="0">
               <a:buNone/>
             </a:pPr>
             <a:r>
@@ -10028,6 +10417,13 @@
             <a:prstDash val="solid"/>
           </a:ln>
         </p:spPr>
+        <p:txBody>
+          <a:bodyPr/>
+          <a:lstStyle/>
+          <a:p>
+            <a:endParaRPr lang="en-US"/>
+          </a:p>
+        </p:txBody>
       </p:sp>
       <p:sp>
         <p:nvSpPr>
@@ -10053,6 +10449,13 @@
             <a:prstDash val="solid"/>
           </a:ln>
         </p:spPr>
+        <p:txBody>
+          <a:bodyPr/>
+          <a:lstStyle/>
+          <a:p>
+            <a:endParaRPr lang="en-US"/>
+          </a:p>
+        </p:txBody>
       </p:sp>
       <p:sp>
         <p:nvSpPr>
@@ -10078,6 +10481,13 @@
             <a:prstDash val="solid"/>
           </a:ln>
         </p:spPr>
+        <p:txBody>
+          <a:bodyPr/>
+          <a:lstStyle/>
+          <a:p>
+            <a:endParaRPr lang="en-US"/>
+          </a:p>
+        </p:txBody>
       </p:sp>
       <p:sp>
         <p:nvSpPr>
@@ -10103,6 +10513,13 @@
             <a:prstDash val="solid"/>
           </a:ln>
         </p:spPr>
+        <p:txBody>
+          <a:bodyPr/>
+          <a:lstStyle/>
+          <a:p>
+            <a:endParaRPr lang="en-US"/>
+          </a:p>
+        </p:txBody>
       </p:sp>
       <p:sp>
         <p:nvSpPr>
@@ -10128,6 +10545,13 @@
             <a:prstDash val="solid"/>
           </a:ln>
         </p:spPr>
+        <p:txBody>
+          <a:bodyPr/>
+          <a:lstStyle/>
+          <a:p>
+            <a:endParaRPr lang="en-US"/>
+          </a:p>
+        </p:txBody>
       </p:sp>
       <p:sp>
         <p:nvSpPr>
@@ -10153,6 +10577,13 @@
             <a:prstDash val="solid"/>
           </a:ln>
         </p:spPr>
+        <p:txBody>
+          <a:bodyPr/>
+          <a:lstStyle/>
+          <a:p>
+            <a:endParaRPr lang="en-US"/>
+          </a:p>
+        </p:txBody>
       </p:sp>
       <p:sp>
         <p:nvSpPr>
@@ -10180,6 +10611,13 @@
             <a:prstDash val="solid"/>
           </a:ln>
         </p:spPr>
+        <p:txBody>
+          <a:bodyPr/>
+          <a:lstStyle/>
+          <a:p>
+            <a:endParaRPr lang="en-US"/>
+          </a:p>
+        </p:txBody>
       </p:sp>
       <p:sp>
         <p:nvSpPr>
@@ -10202,7 +10640,7 @@
           <a:bodyPr wrap="square" lIns="0" tIns="0" rIns="0" bIns="0" rtlCol="0" anchor="ctr"/>
           <a:lstStyle/>
           <a:p>
-            <a:pPr indent="0" marL="0">
+            <a:pPr marL="0" indent="0">
               <a:buNone/>
             </a:pPr>
             <a:r>
@@ -10241,6 +10679,13 @@
             <a:prstDash val="solid"/>
           </a:ln>
         </p:spPr>
+        <p:txBody>
+          <a:bodyPr/>
+          <a:lstStyle/>
+          <a:p>
+            <a:endParaRPr lang="en-US"/>
+          </a:p>
+        </p:txBody>
       </p:sp>
       <p:sp>
         <p:nvSpPr>
@@ -10266,6 +10711,13 @@
             <a:prstDash val="solid"/>
           </a:ln>
         </p:spPr>
+        <p:txBody>
+          <a:bodyPr/>
+          <a:lstStyle/>
+          <a:p>
+            <a:endParaRPr lang="en-US"/>
+          </a:p>
+        </p:txBody>
       </p:sp>
       <p:sp>
         <p:nvSpPr>
@@ -10291,6 +10743,13 @@
             <a:prstDash val="solid"/>
           </a:ln>
         </p:spPr>
+        <p:txBody>
+          <a:bodyPr/>
+          <a:lstStyle/>
+          <a:p>
+            <a:endParaRPr lang="en-US"/>
+          </a:p>
+        </p:txBody>
       </p:sp>
       <p:sp>
         <p:nvSpPr>
@@ -10316,6 +10775,13 @@
             <a:prstDash val="solid"/>
           </a:ln>
         </p:spPr>
+        <p:txBody>
+          <a:bodyPr/>
+          <a:lstStyle/>
+          <a:p>
+            <a:endParaRPr lang="en-US"/>
+          </a:p>
+        </p:txBody>
       </p:sp>
       <p:sp>
         <p:nvSpPr>
@@ -10341,6 +10807,13 @@
             <a:prstDash val="solid"/>
           </a:ln>
         </p:spPr>
+        <p:txBody>
+          <a:bodyPr/>
+          <a:lstStyle/>
+          <a:p>
+            <a:endParaRPr lang="en-US"/>
+          </a:p>
+        </p:txBody>
       </p:sp>
       <p:sp>
         <p:nvSpPr>
@@ -10366,6 +10839,13 @@
             <a:prstDash val="solid"/>
           </a:ln>
         </p:spPr>
+        <p:txBody>
+          <a:bodyPr/>
+          <a:lstStyle/>
+          <a:p>
+            <a:endParaRPr lang="en-US"/>
+          </a:p>
+        </p:txBody>
       </p:sp>
       <p:sp>
         <p:nvSpPr>
@@ -10393,6 +10873,13 @@
             <a:prstDash val="solid"/>
           </a:ln>
         </p:spPr>
+        <p:txBody>
+          <a:bodyPr/>
+          <a:lstStyle/>
+          <a:p>
+            <a:endParaRPr lang="en-US"/>
+          </a:p>
+        </p:txBody>
       </p:sp>
       <p:sp>
         <p:nvSpPr>
@@ -10415,7 +10902,7 @@
           <a:bodyPr wrap="square" lIns="0" tIns="0" rIns="0" bIns="0" rtlCol="0" anchor="ctr"/>
           <a:lstStyle/>
           <a:p>
-            <a:pPr indent="0" marL="0">
+            <a:pPr marL="0" indent="0">
               <a:buNone/>
             </a:pPr>
             <a:r>
@@ -10454,6 +10941,13 @@
             <a:prstDash val="solid"/>
           </a:ln>
         </p:spPr>
+        <p:txBody>
+          <a:bodyPr/>
+          <a:lstStyle/>
+          <a:p>
+            <a:endParaRPr lang="en-US"/>
+          </a:p>
+        </p:txBody>
       </p:sp>
       <p:sp>
         <p:nvSpPr>
@@ -10479,6 +10973,13 @@
             <a:prstDash val="solid"/>
           </a:ln>
         </p:spPr>
+        <p:txBody>
+          <a:bodyPr/>
+          <a:lstStyle/>
+          <a:p>
+            <a:endParaRPr lang="en-US"/>
+          </a:p>
+        </p:txBody>
       </p:sp>
       <p:sp>
         <p:nvSpPr>
@@ -10504,6 +11005,13 @@
             <a:prstDash val="solid"/>
           </a:ln>
         </p:spPr>
+        <p:txBody>
+          <a:bodyPr/>
+          <a:lstStyle/>
+          <a:p>
+            <a:endParaRPr lang="en-US"/>
+          </a:p>
+        </p:txBody>
       </p:sp>
       <p:sp>
         <p:nvSpPr>
@@ -10529,6 +11037,13 @@
             <a:prstDash val="solid"/>
           </a:ln>
         </p:spPr>
+        <p:txBody>
+          <a:bodyPr/>
+          <a:lstStyle/>
+          <a:p>
+            <a:endParaRPr lang="en-US"/>
+          </a:p>
+        </p:txBody>
       </p:sp>
       <p:sp>
         <p:nvSpPr>
@@ -10554,6 +11069,13 @@
             <a:prstDash val="solid"/>
           </a:ln>
         </p:spPr>
+        <p:txBody>
+          <a:bodyPr/>
+          <a:lstStyle/>
+          <a:p>
+            <a:endParaRPr lang="en-US"/>
+          </a:p>
+        </p:txBody>
       </p:sp>
       <p:sp>
         <p:nvSpPr>
@@ -10579,6 +11101,13 @@
             <a:prstDash val="solid"/>
           </a:ln>
         </p:spPr>
+        <p:txBody>
+          <a:bodyPr/>
+          <a:lstStyle/>
+          <a:p>
+            <a:endParaRPr lang="en-US"/>
+          </a:p>
+        </p:txBody>
       </p:sp>
       <p:sp>
         <p:nvSpPr>
@@ -10606,6 +11135,13 @@
             <a:prstDash val="solid"/>
           </a:ln>
         </p:spPr>
+        <p:txBody>
+          <a:bodyPr/>
+          <a:lstStyle/>
+          <a:p>
+            <a:endParaRPr lang="en-US"/>
+          </a:p>
+        </p:txBody>
       </p:sp>
       <p:sp>
         <p:nvSpPr>
@@ -10628,7 +11164,7 @@
           <a:bodyPr wrap="square" lIns="0" tIns="0" rIns="0" bIns="0" rtlCol="0" anchor="ctr"/>
           <a:lstStyle/>
           <a:p>
-            <a:pPr indent="0" marL="0">
+            <a:pPr marL="0" indent="0">
               <a:buNone/>
             </a:pPr>
             <a:r>
@@ -10667,6 +11203,13 @@
             <a:prstDash val="solid"/>
           </a:ln>
         </p:spPr>
+        <p:txBody>
+          <a:bodyPr/>
+          <a:lstStyle/>
+          <a:p>
+            <a:endParaRPr lang="en-US"/>
+          </a:p>
+        </p:txBody>
       </p:sp>
       <p:sp>
         <p:nvSpPr>
@@ -10692,6 +11235,13 @@
             <a:prstDash val="solid"/>
           </a:ln>
         </p:spPr>
+        <p:txBody>
+          <a:bodyPr/>
+          <a:lstStyle/>
+          <a:p>
+            <a:endParaRPr lang="en-US"/>
+          </a:p>
+        </p:txBody>
       </p:sp>
       <p:sp>
         <p:nvSpPr>
@@ -10717,6 +11267,13 @@
             <a:prstDash val="solid"/>
           </a:ln>
         </p:spPr>
+        <p:txBody>
+          <a:bodyPr/>
+          <a:lstStyle/>
+          <a:p>
+            <a:endParaRPr lang="en-US"/>
+          </a:p>
+        </p:txBody>
       </p:sp>
       <p:sp>
         <p:nvSpPr>
@@ -10742,6 +11299,13 @@
             <a:prstDash val="solid"/>
           </a:ln>
         </p:spPr>
+        <p:txBody>
+          <a:bodyPr/>
+          <a:lstStyle/>
+          <a:p>
+            <a:endParaRPr lang="en-US"/>
+          </a:p>
+        </p:txBody>
       </p:sp>
       <p:sp>
         <p:nvSpPr>
@@ -10767,6 +11331,13 @@
             <a:prstDash val="solid"/>
           </a:ln>
         </p:spPr>
+        <p:txBody>
+          <a:bodyPr/>
+          <a:lstStyle/>
+          <a:p>
+            <a:endParaRPr lang="en-US"/>
+          </a:p>
+        </p:txBody>
       </p:sp>
       <p:sp>
         <p:nvSpPr>
@@ -10792,6 +11363,13 @@
             <a:prstDash val="solid"/>
           </a:ln>
         </p:spPr>
+        <p:txBody>
+          <a:bodyPr/>
+          <a:lstStyle/>
+          <a:p>
+            <a:endParaRPr lang="en-US"/>
+          </a:p>
+        </p:txBody>
       </p:sp>
       <p:sp>
         <p:nvSpPr>
@@ -10819,6 +11397,13 @@
             <a:prstDash val="solid"/>
           </a:ln>
         </p:spPr>
+        <p:txBody>
+          <a:bodyPr/>
+          <a:lstStyle/>
+          <a:p>
+            <a:endParaRPr lang="en-US"/>
+          </a:p>
+        </p:txBody>
       </p:sp>
       <p:sp>
         <p:nvSpPr>
@@ -10844,6 +11429,13 @@
             <a:prstDash val="solid"/>
           </a:ln>
         </p:spPr>
+        <p:txBody>
+          <a:bodyPr/>
+          <a:lstStyle/>
+          <a:p>
+            <a:endParaRPr lang="en-US"/>
+          </a:p>
+        </p:txBody>
       </p:sp>
       <p:sp>
         <p:nvSpPr>
@@ -10866,7 +11458,7 @@
           <a:bodyPr wrap="square" lIns="0" tIns="0" rIns="0" bIns="0" rtlCol="0" anchor="t"/>
           <a:lstStyle/>
           <a:p>
-            <a:pPr indent="0" marL="0">
+            <a:pPr marL="0" indent="0">
               <a:buNone/>
             </a:pPr>
             <a:r>
@@ -10905,6 +11497,13 @@
             <a:prstDash val="solid"/>
           </a:ln>
         </p:spPr>
+        <p:txBody>
+          <a:bodyPr/>
+          <a:lstStyle/>
+          <a:p>
+            <a:endParaRPr lang="en-US"/>
+          </a:p>
+        </p:txBody>
       </p:sp>
       <p:sp>
         <p:nvSpPr>
@@ -10927,7 +11526,7 @@
           <a:bodyPr wrap="square" lIns="0" tIns="0" rIns="0" bIns="0" rtlCol="0" anchor="t"/>
           <a:lstStyle/>
           <a:p>
-            <a:pPr indent="0" marL="0">
+            <a:pPr marL="0" indent="0">
               <a:buNone/>
             </a:pPr>
             <a:r>
@@ -10966,6 +11565,13 @@
             <a:prstDash val="solid"/>
           </a:ln>
         </p:spPr>
+        <p:txBody>
+          <a:bodyPr/>
+          <a:lstStyle/>
+          <a:p>
+            <a:endParaRPr lang="en-US"/>
+          </a:p>
+        </p:txBody>
       </p:sp>
       <p:sp>
         <p:nvSpPr>
@@ -10988,7 +11594,7 @@
           <a:bodyPr wrap="square" lIns="0" tIns="0" rIns="0" bIns="0" rtlCol="0" anchor="t"/>
           <a:lstStyle/>
           <a:p>
-            <a:pPr indent="0" marL="0">
+            <a:pPr marL="0" indent="0">
               <a:buNone/>
             </a:pPr>
             <a:r>
@@ -11029,6 +11635,13 @@
             <a:prstDash val="solid"/>
           </a:ln>
         </p:spPr>
+        <p:txBody>
+          <a:bodyPr/>
+          <a:lstStyle/>
+          <a:p>
+            <a:endParaRPr lang="en-US"/>
+          </a:p>
+        </p:txBody>
       </p:sp>
       <p:sp>
         <p:nvSpPr>
@@ -11051,7 +11664,7 @@
           <a:bodyPr wrap="square" lIns="0" tIns="0" rIns="0" bIns="0" rtlCol="0" anchor="t"/>
           <a:lstStyle/>
           <a:p>
-            <a:pPr indent="0" marL="0">
+            <a:pPr marL="0" indent="0">
               <a:buNone/>
             </a:pPr>
             <a:r>
@@ -11092,6 +11705,13 @@
             <a:prstDash val="solid"/>
           </a:ln>
         </p:spPr>
+        <p:txBody>
+          <a:bodyPr/>
+          <a:lstStyle/>
+          <a:p>
+            <a:endParaRPr lang="en-US"/>
+          </a:p>
+        </p:txBody>
       </p:sp>
       <p:sp>
         <p:nvSpPr>
@@ -11117,6 +11737,13 @@
             <a:prstDash val="solid"/>
           </a:ln>
         </p:spPr>
+        <p:txBody>
+          <a:bodyPr/>
+          <a:lstStyle/>
+          <a:p>
+            <a:endParaRPr lang="en-US"/>
+          </a:p>
+        </p:txBody>
       </p:sp>
       <p:sp>
         <p:nvSpPr>
@@ -11139,7 +11766,7 @@
           <a:bodyPr wrap="square" lIns="0" tIns="0" rIns="0" bIns="0" rtlCol="0" anchor="ctr"/>
           <a:lstStyle/>
           <a:p>
-            <a:pPr indent="0" marL="0">
+            <a:pPr marL="0" indent="0">
               <a:buNone/>
             </a:pPr>
             <a:r>
@@ -11150,9 +11777,6 @@
               </a:rPr>
               <a:t>Mean PR-AUC across the 5 folds: </a:t>
             </a:r>
-            <a:pPr indent="0" marL="0">
-              <a:buNone/>
-            </a:pPr>
             <a:r>
               <a:rPr lang="en-US" sz="1600" dirty="0">
                 <a:solidFill>
@@ -11167,14 +11791,14 @@
       </p:sp>
       <p:pic>
         <p:nvPicPr>
-          <p:cNvPr id="62" name="Strip icon" descr="Strip">    </p:cNvPr>
+          <p:cNvPr id="62" name="Strip icon" descr="Strip"/>
           <p:cNvPicPr>
             <a:picLocks noChangeAspect="1"/>
           </p:cNvPicPr>
           <p:nvPr/>
         </p:nvPicPr>
         <p:blipFill>
-          <a:blip r:embed="rId1"/>
+          <a:blip r:embed="rId3"/>
           <a:stretch>
             <a:fillRect/>
           </a:stretch>
@@ -11191,7 +11815,7 @@
       </p:pic>
       <p:sp>
         <p:nvSpPr>
-          <p:cNvPr id="25" name="Slide Number Placeholder 0"/>
+          <p:cNvPr id="3" name="Slide Number Placeholder 0"/>
           <p:cNvSpPr>
             <a:spLocks noGrp="1"/>
           </p:cNvSpPr>
@@ -11209,7 +11833,7 @@
           </a:prstGeom>
           <a:extLst>
             <a:ext uri="{C572A759-6A51-4108-AA02-DFA0A04FC94B}">
-              <ma14:wrappingTextBoxFlag xmlns:ma14="http://schemas.microsoft.com/office/mac/drawingml/2011/main" val="0"/>
+              <ma14:wrappingTextBoxFlag xmlns:ma14="http://schemas.microsoft.com/office/mac/drawingml/2011/main" xmlns="" val="0"/>
             </a:ext>
           </a:extLst>
         </p:spPr>
@@ -11227,7 +11851,7 @@
           <a:p>
             <a:pPr algn="r"/>
             <a:fld id="{F7021451-1387-4CA6-816F-3879F97B5CBC}" type="slidenum">
-              <a:rPr b="0" lang="en-US"/>
+              <a:rPr lang="en-US" b="0"/>
               <a:t>8</a:t>
             </a:fld>
             <a:endParaRPr lang="en-US"/>
@@ -11262,9 +11886,11 @@
       <p:sp>
         <p:nvSpPr>
           <p:cNvPr id="2" name="Text 0"/>
-          <p:cNvSpPr/>
+          <p:cNvSpPr>
+            <a:spLocks noGrp="1"/>
+          </p:cNvSpPr>
           <p:nvPr>
-            <p:ph idx="100" type="title" hasCustomPrompt="1"/>
+            <p:ph type="title" idx="100" hasCustomPrompt="1"/>
           </p:nvPr>
         </p:nvSpPr>
         <p:spPr>
@@ -11282,7 +11908,7 @@
           <a:bodyPr wrap="square" lIns="0" tIns="0" rIns="0" bIns="0" rtlCol="0" anchor="ctr"/>
           <a:lstStyle/>
           <a:p>
-            <a:pPr algn="l" indent="0" marL="0">
+            <a:pPr marL="0" indent="0" algn="l">
               <a:buNone/>
             </a:pPr>
             <a:r>
@@ -11299,7 +11925,7 @@
       </p:sp>
       <p:graphicFrame>
         <p:nvGraphicFramePr>
-          <p:cNvPr id="4" name="Model chart" descr=""/>
+          <p:cNvPr id="4" name="Model chart"/>
           <p:cNvGraphicFramePr/>
           <p:nvPr/>
         </p:nvGraphicFramePr>
@@ -11307,9 +11933,9 @@
           <a:off x="640080" y="1463040"/>
           <a:ext cx="7498080" cy="4480560"/>
         </p:xfrm>
-        <a:graphic xmlns:a="http://schemas.openxmlformats.org/drawingml/2006/main">
+        <a:graphic>
           <a:graphicData uri="http://schemas.openxmlformats.org/drawingml/2006/chart">
-            <c:chart xmlns:c="http://schemas.openxmlformats.org/drawingml/2006/chart" r:id="rId1"/>
+            <c:chart xmlns:c="http://schemas.openxmlformats.org/drawingml/2006/chart" xmlns:r="http://schemas.openxmlformats.org/officeDocument/2006/relationships" r:id="rId3"/>
           </a:graphicData>
         </a:graphic>
       </p:graphicFrame>
@@ -11339,6 +11965,13 @@
             <a:prstDash val="solid"/>
           </a:ln>
         </p:spPr>
+        <p:txBody>
+          <a:bodyPr/>
+          <a:lstStyle/>
+          <a:p>
+            <a:endParaRPr lang="en-US"/>
+          </a:p>
+        </p:txBody>
       </p:sp>
       <p:sp>
         <p:nvSpPr>
@@ -11361,7 +11994,7 @@
           <a:bodyPr wrap="square" lIns="0" tIns="0" rIns="0" bIns="0" rtlCol="0" anchor="t"/>
           <a:lstStyle/>
           <a:p>
-            <a:pPr indent="0" marL="0">
+            <a:pPr marL="0" indent="0">
               <a:buNone/>
             </a:pPr>
             <a:r>
@@ -11397,7 +12030,7 @@
           <a:bodyPr wrap="square" lIns="0" tIns="0" rIns="0" bIns="0" rtlCol="0" anchor="t"/>
           <a:lstStyle/>
           <a:p>
-            <a:pPr indent="0" marL="0">
+            <a:pPr marL="0" indent="0">
               <a:buNone/>
             </a:pPr>
             <a:r>
@@ -11432,7 +12065,7 @@
           </a:prstGeom>
           <a:extLst>
             <a:ext uri="{C572A759-6A51-4108-AA02-DFA0A04FC94B}">
-              <ma14:wrappingTextBoxFlag xmlns:ma14="http://schemas.microsoft.com/office/mac/drawingml/2011/main" val="0"/>
+              <ma14:wrappingTextBoxFlag xmlns:ma14="http://schemas.microsoft.com/office/mac/drawingml/2011/main" xmlns="" val="0"/>
             </a:ext>
           </a:extLst>
         </p:spPr>
@@ -11450,7 +12083,7 @@
           <a:p>
             <a:pPr algn="r"/>
             <a:fld id="{F7021451-1387-4CA6-816F-3879F97B5CBC}" type="slidenum">
-              <a:rPr b="0" lang="en-US"/>
+              <a:rPr lang="en-US" b="0"/>
               <a:t>9</a:t>
             </a:fld>
             <a:endParaRPr lang="en-US"/>
@@ -11758,4 +12391,319 @@
     </a:ext>
   </a:extLst>
 </a:theme>
+</file>
+
+<file path=ppt/theme/theme2.xml><?xml version="1.0" encoding="utf-8"?>
+<a:theme xmlns:a="http://schemas.openxmlformats.org/drawingml/2006/main" name="Office Theme">
+  <a:themeElements>
+    <a:clrScheme name="Office">
+      <a:dk1>
+        <a:sysClr val="windowText" lastClr="000000"/>
+      </a:dk1>
+      <a:lt1>
+        <a:sysClr val="window" lastClr="FFFFFF"/>
+      </a:lt1>
+      <a:dk2>
+        <a:srgbClr val="0E2841"/>
+      </a:dk2>
+      <a:lt2>
+        <a:srgbClr val="E8E8E8"/>
+      </a:lt2>
+      <a:accent1>
+        <a:srgbClr val="156082"/>
+      </a:accent1>
+      <a:accent2>
+        <a:srgbClr val="E97132"/>
+      </a:accent2>
+      <a:accent3>
+        <a:srgbClr val="196B24"/>
+      </a:accent3>
+      <a:accent4>
+        <a:srgbClr val="0F9ED5"/>
+      </a:accent4>
+      <a:accent5>
+        <a:srgbClr val="A02B93"/>
+      </a:accent5>
+      <a:accent6>
+        <a:srgbClr val="4EA72E"/>
+      </a:accent6>
+      <a:hlink>
+        <a:srgbClr val="467886"/>
+      </a:hlink>
+      <a:folHlink>
+        <a:srgbClr val="96607D"/>
+      </a:folHlink>
+    </a:clrScheme>
+    <a:fontScheme name="Office">
+      <a:majorFont>
+        <a:latin typeface="Aptos Display" panose="02110004020202020204"/>
+        <a:ea typeface=""/>
+        <a:cs typeface=""/>
+        <a:font script="Jpan" typeface="游ゴシック Light"/>
+        <a:font script="Hang" typeface="맑은 고딕"/>
+        <a:font script="Hans" typeface="等线 Light"/>
+        <a:font script="Hant" typeface="新細明體"/>
+        <a:font script="Arab" typeface="Times New Roman"/>
+        <a:font script="Hebr" typeface="Times New Roman"/>
+        <a:font script="Thai" typeface="Angsana New"/>
+        <a:font script="Ethi" typeface="Nyala"/>
+        <a:font script="Beng" typeface="Vrinda"/>
+        <a:font script="Gujr" typeface="Shruti"/>
+        <a:font script="Khmr" typeface="MoolBoran"/>
+        <a:font script="Knda" typeface="Tunga"/>
+        <a:font script="Guru" typeface="Raavi"/>
+        <a:font script="Cans" typeface="Euphemia"/>
+        <a:font script="Cher" typeface="Plantagenet Cherokee"/>
+        <a:font script="Yiii" typeface="Microsoft Yi Baiti"/>
+        <a:font script="Tibt" typeface="Microsoft Himalaya"/>
+        <a:font script="Thaa" typeface="MV Boli"/>
+        <a:font script="Deva" typeface="Mangal"/>
+        <a:font script="Telu" typeface="Gautami"/>
+        <a:font script="Taml" typeface="Latha"/>
+        <a:font script="Syrc" typeface="Estrangelo Edessa"/>
+        <a:font script="Orya" typeface="Kalinga"/>
+        <a:font script="Mlym" typeface="Kartika"/>
+        <a:font script="Laoo" typeface="DokChampa"/>
+        <a:font script="Sinh" typeface="Iskoola Pota"/>
+        <a:font script="Mong" typeface="Mongolian Baiti"/>
+        <a:font script="Viet" typeface="Times New Roman"/>
+        <a:font script="Uigh" typeface="Microsoft Uighur"/>
+        <a:font script="Geor" typeface="Sylfaen"/>
+        <a:font script="Armn" typeface="Arial"/>
+        <a:font script="Bugi" typeface="Leelawadee UI"/>
+        <a:font script="Bopo" typeface="Microsoft JhengHei"/>
+        <a:font script="Java" typeface="Javanese Text"/>
+        <a:font script="Lisu" typeface="Segoe UI"/>
+        <a:font script="Mymr" typeface="Myanmar Text"/>
+        <a:font script="Nkoo" typeface="Ebrima"/>
+        <a:font script="Olck" typeface="Nirmala UI"/>
+        <a:font script="Osma" typeface="Ebrima"/>
+        <a:font script="Phag" typeface="Phagspa"/>
+        <a:font script="Syrn" typeface="Estrangelo Edessa"/>
+        <a:font script="Syrj" typeface="Estrangelo Edessa"/>
+        <a:font script="Syre" typeface="Estrangelo Edessa"/>
+        <a:font script="Sora" typeface="Nirmala UI"/>
+        <a:font script="Tale" typeface="Microsoft Tai Le"/>
+        <a:font script="Talu" typeface="Microsoft New Tai Lue"/>
+        <a:font script="Tfng" typeface="Ebrima"/>
+      </a:majorFont>
+      <a:minorFont>
+        <a:latin typeface="Aptos" panose="02110004020202020204"/>
+        <a:ea typeface=""/>
+        <a:cs typeface=""/>
+        <a:font script="Jpan" typeface="游ゴシック"/>
+        <a:font script="Hang" typeface="맑은 고딕"/>
+        <a:font script="Hans" typeface="等线"/>
+        <a:font script="Hant" typeface="新細明體"/>
+        <a:font script="Arab" typeface="Arial"/>
+        <a:font script="Hebr" typeface="Arial"/>
+        <a:font script="Thai" typeface="Cordia New"/>
+        <a:font script="Ethi" typeface="Nyala"/>
+        <a:font script="Beng" typeface="Vrinda"/>
+        <a:font script="Gujr" typeface="Shruti"/>
+        <a:font script="Khmr" typeface="DaunPenh"/>
+        <a:font script="Knda" typeface="Tunga"/>
+        <a:font script="Guru" typeface="Raavi"/>
+        <a:font script="Cans" typeface="Euphemia"/>
+        <a:font script="Cher" typeface="Plantagenet Cherokee"/>
+        <a:font script="Yiii" typeface="Microsoft Yi Baiti"/>
+        <a:font script="Tibt" typeface="Microsoft Himalaya"/>
+        <a:font script="Thaa" typeface="MV Boli"/>
+        <a:font script="Deva" typeface="Mangal"/>
+        <a:font script="Telu" typeface="Gautami"/>
+        <a:font script="Taml" typeface="Latha"/>
+        <a:font script="Syrc" typeface="Estrangelo Edessa"/>
+        <a:font script="Orya" typeface="Kalinga"/>
+        <a:font script="Mlym" typeface="Kartika"/>
+        <a:font script="Laoo" typeface="DokChampa"/>
+        <a:font script="Sinh" typeface="Iskoola Pota"/>
+        <a:font script="Mong" typeface="Mongolian Baiti"/>
+        <a:font script="Viet" typeface="Arial"/>
+        <a:font script="Uigh" typeface="Microsoft Uighur"/>
+        <a:font script="Geor" typeface="Sylfaen"/>
+        <a:font script="Armn" typeface="Arial"/>
+        <a:font script="Bugi" typeface="Leelawadee UI"/>
+        <a:font script="Bopo" typeface="Microsoft JhengHei"/>
+        <a:font script="Java" typeface="Javanese Text"/>
+        <a:font script="Lisu" typeface="Segoe UI"/>
+        <a:font script="Mymr" typeface="Myanmar Text"/>
+        <a:font script="Nkoo" typeface="Ebrima"/>
+        <a:font script="Olck" typeface="Nirmala UI"/>
+        <a:font script="Osma" typeface="Ebrima"/>
+        <a:font script="Phag" typeface="Phagspa"/>
+        <a:font script="Syrn" typeface="Estrangelo Edessa"/>
+        <a:font script="Syrj" typeface="Estrangelo Edessa"/>
+        <a:font script="Syre" typeface="Estrangelo Edessa"/>
+        <a:font script="Sora" typeface="Nirmala UI"/>
+        <a:font script="Tale" typeface="Microsoft Tai Le"/>
+        <a:font script="Talu" typeface="Microsoft New Tai Lue"/>
+        <a:font script="Tfng" typeface="Ebrima"/>
+      </a:minorFont>
+    </a:fontScheme>
+    <a:fmtScheme name="Office">
+      <a:fillStyleLst>
+        <a:solidFill>
+          <a:schemeClr val="phClr"/>
+        </a:solidFill>
+        <a:gradFill rotWithShape="1">
+          <a:gsLst>
+            <a:gs pos="0">
+              <a:schemeClr val="phClr">
+                <a:lumMod val="110000"/>
+                <a:satMod val="105000"/>
+                <a:tint val="67000"/>
+              </a:schemeClr>
+            </a:gs>
+            <a:gs pos="50000">
+              <a:schemeClr val="phClr">
+                <a:lumMod val="105000"/>
+                <a:satMod val="103000"/>
+                <a:tint val="73000"/>
+              </a:schemeClr>
+            </a:gs>
+            <a:gs pos="100000">
+              <a:schemeClr val="phClr">
+                <a:lumMod val="105000"/>
+                <a:satMod val="109000"/>
+                <a:tint val="81000"/>
+              </a:schemeClr>
+            </a:gs>
+          </a:gsLst>
+          <a:lin ang="5400000" scaled="0"/>
+        </a:gradFill>
+        <a:gradFill rotWithShape="1">
+          <a:gsLst>
+            <a:gs pos="0">
+              <a:schemeClr val="phClr">
+                <a:satMod val="103000"/>
+                <a:lumMod val="102000"/>
+                <a:tint val="94000"/>
+              </a:schemeClr>
+            </a:gs>
+            <a:gs pos="50000">
+              <a:schemeClr val="phClr">
+                <a:satMod val="110000"/>
+                <a:lumMod val="100000"/>
+                <a:shade val="100000"/>
+              </a:schemeClr>
+            </a:gs>
+            <a:gs pos="100000">
+              <a:schemeClr val="phClr">
+                <a:lumMod val="99000"/>
+                <a:satMod val="120000"/>
+                <a:shade val="78000"/>
+              </a:schemeClr>
+            </a:gs>
+          </a:gsLst>
+          <a:lin ang="5400000" scaled="0"/>
+        </a:gradFill>
+      </a:fillStyleLst>
+      <a:lnStyleLst>
+        <a:ln w="12700" cap="flat" cmpd="sng" algn="ctr">
+          <a:solidFill>
+            <a:schemeClr val="phClr"/>
+          </a:solidFill>
+          <a:prstDash val="solid"/>
+          <a:miter lim="800000"/>
+        </a:ln>
+        <a:ln w="19050" cap="flat" cmpd="sng" algn="ctr">
+          <a:solidFill>
+            <a:schemeClr val="phClr"/>
+          </a:solidFill>
+          <a:prstDash val="solid"/>
+          <a:miter lim="800000"/>
+        </a:ln>
+        <a:ln w="25400" cap="flat" cmpd="sng" algn="ctr">
+          <a:solidFill>
+            <a:schemeClr val="phClr"/>
+          </a:solidFill>
+          <a:prstDash val="solid"/>
+          <a:miter lim="800000"/>
+        </a:ln>
+      </a:lnStyleLst>
+      <a:effectStyleLst>
+        <a:effectStyle>
+          <a:effectLst/>
+        </a:effectStyle>
+        <a:effectStyle>
+          <a:effectLst/>
+        </a:effectStyle>
+        <a:effectStyle>
+          <a:effectLst>
+            <a:outerShdw blurRad="57150" dist="19050" dir="5400000" algn="ctr" rotWithShape="0">
+              <a:srgbClr val="000000">
+                <a:alpha val="63000"/>
+              </a:srgbClr>
+            </a:outerShdw>
+          </a:effectLst>
+        </a:effectStyle>
+      </a:effectStyleLst>
+      <a:bgFillStyleLst>
+        <a:solidFill>
+          <a:schemeClr val="phClr"/>
+        </a:solidFill>
+        <a:solidFill>
+          <a:schemeClr val="phClr">
+            <a:tint val="95000"/>
+            <a:satMod val="170000"/>
+          </a:schemeClr>
+        </a:solidFill>
+        <a:gradFill rotWithShape="1">
+          <a:gsLst>
+            <a:gs pos="0">
+              <a:schemeClr val="phClr">
+                <a:tint val="93000"/>
+                <a:satMod val="150000"/>
+                <a:shade val="98000"/>
+                <a:lumMod val="102000"/>
+              </a:schemeClr>
+            </a:gs>
+            <a:gs pos="50000">
+              <a:schemeClr val="phClr">
+                <a:tint val="98000"/>
+                <a:satMod val="130000"/>
+                <a:shade val="90000"/>
+                <a:lumMod val="103000"/>
+              </a:schemeClr>
+            </a:gs>
+            <a:gs pos="100000">
+              <a:schemeClr val="phClr">
+                <a:shade val="63000"/>
+                <a:satMod val="120000"/>
+              </a:schemeClr>
+            </a:gs>
+          </a:gsLst>
+          <a:lin ang="5400000" scaled="0"/>
+        </a:gradFill>
+      </a:bgFillStyleLst>
+    </a:fmtScheme>
+  </a:themeElements>
+  <a:objectDefaults>
+    <a:lnDef>
+      <a:spPr/>
+      <a:bodyPr/>
+      <a:lstStyle/>
+      <a:style>
+        <a:lnRef idx="2">
+          <a:schemeClr val="accent1"/>
+        </a:lnRef>
+        <a:fillRef idx="0">
+          <a:schemeClr val="accent1"/>
+        </a:fillRef>
+        <a:effectRef idx="1">
+          <a:schemeClr val="accent1"/>
+        </a:effectRef>
+        <a:fontRef idx="minor">
+          <a:schemeClr val="tx1"/>
+        </a:fontRef>
+      </a:style>
+    </a:lnDef>
+  </a:objectDefaults>
+  <a:extraClrSchemeLst/>
+  <a:extLst>
+    <a:ext uri="{05A4C25C-085E-4340-85A3-A5531E510DB2}">
+      <thm15:themeFamily xmlns:thm15="http://schemas.microsoft.com/office/thememl/2012/main" name="Office Theme" id="{2E142A2C-CD16-42D6-873A-C26D2A0506FA}" vid="{1BDDFF52-6CD6-40A5-AB3C-68EB2F1E4D0A}"/>
+    </a:ext>
+  </a:extLst>
+</a:theme>
 </file>